--- a/Binder Design Agent.pptx
+++ b/Binder Design Agent.pptx
@@ -14,9 +14,10 @@
     <p:sldId id="262" r:id="rId8"/>
     <p:sldId id="263" r:id="rId9"/>
     <p:sldId id="264" r:id="rId10"/>
+    <p:sldId id="265" r:id="rId11"/>
   </p:sldIdLst>
   <p:notesMasterIdLst>
-    <p:notesMasterId r:id="rId11"/>
+    <p:notesMasterId r:id="rId12"/>
   </p:notesMasterIdLst>
   <p:sldSz cx="12192000" cy="6858000"/>
   <p:notesSz cx="6858000" cy="12192000"/>
@@ -552,6 +553,94 @@
 </p:notes>
 </file>
 
+<file path=ppt/notesSlides/notesSlide10.xml><?xml version="1.0" encoding="utf-8"?>
+<p:notes xmlns:a="http://schemas.openxmlformats.org/drawingml/2006/main" xmlns:r="http://schemas.openxmlformats.org/officeDocument/2006/relationships" xmlns:p="http://schemas.openxmlformats.org/presentationml/2006/main">
+  <p:cSld>
+    <p:spTree>
+      <p:nvGrpSpPr>
+        <p:cNvPr id="1" name=""/>
+        <p:cNvGrpSpPr/>
+        <p:nvPr/>
+      </p:nvGrpSpPr>
+      <p:grpSpPr>
+        <a:xfrm>
+          <a:off x="0" y="0"/>
+          <a:ext cx="0" cy="0"/>
+          <a:chOff x="0" y="0"/>
+          <a:chExt cx="0" cy="0"/>
+        </a:xfrm>
+      </p:grpSpPr>
+      <p:sp>
+        <p:nvSpPr>
+          <p:cNvPr id="2" name="Slide Image Placeholder 1"/>
+          <p:cNvSpPr>
+            <a:spLocks noGrp="1" noRot="1" noChangeAspect="1"/>
+          </p:cNvSpPr>
+          <p:nvPr>
+            <p:ph type="sldImg"/>
+          </p:nvPr>
+        </p:nvSpPr>
+        <p:spPr/>
+      </p:sp>
+      <p:sp>
+        <p:nvSpPr>
+          <p:cNvPr id="3" name="Notes Placeholder 2"/>
+          <p:cNvSpPr>
+            <a:spLocks noGrp="1"/>
+          </p:cNvSpPr>
+          <p:nvPr>
+            <p:ph type="body" idx="1"/>
+          </p:nvPr>
+        </p:nvSpPr>
+        <p:spPr/>
+        <p:txBody>
+          <a:bodyPr/>
+          <a:lstStyle/>
+          <a:p>
+            <a:r>
+              <a:rPr lang="en-US" dirty="0"/>
+              <a:t>Close on the question, not the caveats. We built a working toolchain, found and fixed real bugs in it, and produced one independently verified passing candidate. Binding remains unestablished, and PAE guidance remains promising but uncontrolled.</a:t>
+            </a:r>
+            <a:endParaRPr lang="en-US" dirty="0"/>
+          </a:p>
+        </p:txBody>
+      </p:sp>
+      <p:sp>
+        <p:nvSpPr>
+          <p:cNvPr id="4" name="Slide Number Placeholder 3"/>
+          <p:cNvSpPr>
+            <a:spLocks noGrp="1"/>
+          </p:cNvSpPr>
+          <p:nvPr>
+            <p:ph type="sldNum" sz="quarter" idx="10"/>
+          </p:nvPr>
+        </p:nvSpPr>
+        <p:spPr/>
+        <p:txBody>
+          <a:bodyPr/>
+          <a:lstStyle/>
+          <a:p>
+            <a:fld id="{F7021451-1387-4CA6-816F-3879F97B5CBC}" type="slidenum">
+              <a:rPr lang="en-US"/>
+              <a:t>10</a:t>
+            </a:fld>
+            <a:endParaRPr lang="en-US"/>
+          </a:p>
+        </p:txBody>
+      </p:sp>
+    </p:spTree>
+    <p:extLst>
+      <p:ext uri="{BB962C8B-B14F-4D97-AF65-F5344CB8AC3E}">
+        <p14:creationId xmlns:p14="http://schemas.microsoft.com/office/powerpoint/2010/main" val="1024086991"/>
+      </p:ext>
+    </p:extLst>
+  </p:cSld>
+  <p:clrMapOvr>
+    <a:masterClrMapping/>
+  </p:clrMapOvr>
+</p:notes>
+</file>
+
 <file path=ppt/notesSlides/notesSlide2.xml><?xml version="1.0" encoding="utf-8"?>
 <p:notes xmlns:a="http://schemas.openxmlformats.org/drawingml/2006/main" xmlns:r="http://schemas.openxmlformats.org/officeDocument/2006/relationships" xmlns:p="http://schemas.openxmlformats.org/presentationml/2006/main">
   <p:cSld>
@@ -862,7 +951,7 @@
           <a:p>
             <a:r>
               <a:rPr lang="en-US" dirty="0"/>
-              <a:t>Say what the metrics are: pLDDT and pTM describe the binder on its own, ipTM and PAE describe confidence in a predicted complex. None of them is a measurement of binding. The MPNN score is a sequence-model score, not a probability of success.</a:t>
+              <a:t>These are the early runs, before the tooling bugs on the next slides were found. The point that survives: the design-side scores did not predict the complex-side result.</a:t>
             </a:r>
             <a:endParaRPr lang="en-US" dirty="0"/>
           </a:p>
@@ -1038,7 +1127,7 @@
           <a:p>
             <a:r>
               <a:rPr lang="en-US" dirty="0"/>
-              <a:t>Candidate #3 was a fresh generation call with a wider hotspot set, so more than one variable differs; we have not checked the generation records to confirm what changed. Its small ipTM difference cannot be attributed to any single factor.</a:t>
+              <a:t>Frame this as the value of running end to end rather than trusting an interface. Both bugs were silent — the tools returned plausible numbers the whole time.</a:t>
             </a:r>
             <a:endParaRPr lang="en-US" dirty="0"/>
           </a:p>
@@ -1126,7 +1215,7 @@
           <a:p>
             <a:r>
               <a:rPr lang="en-US" dirty="0"/>
-              <a:t>Be disciplined here. PAE is positional uncertainty, ipTM is complex-prediction confidence, neither measures affinity. The glutamate trend is the first thing a reviewer will spot, so raise it yourself.</a:t>
+              <a:t>Say plainly that this was one hit out of six attempts, not a reliable pipeline. Also worth noting: running the refinement mechanism on this candidate changed zero positions — with 78 of 80 already confident, it correctly found nothing to fix.</a:t>
             </a:r>
             <a:endParaRPr lang="en-US" dirty="0"/>
           </a:p>
@@ -1214,7 +1303,7 @@
           <a:p>
             <a:r>
               <a:rPr lang="en-US" dirty="0"/>
-              <a:t>Close on the question, not the caveats. Then: we demonstrated a working, human-directed protein design workflow using Claude-accessible tools. High monomer confidence did not translate into confident complex predictions. PAE-guided refinement improved AF2-Multimer scores in one comparison, motivating further testing. Binding, affinity improvement, and any advantage over unguided refinement remain unestablished.</a:t>
+              <a:t>The honest claim: real in the sense of not a bug or artifact, unproven in the sense that we have not isolated which part does the work. The matched experiment — PAE-selected versus randomly selected positions, repeated — is the next thing to run.</a:t>
             </a:r>
             <a:endParaRPr lang="en-US" dirty="0"/>
           </a:p>
@@ -2089,6 +2178,1278 @@
 </p:sld>
 </file>
 
+<file path=ppt/slides/slide10.xml><?xml version="1.0" encoding="utf-8"?>
+<p:sld xmlns:a="http://schemas.openxmlformats.org/drawingml/2006/main" xmlns:r="http://schemas.openxmlformats.org/officeDocument/2006/relationships" xmlns:p="http://schemas.openxmlformats.org/presentationml/2006/main">
+  <p:cSld name="Slide 10">
+    <p:bg>
+      <p:bgPr>
+        <a:solidFill>
+          <a:srgbClr val="F6F5F1"/>
+        </a:solidFill>
+      </p:bgPr>
+    </p:bg>
+    <p:spTree>
+      <p:nvGrpSpPr>
+        <p:cNvPr id="1" name=""/>
+        <p:cNvGrpSpPr/>
+        <p:nvPr/>
+      </p:nvGrpSpPr>
+      <p:grpSpPr>
+        <a:xfrm>
+          <a:off x="0" y="0"/>
+          <a:ext cx="0" cy="0"/>
+          <a:chOff x="0" y="0"/>
+          <a:chExt cx="0" cy="0"/>
+        </a:xfrm>
+      </p:grpSpPr>
+      <p:sp>
+        <p:nvSpPr>
+          <p:cNvPr id="2" name="Text 0"/>
+          <p:cNvSpPr/>
+          <p:nvPr/>
+        </p:nvSpPr>
+        <p:spPr>
+          <a:xfrm>
+            <a:off x="812765" y="812763"/>
+            <a:ext cx="10883436" cy="416543"/>
+          </a:xfrm>
+          <a:prstGeom prst="rect">
+            <a:avLst/>
+          </a:prstGeom>
+          <a:noFill/>
+          <a:ln/>
+        </p:spPr>
+        <p:txBody>
+          <a:bodyPr wrap="square" lIns="0" tIns="0" rIns="0" bIns="0" rtlCol="0" anchor="t">
+            <a:normAutofit/>
+          </a:bodyPr>
+          <a:lstStyle/>
+          <a:p>
+            <a:pPr algn="l" indent="0" marL="0">
+              <a:lnSpc>
+                <a:spcPts val="3080"/>
+              </a:lnSpc>
+              <a:buNone/>
+            </a:pPr>
+            <a:r>
+              <a:rPr lang="en-US" sz="2800" dirty="0">
+                <a:solidFill>
+                  <a:srgbClr val="16191F"/>
+                </a:solidFill>
+                <a:latin typeface="Space Grotesk" pitchFamily="34" charset="0"/>
+                <a:ea typeface="Space Grotesk" pitchFamily="34" charset="-122"/>
+                <a:cs typeface="Space Grotesk" pitchFamily="34" charset="-120"/>
+              </a:rPr>
+              <a:t>Limitations</a:t>
+            </a:r>
+            <a:endParaRPr lang="en-US" sz="2800" dirty="0"/>
+          </a:p>
+        </p:txBody>
+      </p:sp>
+      <p:sp>
+        <p:nvSpPr>
+          <p:cNvPr id="3" name="Text 1"/>
+          <p:cNvSpPr/>
+          <p:nvPr/>
+        </p:nvSpPr>
+        <p:spPr>
+          <a:xfrm>
+            <a:off x="812765" y="1267396"/>
+            <a:ext cx="10883436" cy="265421"/>
+          </a:xfrm>
+          <a:prstGeom prst="rect">
+            <a:avLst/>
+          </a:prstGeom>
+          <a:noFill/>
+          <a:ln/>
+        </p:spPr>
+        <p:txBody>
+          <a:bodyPr wrap="square" lIns="0" tIns="0" rIns="0" bIns="0" rtlCol="0" anchor="t">
+            <a:normAutofit/>
+          </a:bodyPr>
+          <a:lstStyle/>
+          <a:p>
+            <a:pPr algn="l" indent="0" marL="0">
+              <a:lnSpc>
+                <a:spcPts val="1890"/>
+              </a:lnSpc>
+              <a:buNone/>
+            </a:pPr>
+            <a:r>
+              <a:rPr lang="en-US" sz="1350" dirty="0">
+                <a:solidFill>
+                  <a:srgbClr val="6B6F76"/>
+                </a:solidFill>
+                <a:latin typeface="Inter" pitchFamily="34" charset="0"/>
+                <a:ea typeface="Inter" pitchFamily="34" charset="-122"/>
+                <a:cs typeface="Inter" pitchFamily="34" charset="-120"/>
+              </a:rPr>
+              <a:t>What this run does not establish, in order of how much it matters.</a:t>
+            </a:r>
+            <a:endParaRPr lang="en-US" sz="1350" dirty="0"/>
+          </a:p>
+        </p:txBody>
+      </p:sp>
+      <p:sp>
+        <p:nvSpPr>
+          <p:cNvPr id="4" name="Shape 2"/>
+          <p:cNvSpPr/>
+          <p:nvPr/>
+        </p:nvSpPr>
+        <p:spPr>
+          <a:xfrm>
+            <a:off x="815940" y="1637581"/>
+            <a:ext cx="10560093" cy="426865"/>
+          </a:xfrm>
+          <a:prstGeom prst="roundRect">
+            <a:avLst>
+              <a:gd name="adj" fmla="val 17107"/>
+            </a:avLst>
+          </a:prstGeom>
+          <a:solidFill>
+            <a:srgbClr val="FFFFFF"/>
+          </a:solidFill>
+          <a:ln w="6350">
+            <a:solidFill>
+              <a:srgbClr val="DCD9D1"/>
+            </a:solidFill>
+            <a:prstDash val="solid"/>
+          </a:ln>
+        </p:spPr>
+      </p:sp>
+      <p:sp>
+        <p:nvSpPr>
+          <p:cNvPr id="5" name="Text 3"/>
+          <p:cNvSpPr/>
+          <p:nvPr/>
+        </p:nvSpPr>
+        <p:spPr>
+          <a:xfrm>
+            <a:off x="996358" y="1735441"/>
+            <a:ext cx="380987" cy="256545"/>
+          </a:xfrm>
+          <a:prstGeom prst="rect">
+            <a:avLst/>
+          </a:prstGeom>
+          <a:noFill/>
+          <a:ln/>
+        </p:spPr>
+        <p:txBody>
+          <a:bodyPr wrap="square" lIns="0" tIns="0" rIns="0" bIns="0" rtlCol="0" anchor="t">
+            <a:normAutofit/>
+          </a:bodyPr>
+          <a:lstStyle/>
+          <a:p>
+            <a:pPr algn="l" indent="0" marL="0">
+              <a:lnSpc>
+                <a:spcPts val="1820"/>
+              </a:lnSpc>
+              <a:buNone/>
+            </a:pPr>
+            <a:r>
+              <a:rPr lang="en-US" sz="1300" b="1" dirty="0">
+                <a:solidFill>
+                  <a:srgbClr val="B5533A"/>
+                </a:solidFill>
+                <a:latin typeface="Space Grotesk" pitchFamily="34" charset="0"/>
+                <a:ea typeface="Space Grotesk" pitchFamily="34" charset="-122"/>
+                <a:cs typeface="Space Grotesk" pitchFamily="34" charset="-120"/>
+              </a:rPr>
+              <a:t>01</a:t>
+            </a:r>
+            <a:endParaRPr lang="en-US" sz="1300" dirty="0"/>
+          </a:p>
+        </p:txBody>
+      </p:sp>
+      <p:sp>
+        <p:nvSpPr>
+          <p:cNvPr id="6" name="Text 4"/>
+          <p:cNvSpPr/>
+          <p:nvPr/>
+        </p:nvSpPr>
+        <p:spPr>
+          <a:xfrm>
+            <a:off x="1478936" y="1751924"/>
+            <a:ext cx="2616163" cy="223530"/>
+          </a:xfrm>
+          <a:prstGeom prst="rect">
+            <a:avLst/>
+          </a:prstGeom>
+          <a:noFill/>
+          <a:ln/>
+        </p:spPr>
+        <p:txBody>
+          <a:bodyPr wrap="square" lIns="0" tIns="0" rIns="0" bIns="0" rtlCol="0" anchor="t">
+            <a:normAutofit/>
+          </a:bodyPr>
+          <a:lstStyle/>
+          <a:p>
+            <a:pPr algn="l" indent="0" marL="0">
+              <a:lnSpc>
+                <a:spcPts val="1560"/>
+              </a:lnSpc>
+              <a:buNone/>
+            </a:pPr>
+            <a:r>
+              <a:rPr lang="en-US" sz="1300" b="1" dirty="0">
+                <a:solidFill>
+                  <a:srgbClr val="16191F"/>
+                </a:solidFill>
+                <a:latin typeface="Inter" pitchFamily="34" charset="0"/>
+                <a:ea typeface="Inter" pitchFamily="34" charset="-122"/>
+                <a:cs typeface="Inter" pitchFamily="34" charset="-120"/>
+              </a:rPr>
+              <a:t>No experimental binding data</a:t>
+            </a:r>
+            <a:endParaRPr lang="en-US" sz="1300" dirty="0"/>
+          </a:p>
+        </p:txBody>
+      </p:sp>
+      <p:sp>
+        <p:nvSpPr>
+          <p:cNvPr id="7" name="Text 5"/>
+          <p:cNvSpPr/>
+          <p:nvPr/>
+        </p:nvSpPr>
+        <p:spPr>
+          <a:xfrm>
+            <a:off x="4171291" y="1752420"/>
+            <a:ext cx="7235054" cy="222534"/>
+          </a:xfrm>
+          <a:prstGeom prst="rect">
+            <a:avLst/>
+          </a:prstGeom>
+          <a:noFill/>
+          <a:ln/>
+        </p:spPr>
+        <p:txBody>
+          <a:bodyPr wrap="square" lIns="0" tIns="0" rIns="0" bIns="0" rtlCol="0" anchor="t">
+            <a:normAutofit/>
+          </a:bodyPr>
+          <a:lstStyle/>
+          <a:p>
+            <a:pPr algn="l" indent="0" marL="0">
+              <a:lnSpc>
+                <a:spcPts val="1553"/>
+              </a:lnSpc>
+              <a:buNone/>
+            </a:pPr>
+            <a:r>
+              <a:rPr lang="en-US" sz="1150" dirty="0">
+                <a:solidFill>
+                  <a:srgbClr val="4A4F57"/>
+                </a:solidFill>
+                <a:latin typeface="Inter" pitchFamily="34" charset="0"/>
+                <a:ea typeface="Inter" pitchFamily="34" charset="-122"/>
+                <a:cs typeface="Inter" pitchFamily="34" charset="-120"/>
+              </a:rPr>
+              <a:t>Every number is a model prediction. Nothing has been made or tested in a lab</a:t>
+            </a:r>
+            <a:endParaRPr lang="en-US" sz="1150" dirty="0"/>
+          </a:p>
+        </p:txBody>
+      </p:sp>
+      <p:sp>
+        <p:nvSpPr>
+          <p:cNvPr id="8" name="Shape 6"/>
+          <p:cNvSpPr/>
+          <p:nvPr/>
+        </p:nvSpPr>
+        <p:spPr>
+          <a:xfrm>
+            <a:off x="815940" y="2127901"/>
+            <a:ext cx="10560093" cy="426865"/>
+          </a:xfrm>
+          <a:prstGeom prst="roundRect">
+            <a:avLst>
+              <a:gd name="adj" fmla="val 17107"/>
+            </a:avLst>
+          </a:prstGeom>
+          <a:solidFill>
+            <a:srgbClr val="FFFFFF"/>
+          </a:solidFill>
+          <a:ln w="6350">
+            <a:solidFill>
+              <a:srgbClr val="DCD9D1"/>
+            </a:solidFill>
+            <a:prstDash val="solid"/>
+          </a:ln>
+        </p:spPr>
+      </p:sp>
+      <p:sp>
+        <p:nvSpPr>
+          <p:cNvPr id="9" name="Text 7"/>
+          <p:cNvSpPr/>
+          <p:nvPr/>
+        </p:nvSpPr>
+        <p:spPr>
+          <a:xfrm>
+            <a:off x="996358" y="2225762"/>
+            <a:ext cx="380987" cy="256545"/>
+          </a:xfrm>
+          <a:prstGeom prst="rect">
+            <a:avLst/>
+          </a:prstGeom>
+          <a:noFill/>
+          <a:ln/>
+        </p:spPr>
+        <p:txBody>
+          <a:bodyPr wrap="square" lIns="0" tIns="0" rIns="0" bIns="0" rtlCol="0" anchor="t">
+            <a:normAutofit/>
+          </a:bodyPr>
+          <a:lstStyle/>
+          <a:p>
+            <a:pPr algn="l" indent="0" marL="0">
+              <a:lnSpc>
+                <a:spcPts val="1820"/>
+              </a:lnSpc>
+              <a:buNone/>
+            </a:pPr>
+            <a:r>
+              <a:rPr lang="en-US" sz="1300" b="1" dirty="0">
+                <a:solidFill>
+                  <a:srgbClr val="B5533A"/>
+                </a:solidFill>
+                <a:latin typeface="Space Grotesk" pitchFamily="34" charset="0"/>
+                <a:ea typeface="Space Grotesk" pitchFamily="34" charset="-122"/>
+                <a:cs typeface="Space Grotesk" pitchFamily="34" charset="-120"/>
+              </a:rPr>
+              <a:t>02</a:t>
+            </a:r>
+            <a:endParaRPr lang="en-US" sz="1300" dirty="0"/>
+          </a:p>
+        </p:txBody>
+      </p:sp>
+      <p:sp>
+        <p:nvSpPr>
+          <p:cNvPr id="10" name="Text 8"/>
+          <p:cNvSpPr/>
+          <p:nvPr/>
+        </p:nvSpPr>
+        <p:spPr>
+          <a:xfrm>
+            <a:off x="1478936" y="2242245"/>
+            <a:ext cx="2616163" cy="223530"/>
+          </a:xfrm>
+          <a:prstGeom prst="rect">
+            <a:avLst/>
+          </a:prstGeom>
+          <a:noFill/>
+          <a:ln/>
+        </p:spPr>
+        <p:txBody>
+          <a:bodyPr wrap="square" lIns="0" tIns="0" rIns="0" bIns="0" rtlCol="0" anchor="t">
+            <a:normAutofit/>
+          </a:bodyPr>
+          <a:lstStyle/>
+          <a:p>
+            <a:pPr algn="l" indent="0" marL="0">
+              <a:lnSpc>
+                <a:spcPts val="1560"/>
+              </a:lnSpc>
+              <a:buNone/>
+            </a:pPr>
+            <a:r>
+              <a:rPr lang="en-US" sz="1300" b="1" dirty="0">
+                <a:solidFill>
+                  <a:srgbClr val="16191F"/>
+                </a:solidFill>
+                <a:latin typeface="Inter" pitchFamily="34" charset="0"/>
+                <a:ea typeface="Inter" pitchFamily="34" charset="-122"/>
+                <a:cs typeface="Inter" pitchFamily="34" charset="-120"/>
+              </a:rPr>
+              <a:t>One hit in six attempts</a:t>
+            </a:r>
+            <a:endParaRPr lang="en-US" sz="1300" dirty="0"/>
+          </a:p>
+        </p:txBody>
+      </p:sp>
+      <p:sp>
+        <p:nvSpPr>
+          <p:cNvPr id="11" name="Text 9"/>
+          <p:cNvSpPr/>
+          <p:nvPr/>
+        </p:nvSpPr>
+        <p:spPr>
+          <a:xfrm>
+            <a:off x="4171291" y="2242741"/>
+            <a:ext cx="7235054" cy="222534"/>
+          </a:xfrm>
+          <a:prstGeom prst="rect">
+            <a:avLst/>
+          </a:prstGeom>
+          <a:noFill/>
+          <a:ln/>
+        </p:spPr>
+        <p:txBody>
+          <a:bodyPr wrap="square" lIns="0" tIns="0" rIns="0" bIns="0" rtlCol="0" anchor="t">
+            <a:normAutofit/>
+          </a:bodyPr>
+          <a:lstStyle/>
+          <a:p>
+            <a:pPr algn="l" indent="0" marL="0">
+              <a:lnSpc>
+                <a:spcPts val="1553"/>
+              </a:lnSpc>
+              <a:buNone/>
+            </a:pPr>
+            <a:r>
+              <a:rPr lang="en-US" sz="1150" dirty="0">
+                <a:solidFill>
+                  <a:srgbClr val="4A4F57"/>
+                </a:solidFill>
+                <a:latin typeface="Inter" pitchFamily="34" charset="0"/>
+                <a:ea typeface="Inter" pitchFamily="34" charset="-122"/>
+                <a:cs typeface="Inter" pitchFamily="34" charset="-120"/>
+              </a:rPr>
+              <a:t>0.81 is a real result and a lucky draw. We cannot yet quote a hit rate</a:t>
+            </a:r>
+            <a:endParaRPr lang="en-US" sz="1150" dirty="0"/>
+          </a:p>
+        </p:txBody>
+      </p:sp>
+      <p:sp>
+        <p:nvSpPr>
+          <p:cNvPr id="12" name="Shape 10"/>
+          <p:cNvSpPr/>
+          <p:nvPr/>
+        </p:nvSpPr>
+        <p:spPr>
+          <a:xfrm>
+            <a:off x="815940" y="2618222"/>
+            <a:ext cx="10560093" cy="426865"/>
+          </a:xfrm>
+          <a:prstGeom prst="roundRect">
+            <a:avLst>
+              <a:gd name="adj" fmla="val 17107"/>
+            </a:avLst>
+          </a:prstGeom>
+          <a:solidFill>
+            <a:srgbClr val="FFFFFF"/>
+          </a:solidFill>
+          <a:ln w="6350">
+            <a:solidFill>
+              <a:srgbClr val="DCD9D1"/>
+            </a:solidFill>
+            <a:prstDash val="solid"/>
+          </a:ln>
+        </p:spPr>
+      </p:sp>
+      <p:sp>
+        <p:nvSpPr>
+          <p:cNvPr id="13" name="Text 11"/>
+          <p:cNvSpPr/>
+          <p:nvPr/>
+        </p:nvSpPr>
+        <p:spPr>
+          <a:xfrm>
+            <a:off x="996358" y="2716082"/>
+            <a:ext cx="380987" cy="256545"/>
+          </a:xfrm>
+          <a:prstGeom prst="rect">
+            <a:avLst/>
+          </a:prstGeom>
+          <a:noFill/>
+          <a:ln/>
+        </p:spPr>
+        <p:txBody>
+          <a:bodyPr wrap="square" lIns="0" tIns="0" rIns="0" bIns="0" rtlCol="0" anchor="t">
+            <a:normAutofit/>
+          </a:bodyPr>
+          <a:lstStyle/>
+          <a:p>
+            <a:pPr algn="l" indent="0" marL="0">
+              <a:lnSpc>
+                <a:spcPts val="1820"/>
+              </a:lnSpc>
+              <a:buNone/>
+            </a:pPr>
+            <a:r>
+              <a:rPr lang="en-US" sz="1300" b="1" dirty="0">
+                <a:solidFill>
+                  <a:srgbClr val="B5533A"/>
+                </a:solidFill>
+                <a:latin typeface="Space Grotesk" pitchFamily="34" charset="0"/>
+                <a:ea typeface="Space Grotesk" pitchFamily="34" charset="-122"/>
+                <a:cs typeface="Space Grotesk" pitchFamily="34" charset="-120"/>
+              </a:rPr>
+              <a:t>03</a:t>
+            </a:r>
+            <a:endParaRPr lang="en-US" sz="1300" dirty="0"/>
+          </a:p>
+        </p:txBody>
+      </p:sp>
+      <p:sp>
+        <p:nvSpPr>
+          <p:cNvPr id="14" name="Text 12"/>
+          <p:cNvSpPr/>
+          <p:nvPr/>
+        </p:nvSpPr>
+        <p:spPr>
+          <a:xfrm>
+            <a:off x="1478936" y="2732565"/>
+            <a:ext cx="2616163" cy="223530"/>
+          </a:xfrm>
+          <a:prstGeom prst="rect">
+            <a:avLst/>
+          </a:prstGeom>
+          <a:noFill/>
+          <a:ln/>
+        </p:spPr>
+        <p:txBody>
+          <a:bodyPr wrap="square" lIns="0" tIns="0" rIns="0" bIns="0" rtlCol="0" anchor="t">
+            <a:normAutofit/>
+          </a:bodyPr>
+          <a:lstStyle/>
+          <a:p>
+            <a:pPr algn="l" indent="0" marL="0">
+              <a:lnSpc>
+                <a:spcPts val="1560"/>
+              </a:lnSpc>
+              <a:buNone/>
+            </a:pPr>
+            <a:r>
+              <a:rPr lang="en-US" sz="1300" b="1" dirty="0">
+                <a:solidFill>
+                  <a:srgbClr val="16191F"/>
+                </a:solidFill>
+                <a:latin typeface="Inter" pitchFamily="34" charset="0"/>
+                <a:ea typeface="Inter" pitchFamily="34" charset="-122"/>
+                <a:cs typeface="Inter" pitchFamily="34" charset="-120"/>
+              </a:rPr>
+              <a:t>Refinement has no control</a:t>
+            </a:r>
+            <a:endParaRPr lang="en-US" sz="1300" dirty="0"/>
+          </a:p>
+        </p:txBody>
+      </p:sp>
+      <p:sp>
+        <p:nvSpPr>
+          <p:cNvPr id="15" name="Text 13"/>
+          <p:cNvSpPr/>
+          <p:nvPr/>
+        </p:nvSpPr>
+        <p:spPr>
+          <a:xfrm>
+            <a:off x="4171291" y="2733067"/>
+            <a:ext cx="7235054" cy="222534"/>
+          </a:xfrm>
+          <a:prstGeom prst="rect">
+            <a:avLst/>
+          </a:prstGeom>
+          <a:noFill/>
+          <a:ln/>
+        </p:spPr>
+        <p:txBody>
+          <a:bodyPr wrap="square" lIns="0" tIns="0" rIns="0" bIns="0" rtlCol="0" anchor="t">
+            <a:normAutofit/>
+          </a:bodyPr>
+          <a:lstStyle/>
+          <a:p>
+            <a:pPr algn="l" indent="0" marL="0">
+              <a:lnSpc>
+                <a:spcPts val="1553"/>
+              </a:lnSpc>
+              <a:buNone/>
+            </a:pPr>
+            <a:r>
+              <a:rPr lang="en-US" sz="1150" dirty="0">
+                <a:solidFill>
+                  <a:srgbClr val="4A4F57"/>
+                </a:solidFill>
+                <a:latin typeface="Inter" pitchFamily="34" charset="0"/>
+                <a:ea typeface="Inter" pitchFamily="34" charset="-122"/>
+                <a:cs typeface="Inter" pitchFamily="34" charset="-120"/>
+              </a:rPr>
+              <a:t>Three trials, effects of 0 to +0.32, and no random-position comparison</a:t>
+            </a:r>
+            <a:endParaRPr lang="en-US" sz="1150" dirty="0"/>
+          </a:p>
+        </p:txBody>
+      </p:sp>
+      <p:sp>
+        <p:nvSpPr>
+          <p:cNvPr id="16" name="Shape 14"/>
+          <p:cNvSpPr/>
+          <p:nvPr/>
+        </p:nvSpPr>
+        <p:spPr>
+          <a:xfrm>
+            <a:off x="815940" y="3108542"/>
+            <a:ext cx="10560093" cy="426865"/>
+          </a:xfrm>
+          <a:prstGeom prst="roundRect">
+            <a:avLst>
+              <a:gd name="adj" fmla="val 17107"/>
+            </a:avLst>
+          </a:prstGeom>
+          <a:solidFill>
+            <a:srgbClr val="FFFFFF"/>
+          </a:solidFill>
+          <a:ln w="6350">
+            <a:solidFill>
+              <a:srgbClr val="DCD9D1"/>
+            </a:solidFill>
+            <a:prstDash val="solid"/>
+          </a:ln>
+        </p:spPr>
+      </p:sp>
+      <p:sp>
+        <p:nvSpPr>
+          <p:cNvPr id="17" name="Text 15"/>
+          <p:cNvSpPr/>
+          <p:nvPr/>
+        </p:nvSpPr>
+        <p:spPr>
+          <a:xfrm>
+            <a:off x="996358" y="3206403"/>
+            <a:ext cx="380987" cy="256545"/>
+          </a:xfrm>
+          <a:prstGeom prst="rect">
+            <a:avLst/>
+          </a:prstGeom>
+          <a:noFill/>
+          <a:ln/>
+        </p:spPr>
+        <p:txBody>
+          <a:bodyPr wrap="square" lIns="0" tIns="0" rIns="0" bIns="0" rtlCol="0" anchor="t">
+            <a:normAutofit/>
+          </a:bodyPr>
+          <a:lstStyle/>
+          <a:p>
+            <a:pPr algn="l" indent="0" marL="0">
+              <a:lnSpc>
+                <a:spcPts val="1820"/>
+              </a:lnSpc>
+              <a:buNone/>
+            </a:pPr>
+            <a:r>
+              <a:rPr lang="en-US" sz="1300" b="1" dirty="0">
+                <a:solidFill>
+                  <a:srgbClr val="B5533A"/>
+                </a:solidFill>
+                <a:latin typeface="Space Grotesk" pitchFamily="34" charset="0"/>
+                <a:ea typeface="Space Grotesk" pitchFamily="34" charset="-122"/>
+                <a:cs typeface="Space Grotesk" pitchFamily="34" charset="-120"/>
+              </a:rPr>
+              <a:t>04</a:t>
+            </a:r>
+            <a:endParaRPr lang="en-US" sz="1300" dirty="0"/>
+          </a:p>
+        </p:txBody>
+      </p:sp>
+      <p:sp>
+        <p:nvSpPr>
+          <p:cNvPr id="18" name="Text 16"/>
+          <p:cNvSpPr/>
+          <p:nvPr/>
+        </p:nvSpPr>
+        <p:spPr>
+          <a:xfrm>
+            <a:off x="1478936" y="3222892"/>
+            <a:ext cx="2616163" cy="223530"/>
+          </a:xfrm>
+          <a:prstGeom prst="rect">
+            <a:avLst/>
+          </a:prstGeom>
+          <a:noFill/>
+          <a:ln/>
+        </p:spPr>
+        <p:txBody>
+          <a:bodyPr wrap="square" lIns="0" tIns="0" rIns="0" bIns="0" rtlCol="0" anchor="t">
+            <a:normAutofit/>
+          </a:bodyPr>
+          <a:lstStyle/>
+          <a:p>
+            <a:pPr algn="l" indent="0" marL="0">
+              <a:lnSpc>
+                <a:spcPts val="1560"/>
+              </a:lnSpc>
+              <a:buNone/>
+            </a:pPr>
+            <a:r>
+              <a:rPr lang="en-US" sz="1300" b="1" dirty="0">
+                <a:solidFill>
+                  <a:srgbClr val="16191F"/>
+                </a:solidFill>
+                <a:latin typeface="Inter" pitchFamily="34" charset="0"/>
+                <a:ea typeface="Inter" pitchFamily="34" charset="-122"/>
+                <a:cs typeface="Inter" pitchFamily="34" charset="-120"/>
+              </a:rPr>
+              <a:t>Silent bugs went unnoticed</a:t>
+            </a:r>
+            <a:endParaRPr lang="en-US" sz="1300" dirty="0"/>
+          </a:p>
+        </p:txBody>
+      </p:sp>
+      <p:sp>
+        <p:nvSpPr>
+          <p:cNvPr id="19" name="Text 17"/>
+          <p:cNvSpPr/>
+          <p:nvPr/>
+        </p:nvSpPr>
+        <p:spPr>
+          <a:xfrm>
+            <a:off x="4171291" y="3223388"/>
+            <a:ext cx="7235054" cy="222534"/>
+          </a:xfrm>
+          <a:prstGeom prst="rect">
+            <a:avLst/>
+          </a:prstGeom>
+          <a:noFill/>
+          <a:ln/>
+        </p:spPr>
+        <p:txBody>
+          <a:bodyPr wrap="square" lIns="0" tIns="0" rIns="0" bIns="0" rtlCol="0" anchor="t">
+            <a:normAutofit/>
+          </a:bodyPr>
+          <a:lstStyle/>
+          <a:p>
+            <a:pPr algn="l" indent="0" marL="0">
+              <a:lnSpc>
+                <a:spcPts val="1553"/>
+              </a:lnSpc>
+              <a:buNone/>
+            </a:pPr>
+            <a:r>
+              <a:rPr lang="en-US" sz="1150" dirty="0">
+                <a:solidFill>
+                  <a:srgbClr val="4A4F57"/>
+                </a:solidFill>
+                <a:latin typeface="Inter" pitchFamily="34" charset="0"/>
+                <a:ea typeface="Inter" pitchFamily="34" charset="-122"/>
+                <a:cs typeface="Inter" pitchFamily="34" charset="-120"/>
+              </a:rPr>
+              <a:t>Two tools returned plausible numbers while doing the wrong thing. The rest are unaudited</a:t>
+            </a:r>
+            <a:endParaRPr lang="en-US" sz="1150" dirty="0"/>
+          </a:p>
+        </p:txBody>
+      </p:sp>
+      <p:sp>
+        <p:nvSpPr>
+          <p:cNvPr id="20" name="Shape 18"/>
+          <p:cNvSpPr/>
+          <p:nvPr/>
+        </p:nvSpPr>
+        <p:spPr>
+          <a:xfrm>
+            <a:off x="815940" y="3598869"/>
+            <a:ext cx="10560093" cy="426865"/>
+          </a:xfrm>
+          <a:prstGeom prst="roundRect">
+            <a:avLst>
+              <a:gd name="adj" fmla="val 17107"/>
+            </a:avLst>
+          </a:prstGeom>
+          <a:solidFill>
+            <a:srgbClr val="FFFFFF"/>
+          </a:solidFill>
+          <a:ln w="6350">
+            <a:solidFill>
+              <a:srgbClr val="DCD9D1"/>
+            </a:solidFill>
+            <a:prstDash val="solid"/>
+          </a:ln>
+        </p:spPr>
+      </p:sp>
+      <p:sp>
+        <p:nvSpPr>
+          <p:cNvPr id="21" name="Text 19"/>
+          <p:cNvSpPr/>
+          <p:nvPr/>
+        </p:nvSpPr>
+        <p:spPr>
+          <a:xfrm>
+            <a:off x="996358" y="3696729"/>
+            <a:ext cx="380987" cy="256545"/>
+          </a:xfrm>
+          <a:prstGeom prst="rect">
+            <a:avLst/>
+          </a:prstGeom>
+          <a:noFill/>
+          <a:ln/>
+        </p:spPr>
+        <p:txBody>
+          <a:bodyPr wrap="square" lIns="0" tIns="0" rIns="0" bIns="0" rtlCol="0" anchor="t">
+            <a:normAutofit/>
+          </a:bodyPr>
+          <a:lstStyle/>
+          <a:p>
+            <a:pPr algn="l" indent="0" marL="0">
+              <a:lnSpc>
+                <a:spcPts val="1820"/>
+              </a:lnSpc>
+              <a:buNone/>
+            </a:pPr>
+            <a:r>
+              <a:rPr lang="en-US" sz="1300" b="1" dirty="0">
+                <a:solidFill>
+                  <a:srgbClr val="B5533A"/>
+                </a:solidFill>
+                <a:latin typeface="Space Grotesk" pitchFamily="34" charset="0"/>
+                <a:ea typeface="Space Grotesk" pitchFamily="34" charset="-122"/>
+                <a:cs typeface="Space Grotesk" pitchFamily="34" charset="-120"/>
+              </a:rPr>
+              <a:t>05</a:t>
+            </a:r>
+            <a:endParaRPr lang="en-US" sz="1300" dirty="0"/>
+          </a:p>
+        </p:txBody>
+      </p:sp>
+      <p:sp>
+        <p:nvSpPr>
+          <p:cNvPr id="22" name="Text 20"/>
+          <p:cNvSpPr/>
+          <p:nvPr/>
+        </p:nvSpPr>
+        <p:spPr>
+          <a:xfrm>
+            <a:off x="1478936" y="3713212"/>
+            <a:ext cx="2616163" cy="223530"/>
+          </a:xfrm>
+          <a:prstGeom prst="rect">
+            <a:avLst/>
+          </a:prstGeom>
+          <a:noFill/>
+          <a:ln/>
+        </p:spPr>
+        <p:txBody>
+          <a:bodyPr wrap="square" lIns="0" tIns="0" rIns="0" bIns="0" rtlCol="0" anchor="t">
+            <a:normAutofit/>
+          </a:bodyPr>
+          <a:lstStyle/>
+          <a:p>
+            <a:pPr algn="l" indent="0" marL="0">
+              <a:lnSpc>
+                <a:spcPts val="1560"/>
+              </a:lnSpc>
+              <a:buNone/>
+            </a:pPr>
+            <a:r>
+              <a:rPr lang="en-US" sz="1300" b="1" dirty="0">
+                <a:solidFill>
+                  <a:srgbClr val="16191F"/>
+                </a:solidFill>
+                <a:latin typeface="Inter" pitchFamily="34" charset="0"/>
+                <a:ea typeface="Inter" pitchFamily="34" charset="-122"/>
+                <a:cs typeface="Inter" pitchFamily="34" charset="-120"/>
+              </a:rPr>
+              <a:t>Selection step unquantified</a:t>
+            </a:r>
+            <a:endParaRPr lang="en-US" sz="1300" dirty="0"/>
+          </a:p>
+        </p:txBody>
+      </p:sp>
+      <p:sp>
+        <p:nvSpPr>
+          <p:cNvPr id="23" name="Text 21"/>
+          <p:cNvSpPr/>
+          <p:nvPr/>
+        </p:nvSpPr>
+        <p:spPr>
+          <a:xfrm>
+            <a:off x="4171291" y="3713708"/>
+            <a:ext cx="7235054" cy="222534"/>
+          </a:xfrm>
+          <a:prstGeom prst="rect">
+            <a:avLst/>
+          </a:prstGeom>
+          <a:noFill/>
+          <a:ln/>
+        </p:spPr>
+        <p:txBody>
+          <a:bodyPr wrap="square" lIns="0" tIns="0" rIns="0" bIns="0" rtlCol="0" anchor="t">
+            <a:normAutofit/>
+          </a:bodyPr>
+          <a:lstStyle/>
+          <a:p>
+            <a:pPr algn="l" indent="0" marL="0">
+              <a:lnSpc>
+                <a:spcPts val="1553"/>
+              </a:lnSpc>
+              <a:buNone/>
+            </a:pPr>
+            <a:r>
+              <a:rPr lang="en-US" sz="1150" dirty="0">
+                <a:solidFill>
+                  <a:srgbClr val="4A4F57"/>
+                </a:solidFill>
+                <a:latin typeface="Inter" pitchFamily="34" charset="0"/>
+                <a:ea typeface="Inter" pitchFamily="34" charset="-122"/>
+                <a:cs typeface="Inter" pitchFamily="34" charset="-120"/>
+              </a:rPr>
+              <a:t>Each call samples ~8 sequences; only the best by ProteinMPNN's own score was verified</a:t>
+            </a:r>
+            <a:endParaRPr lang="en-US" sz="1150" dirty="0"/>
+          </a:p>
+        </p:txBody>
+      </p:sp>
+      <p:sp>
+        <p:nvSpPr>
+          <p:cNvPr id="24" name="Shape 22"/>
+          <p:cNvSpPr/>
+          <p:nvPr/>
+        </p:nvSpPr>
+        <p:spPr>
+          <a:xfrm>
+            <a:off x="815940" y="4089189"/>
+            <a:ext cx="10560093" cy="426865"/>
+          </a:xfrm>
+          <a:prstGeom prst="roundRect">
+            <a:avLst>
+              <a:gd name="adj" fmla="val 17107"/>
+            </a:avLst>
+          </a:prstGeom>
+          <a:solidFill>
+            <a:srgbClr val="F0ECE2"/>
+          </a:solidFill>
+          <a:ln w="6350">
+            <a:solidFill>
+              <a:srgbClr val="DCD9D1"/>
+            </a:solidFill>
+            <a:prstDash val="solid"/>
+          </a:ln>
+        </p:spPr>
+      </p:sp>
+      <p:sp>
+        <p:nvSpPr>
+          <p:cNvPr id="25" name="Text 23"/>
+          <p:cNvSpPr/>
+          <p:nvPr/>
+        </p:nvSpPr>
+        <p:spPr>
+          <a:xfrm>
+            <a:off x="996358" y="4187050"/>
+            <a:ext cx="380987" cy="256545"/>
+          </a:xfrm>
+          <a:prstGeom prst="rect">
+            <a:avLst/>
+          </a:prstGeom>
+          <a:noFill/>
+          <a:ln/>
+        </p:spPr>
+        <p:txBody>
+          <a:bodyPr wrap="square" lIns="0" tIns="0" rIns="0" bIns="0" rtlCol="0" anchor="t">
+            <a:normAutofit/>
+          </a:bodyPr>
+          <a:lstStyle/>
+          <a:p>
+            <a:pPr algn="l" indent="0" marL="0">
+              <a:lnSpc>
+                <a:spcPts val="1820"/>
+              </a:lnSpc>
+              <a:buNone/>
+            </a:pPr>
+            <a:r>
+              <a:rPr lang="en-US" sz="1300" b="1" dirty="0">
+                <a:solidFill>
+                  <a:srgbClr val="8A6A2F"/>
+                </a:solidFill>
+                <a:latin typeface="Space Grotesk" pitchFamily="34" charset="0"/>
+                <a:ea typeface="Space Grotesk" pitchFamily="34" charset="-122"/>
+                <a:cs typeface="Space Grotesk" pitchFamily="34" charset="-120"/>
+              </a:rPr>
+              <a:t>06</a:t>
+            </a:r>
+            <a:endParaRPr lang="en-US" sz="1300" dirty="0"/>
+          </a:p>
+        </p:txBody>
+      </p:sp>
+      <p:sp>
+        <p:nvSpPr>
+          <p:cNvPr id="26" name="Text 24"/>
+          <p:cNvSpPr/>
+          <p:nvPr/>
+        </p:nvSpPr>
+        <p:spPr>
+          <a:xfrm>
+            <a:off x="1478936" y="4203533"/>
+            <a:ext cx="2616163" cy="223530"/>
+          </a:xfrm>
+          <a:prstGeom prst="rect">
+            <a:avLst/>
+          </a:prstGeom>
+          <a:noFill/>
+          <a:ln/>
+        </p:spPr>
+        <p:txBody>
+          <a:bodyPr wrap="square" lIns="0" tIns="0" rIns="0" bIns="0" rtlCol="0" anchor="t">
+            <a:normAutofit/>
+          </a:bodyPr>
+          <a:lstStyle/>
+          <a:p>
+            <a:pPr algn="l" indent="0" marL="0">
+              <a:lnSpc>
+                <a:spcPts val="1560"/>
+              </a:lnSpc>
+              <a:buNone/>
+            </a:pPr>
+            <a:r>
+              <a:rPr lang="en-US" sz="1300" b="1" dirty="0">
+                <a:solidFill>
+                  <a:srgbClr val="4A4F57"/>
+                </a:solidFill>
+                <a:latin typeface="Inter" pitchFamily="34" charset="0"/>
+                <a:ea typeface="Inter" pitchFamily="34" charset="-122"/>
+                <a:cs typeface="Inter" pitchFamily="34" charset="-120"/>
+              </a:rPr>
+              <a:t>Secondary: lab-ready output</a:t>
+            </a:r>
+            <a:endParaRPr lang="en-US" sz="1300" dirty="0"/>
+          </a:p>
+        </p:txBody>
+      </p:sp>
+      <p:sp>
+        <p:nvSpPr>
+          <p:cNvPr id="27" name="Text 25"/>
+          <p:cNvSpPr/>
+          <p:nvPr/>
+        </p:nvSpPr>
+        <p:spPr>
+          <a:xfrm>
+            <a:off x="4171291" y="4204029"/>
+            <a:ext cx="7235054" cy="222534"/>
+          </a:xfrm>
+          <a:prstGeom prst="rect">
+            <a:avLst/>
+          </a:prstGeom>
+          <a:noFill/>
+          <a:ln/>
+        </p:spPr>
+        <p:txBody>
+          <a:bodyPr wrap="square" lIns="0" tIns="0" rIns="0" bIns="0" rtlCol="0" anchor="t">
+            <a:normAutofit/>
+          </a:bodyPr>
+          <a:lstStyle/>
+          <a:p>
+            <a:pPr algn="l" indent="0" marL="0">
+              <a:lnSpc>
+                <a:spcPts val="1553"/>
+              </a:lnSpc>
+              <a:buNone/>
+            </a:pPr>
+            <a:r>
+              <a:rPr lang="en-US" sz="1150" dirty="0">
+                <a:solidFill>
+                  <a:srgbClr val="6B6F76"/>
+                </a:solidFill>
+                <a:latin typeface="Inter" pitchFamily="34" charset="0"/>
+                <a:ea typeface="Inter" pitchFamily="34" charset="-122"/>
+                <a:cs typeface="Inter" pitchFamily="34" charset="-120"/>
+              </a:rPr>
+              <a:t>DNA preparation and extra scoring matter only once the gaps above are closed</a:t>
+            </a:r>
+            <a:endParaRPr lang="en-US" sz="1150" dirty="0"/>
+          </a:p>
+        </p:txBody>
+      </p:sp>
+      <p:sp>
+        <p:nvSpPr>
+          <p:cNvPr id="28" name="Shape 26"/>
+          <p:cNvSpPr/>
+          <p:nvPr/>
+        </p:nvSpPr>
+        <p:spPr>
+          <a:xfrm>
+            <a:off x="812765" y="4646216"/>
+            <a:ext cx="10566443" cy="962574"/>
+          </a:xfrm>
+          <a:prstGeom prst="roundRect">
+            <a:avLst>
+              <a:gd name="adj" fmla="val 9236"/>
+            </a:avLst>
+          </a:prstGeom>
+          <a:solidFill>
+            <a:srgbClr val="1F3A35"/>
+          </a:solidFill>
+          <a:ln/>
+        </p:spPr>
+      </p:sp>
+      <p:sp>
+        <p:nvSpPr>
+          <p:cNvPr id="29" name="Text 27"/>
+          <p:cNvSpPr/>
+          <p:nvPr/>
+        </p:nvSpPr>
+        <p:spPr>
+          <a:xfrm>
+            <a:off x="1041328" y="4798603"/>
+            <a:ext cx="5075504" cy="200661"/>
+          </a:xfrm>
+          <a:prstGeom prst="rect">
+            <a:avLst/>
+          </a:prstGeom>
+          <a:noFill/>
+          <a:ln/>
+        </p:spPr>
+        <p:txBody>
+          <a:bodyPr wrap="square" lIns="0" tIns="0" rIns="0" bIns="0" rtlCol="0" anchor="t">
+            <a:normAutofit/>
+          </a:bodyPr>
+          <a:lstStyle/>
+          <a:p>
+            <a:pPr algn="l" indent="0" marL="0">
+              <a:lnSpc>
+                <a:spcPts val="1380"/>
+              </a:lnSpc>
+              <a:buNone/>
+            </a:pPr>
+            <a:r>
+              <a:rPr lang="en-US" sz="1150" b="1" spc="50" kern="0" dirty="0">
+                <a:solidFill>
+                  <a:srgbClr val="5FBFA8"/>
+                </a:solidFill>
+                <a:latin typeface="Inter" pitchFamily="34" charset="0"/>
+                <a:ea typeface="Inter" pitchFamily="34" charset="-122"/>
+                <a:cs typeface="Inter" pitchFamily="34" charset="-120"/>
+              </a:rPr>
+              <a:t>NEXT EXPERIMENT</a:t>
+            </a:r>
+            <a:endParaRPr lang="en-US" sz="1150" dirty="0"/>
+          </a:p>
+        </p:txBody>
+      </p:sp>
+      <p:sp>
+        <p:nvSpPr>
+          <p:cNvPr id="30" name="Text 28"/>
+          <p:cNvSpPr/>
+          <p:nvPr/>
+        </p:nvSpPr>
+        <p:spPr>
+          <a:xfrm>
+            <a:off x="1041328" y="5011948"/>
+            <a:ext cx="5075504" cy="469846"/>
+          </a:xfrm>
+          <a:prstGeom prst="rect">
+            <a:avLst/>
+          </a:prstGeom>
+          <a:noFill/>
+          <a:ln/>
+        </p:spPr>
+        <p:txBody>
+          <a:bodyPr wrap="square" lIns="0" tIns="0" rIns="0" bIns="0" rtlCol="0" anchor="t">
+            <a:normAutofit/>
+          </a:bodyPr>
+          <a:lstStyle/>
+          <a:p>
+            <a:pPr algn="l" indent="0" marL="0">
+              <a:lnSpc>
+                <a:spcPts val="1750"/>
+              </a:lnSpc>
+              <a:buNone/>
+            </a:pPr>
+            <a:r>
+              <a:rPr lang="en-US" sz="1250" dirty="0">
+                <a:solidFill>
+                  <a:srgbClr val="F6F5F1"/>
+                </a:solidFill>
+                <a:latin typeface="Inter" pitchFamily="34" charset="0"/>
+                <a:ea typeface="Inter" pitchFamily="34" charset="-122"/>
+                <a:cs typeface="Inter" pitchFamily="34" charset="-120"/>
+              </a:rPr>
+              <a:t>PAE-selected positions versus the same number chosen at random, repeated.</a:t>
+            </a:r>
+            <a:endParaRPr lang="en-US" sz="1250" dirty="0"/>
+          </a:p>
+        </p:txBody>
+      </p:sp>
+      <p:sp>
+        <p:nvSpPr>
+          <p:cNvPr id="31" name="Text 29"/>
+          <p:cNvSpPr/>
+          <p:nvPr/>
+        </p:nvSpPr>
+        <p:spPr>
+          <a:xfrm>
+            <a:off x="6222971" y="4909691"/>
+            <a:ext cx="5075504" cy="200661"/>
+          </a:xfrm>
+          <a:prstGeom prst="rect">
+            <a:avLst/>
+          </a:prstGeom>
+          <a:noFill/>
+          <a:ln/>
+        </p:spPr>
+        <p:txBody>
+          <a:bodyPr wrap="square" lIns="0" tIns="0" rIns="0" bIns="0" rtlCol="0" anchor="t">
+            <a:normAutofit/>
+          </a:bodyPr>
+          <a:lstStyle/>
+          <a:p>
+            <a:pPr algn="l" indent="0" marL="0">
+              <a:lnSpc>
+                <a:spcPts val="1380"/>
+              </a:lnSpc>
+              <a:buNone/>
+            </a:pPr>
+            <a:r>
+              <a:rPr lang="en-US" sz="1150" b="1" spc="50" kern="0" dirty="0">
+                <a:solidFill>
+                  <a:srgbClr val="E0A35F"/>
+                </a:solidFill>
+                <a:latin typeface="Inter" pitchFamily="34" charset="0"/>
+                <a:ea typeface="Inter" pitchFamily="34" charset="-122"/>
+                <a:cs typeface="Inter" pitchFamily="34" charset="-120"/>
+              </a:rPr>
+              <a:t>THE QUESTION</a:t>
+            </a:r>
+            <a:endParaRPr lang="en-US" sz="1150" dirty="0"/>
+          </a:p>
+        </p:txBody>
+      </p:sp>
+      <p:sp>
+        <p:nvSpPr>
+          <p:cNvPr id="32" name="Text 30"/>
+          <p:cNvSpPr/>
+          <p:nvPr/>
+        </p:nvSpPr>
+        <p:spPr>
+          <a:xfrm>
+            <a:off x="6222971" y="5123036"/>
+            <a:ext cx="5075504" cy="247623"/>
+          </a:xfrm>
+          <a:prstGeom prst="rect">
+            <a:avLst/>
+          </a:prstGeom>
+          <a:noFill/>
+          <a:ln/>
+        </p:spPr>
+        <p:txBody>
+          <a:bodyPr wrap="square" lIns="0" tIns="0" rIns="0" bIns="0" rtlCol="0" anchor="t">
+            <a:normAutofit/>
+          </a:bodyPr>
+          <a:lstStyle/>
+          <a:p>
+            <a:pPr algn="l" indent="0" marL="0">
+              <a:lnSpc>
+                <a:spcPts val="1750"/>
+              </a:lnSpc>
+              <a:buNone/>
+            </a:pPr>
+            <a:r>
+              <a:rPr lang="en-US" sz="1250" dirty="0">
+                <a:solidFill>
+                  <a:srgbClr val="F6F5F1"/>
+                </a:solidFill>
+                <a:latin typeface="Inter" pitchFamily="34" charset="0"/>
+                <a:ea typeface="Inter" pitchFamily="34" charset="-122"/>
+                <a:cs typeface="Inter" pitchFamily="34" charset="-120"/>
+              </a:rPr>
+              <a:t>Can an agent choose better next experiments at equal compute?</a:t>
+            </a:r>
+            <a:endParaRPr lang="en-US" sz="1250" dirty="0"/>
+          </a:p>
+        </p:txBody>
+      </p:sp>
+    </p:spTree>
+  </p:cSld>
+  <p:clrMapOvr>
+    <a:masterClrMapping/>
+  </p:clrMapOvr>
+</p:sld>
+</file>
+
 <file path=ppt/slides/slide2.xml><?xml version="1.0" encoding="utf-8"?>
 <p:sld xmlns:a="http://schemas.openxmlformats.org/drawingml/2006/main" xmlns:r="http://schemas.openxmlformats.org/officeDocument/2006/relationships" xmlns:p="http://schemas.openxmlformats.org/presentationml/2006/main">
   <p:cSld name="Slide 2">
@@ -4576,28 +5937,28 @@
         <p:spPr>
           <a:xfrm>
             <a:off x="812765" y="812766"/>
-            <a:ext cx="10883436" cy="434477"/>
-          </a:xfrm>
-          <a:prstGeom prst="rect">
-            <a:avLst/>
-          </a:prstGeom>
-          <a:noFill/>
-          <a:ln/>
-        </p:spPr>
-        <p:txBody>
-          <a:bodyPr wrap="square" lIns="0" tIns="0" rIns="0" bIns="0" rtlCol="0" anchor="t">
-            <a:normAutofit/>
-          </a:bodyPr>
-          <a:lstStyle/>
-          <a:p>
-            <a:pPr algn="l" indent="0" marL="0">
-              <a:lnSpc>
-                <a:spcPts val="3223"/>
-              </a:lnSpc>
-              <a:buNone/>
-            </a:pPr>
-            <a:r>
-              <a:rPr lang="en-US" sz="2930" dirty="0">
+            <a:ext cx="10883436" cy="472428"/>
+          </a:xfrm>
+          <a:prstGeom prst="rect">
+            <a:avLst/>
+          </a:prstGeom>
+          <a:noFill/>
+          <a:ln/>
+        </p:spPr>
+        <p:txBody>
+          <a:bodyPr wrap="square" lIns="0" tIns="0" rIns="0" bIns="0" rtlCol="0" anchor="t">
+            <a:normAutofit/>
+          </a:bodyPr>
+          <a:lstStyle/>
+          <a:p>
+            <a:pPr algn="l" indent="0" marL="0">
+              <a:lnSpc>
+                <a:spcPts val="3520"/>
+              </a:lnSpc>
+              <a:buNone/>
+            </a:pPr>
+            <a:r>
+              <a:rPr lang="en-US" sz="3200" dirty="0">
                 <a:solidFill>
                   <a:srgbClr val="16191F"/>
                 </a:solidFill>
@@ -4605,9 +5966,9 @@
                 <a:ea typeface="Space Grotesk" pitchFamily="34" charset="-122"/>
                 <a:cs typeface="Space Grotesk" pitchFamily="34" charset="-120"/>
               </a:rPr>
-              <a:t>An example: PD-L1</a:t>
-            </a:r>
-            <a:endParaRPr lang="en-US" sz="2930" dirty="0"/>
+              <a:t>First runs against PD-L1</a:t>
+            </a:r>
+            <a:endParaRPr lang="en-US" sz="3200" dirty="0"/>
           </a:p>
         </p:txBody>
       </p:sp>
@@ -4619,29 +5980,29 @@
         </p:nvSpPr>
         <p:spPr>
           <a:xfrm>
-            <a:off x="812765" y="1298014"/>
-            <a:ext cx="10883436" cy="480941"/>
-          </a:xfrm>
-          <a:prstGeom prst="rect">
-            <a:avLst/>
-          </a:prstGeom>
-          <a:noFill/>
-          <a:ln/>
-        </p:spPr>
-        <p:txBody>
-          <a:bodyPr wrap="square" lIns="0" tIns="0" rIns="0" bIns="0" rtlCol="0" anchor="t">
-            <a:normAutofit/>
-          </a:bodyPr>
-          <a:lstStyle/>
-          <a:p>
-            <a:pPr algn="l" indent="0" marL="0">
-              <a:lnSpc>
-                <a:spcPts val="1850"/>
-              </a:lnSpc>
-              <a:buNone/>
-            </a:pPr>
-            <a:r>
-              <a:rPr lang="en-US" sz="1321" dirty="0">
+            <a:off x="812765" y="1335965"/>
+            <a:ext cx="10883436" cy="274297"/>
+          </a:xfrm>
+          <a:prstGeom prst="rect">
+            <a:avLst/>
+          </a:prstGeom>
+          <a:noFill/>
+          <a:ln/>
+        </p:spPr>
+        <p:txBody>
+          <a:bodyPr wrap="square" lIns="0" tIns="0" rIns="0" bIns="0" rtlCol="0" anchor="t">
+            <a:normAutofit/>
+          </a:bodyPr>
+          <a:lstStyle/>
+          <a:p>
+            <a:pPr algn="l" indent="0" marL="0">
+              <a:lnSpc>
+                <a:spcPts val="1960"/>
+              </a:lnSpc>
+              <a:buNone/>
+            </a:pPr>
+            <a:r>
+              <a:rPr lang="en-US" sz="1400" dirty="0">
                 <a:solidFill>
                   <a:srgbClr val="6B6F76"/>
                 </a:solidFill>
@@ -4649,9 +6010,9 @@
                 <a:ea typeface="Inter" pitchFamily="34" charset="-122"/>
                 <a:cs typeface="Inter" pitchFamily="34" charset="-120"/>
               </a:rPr>
-              <a:t>We ran the workflow against PD-L1 (PDB 4ZQK), a real cancer immunotherapy target. Best of 8 designs, then predicted as a complex.</a:t>
-            </a:r>
-            <a:endParaRPr lang="en-US" sz="1321" dirty="0"/>
+              <a:t>Best of 8 designs, then predicted as a complex with AlphaFold2-Multimer.</a:t>
+            </a:r>
+            <a:endParaRPr lang="en-US" sz="1400" dirty="0"/>
           </a:p>
         </p:txBody>
       </p:sp>
@@ -4663,12 +6024,12 @@
         </p:nvSpPr>
         <p:spPr>
           <a:xfrm>
-            <a:off x="815940" y="1947208"/>
-            <a:ext cx="5187973" cy="2816522"/>
+            <a:off x="815940" y="1778515"/>
+            <a:ext cx="5187973" cy="2331680"/>
           </a:xfrm>
           <a:prstGeom prst="roundRect">
             <a:avLst>
-              <a:gd name="adj" fmla="val 3495"/>
+              <a:gd name="adj" fmla="val 4221"/>
             </a:avLst>
           </a:prstGeom>
           <a:solidFill>
@@ -4690,29 +6051,29 @@
         </p:nvSpPr>
         <p:spPr>
           <a:xfrm>
-            <a:off x="1021719" y="2152988"/>
-            <a:ext cx="4919707" cy="229418"/>
-          </a:xfrm>
-          <a:prstGeom prst="rect">
-            <a:avLst/>
-          </a:prstGeom>
-          <a:noFill/>
-          <a:ln/>
-        </p:spPr>
-        <p:txBody>
-          <a:bodyPr wrap="square" lIns="0" tIns="0" rIns="0" bIns="0" rtlCol="0" anchor="t">
-            <a:normAutofit/>
-          </a:bodyPr>
-          <a:lstStyle/>
-          <a:p>
-            <a:pPr algn="l" indent="0" marL="0">
-              <a:lnSpc>
-                <a:spcPts val="1620"/>
-              </a:lnSpc>
-              <a:buNone/>
-            </a:pPr>
-            <a:r>
-              <a:rPr lang="en-US" sz="1350" b="1" dirty="0">
+            <a:off x="1021719" y="1984294"/>
+            <a:ext cx="4919707" cy="254009"/>
+          </a:xfrm>
+          <a:prstGeom prst="rect">
+            <a:avLst/>
+          </a:prstGeom>
+          <a:noFill/>
+          <a:ln/>
+        </p:spPr>
+        <p:txBody>
+          <a:bodyPr wrap="square" lIns="0" tIns="0" rIns="0" bIns="0" rtlCol="0" anchor="t">
+            <a:normAutofit/>
+          </a:bodyPr>
+          <a:lstStyle/>
+          <a:p>
+            <a:pPr algn="l" indent="0" marL="0">
+              <a:lnSpc>
+                <a:spcPts val="1800"/>
+              </a:lnSpc>
+              <a:buNone/>
+            </a:pPr>
+            <a:r>
+              <a:rPr lang="en-US" sz="1500" b="1" dirty="0">
                 <a:solidFill>
                   <a:srgbClr val="1F7A6C"/>
                 </a:solidFill>
@@ -4720,9 +6081,9 @@
                 <a:ea typeface="Space Grotesk" pitchFamily="34" charset="-122"/>
                 <a:cs typeface="Space Grotesk" pitchFamily="34" charset="-120"/>
               </a:rPr>
-              <a:t>Monomer confidence (steps 1–4)</a:t>
-            </a:r>
-            <a:endParaRPr lang="en-US" sz="1350" dirty="0"/>
+              <a:t>Monomer confidence</a:t>
+            </a:r>
+            <a:endParaRPr lang="en-US" sz="1500" dirty="0"/>
           </a:p>
         </p:txBody>
       </p:sp>
@@ -4734,7 +6095,7 @@
         </p:nvSpPr>
         <p:spPr>
           <a:xfrm>
-            <a:off x="1021719" y="2458585"/>
+            <a:off x="1021719" y="2314482"/>
             <a:ext cx="1130260" cy="505442"/>
           </a:xfrm>
           <a:prstGeom prst="rect">
@@ -4778,7 +6139,7 @@
         </p:nvSpPr>
         <p:spPr>
           <a:xfrm>
-            <a:off x="2228163" y="2655674"/>
+            <a:off x="2228163" y="2511571"/>
             <a:ext cx="2493719" cy="238747"/>
           </a:xfrm>
           <a:prstGeom prst="rect">
@@ -4822,7 +6183,7 @@
         </p:nvSpPr>
         <p:spPr>
           <a:xfrm>
-            <a:off x="1021719" y="2988624"/>
+            <a:off x="1021719" y="2896102"/>
             <a:ext cx="1130260" cy="505442"/>
           </a:xfrm>
           <a:prstGeom prst="rect">
@@ -4866,7 +6227,7 @@
         </p:nvSpPr>
         <p:spPr>
           <a:xfrm>
-            <a:off x="2228163" y="3185713"/>
+            <a:off x="2228163" y="3093191"/>
             <a:ext cx="1732667" cy="238747"/>
           </a:xfrm>
           <a:prstGeom prst="rect">
@@ -4910,52 +6271,8 @@
         </p:nvSpPr>
         <p:spPr>
           <a:xfrm>
-            <a:off x="1021719" y="3518706"/>
-            <a:ext cx="1130260" cy="505442"/>
-          </a:xfrm>
-          <a:prstGeom prst="rect">
-            <a:avLst/>
-          </a:prstGeom>
-          <a:noFill/>
-          <a:ln/>
-        </p:spPr>
-        <p:txBody>
-          <a:bodyPr wrap="square" lIns="0" tIns="0" rIns="0" bIns="0" rtlCol="0" anchor="t">
-            <a:normAutofit/>
-          </a:bodyPr>
-          <a:lstStyle/>
-          <a:p>
-            <a:pPr algn="l" indent="0" marL="0">
-              <a:lnSpc>
-                <a:spcPts val="3780"/>
-              </a:lnSpc>
-              <a:buNone/>
-            </a:pPr>
-            <a:r>
-              <a:rPr lang="en-US" sz="2700" dirty="0">
-                <a:solidFill>
-                  <a:srgbClr val="16191F"/>
-                </a:solidFill>
-                <a:latin typeface="Space Grotesk" pitchFamily="34" charset="0"/>
-                <a:ea typeface="Space Grotesk" pitchFamily="34" charset="-122"/>
-                <a:cs typeface="Space Grotesk" pitchFamily="34" charset="-120"/>
-              </a:rPr>
-              <a:t>0.95</a:t>
-            </a:r>
-            <a:endParaRPr lang="en-US" sz="2700" dirty="0"/>
-          </a:p>
-        </p:txBody>
-      </p:sp>
-      <p:sp>
-        <p:nvSpPr>
-          <p:cNvPr id="11" name="Text 9"/>
-          <p:cNvSpPr/>
-          <p:nvPr/>
-        </p:nvSpPr>
-        <p:spPr>
-          <a:xfrm>
-            <a:off x="2228163" y="3715795"/>
-            <a:ext cx="3677070" cy="452094"/>
+            <a:off x="1021719" y="3477723"/>
+            <a:ext cx="4919707" cy="452094"/>
           </a:xfrm>
           <a:prstGeom prst="rect">
             <a:avLst/>
@@ -4978,13 +6295,13 @@
             <a:r>
               <a:rPr lang="en-US" sz="1200" dirty="0">
                 <a:solidFill>
-                  <a:srgbClr val="4A4F57"/>
-                </a:solidFill>
-                <a:latin typeface="Inter" pitchFamily="34" charset="0"/>
-                <a:ea typeface="Inter" pitchFamily="34" charset="-122"/>
-                <a:cs typeface="Inter" pitchFamily="34" charset="-120"/>
-              </a:rPr>
-              <a:t>MPNN — sequence-model score, not a success probability</a:t>
+                  <a:srgbClr val="6B6F76"/>
+                </a:solidFill>
+                <a:latin typeface="Inter" pitchFamily="34" charset="0"/>
+                <a:ea typeface="Inter" pitchFamily="34" charset="-122"/>
+                <a:cs typeface="Inter" pitchFamily="34" charset="-120"/>
+              </a:rPr>
+              <a:t>Describes the binder alone. Refolding reproduced the same scores.</a:t>
             </a:r>
             <a:endParaRPr lang="en-US" sz="1200" dirty="0"/>
           </a:p>
@@ -4992,62 +6309,18 @@
       </p:sp>
       <p:sp>
         <p:nvSpPr>
-          <p:cNvPr id="12" name="Text 10"/>
-          <p:cNvSpPr/>
-          <p:nvPr/>
-        </p:nvSpPr>
-        <p:spPr>
-          <a:xfrm>
-            <a:off x="1021719" y="4177088"/>
-            <a:ext cx="4919707" cy="406263"/>
-          </a:xfrm>
-          <a:prstGeom prst="rect">
-            <a:avLst/>
-          </a:prstGeom>
-          <a:noFill/>
-          <a:ln/>
-        </p:spPr>
-        <p:txBody>
-          <a:bodyPr wrap="square" lIns="0" tIns="0" rIns="0" bIns="0" rtlCol="0" anchor="t">
-            <a:normAutofit/>
-          </a:bodyPr>
-          <a:lstStyle/>
-          <a:p>
-            <a:pPr algn="l" indent="0" marL="0">
-              <a:lnSpc>
-                <a:spcPts val="1622"/>
-              </a:lnSpc>
-              <a:buNone/>
-            </a:pPr>
-            <a:r>
-              <a:rPr lang="en-US" sz="1159" dirty="0">
-                <a:solidFill>
-                  <a:srgbClr val="6B6F76"/>
-                </a:solidFill>
-                <a:latin typeface="Inter" pitchFamily="34" charset="0"/>
-                <a:ea typeface="Inter" pitchFamily="34" charset="-122"/>
-                <a:cs typeface="Inter" pitchFamily="34" charset="-120"/>
-              </a:rPr>
-              <a:t>Single α-helix. Refolding the sequence reproduced the same scores.</a:t>
-            </a:r>
-            <a:endParaRPr lang="en-US" sz="1159" dirty="0"/>
-          </a:p>
-        </p:txBody>
-      </p:sp>
-      <p:sp>
-        <p:nvSpPr>
-          <p:cNvPr id="13" name="Shape 11"/>
-          <p:cNvSpPr/>
-          <p:nvPr/>
-        </p:nvSpPr>
-        <p:spPr>
-          <a:xfrm>
-            <a:off x="6188059" y="1947208"/>
-            <a:ext cx="5187973" cy="2816522"/>
+          <p:cNvPr id="11" name="Shape 9"/>
+          <p:cNvSpPr/>
+          <p:nvPr/>
+        </p:nvSpPr>
+        <p:spPr>
+          <a:xfrm>
+            <a:off x="6188059" y="1778515"/>
+            <a:ext cx="5187973" cy="2331680"/>
           </a:xfrm>
           <a:prstGeom prst="roundRect">
             <a:avLst>
-              <a:gd name="adj" fmla="val 3495"/>
+              <a:gd name="adj" fmla="val 4221"/>
             </a:avLst>
           </a:prstGeom>
           <a:solidFill>
@@ -5063,35 +6336,35 @@
       </p:sp>
       <p:sp>
         <p:nvSpPr>
-          <p:cNvPr id="14" name="Text 12"/>
-          <p:cNvSpPr/>
-          <p:nvPr/>
-        </p:nvSpPr>
-        <p:spPr>
-          <a:xfrm>
-            <a:off x="6393838" y="2152988"/>
-            <a:ext cx="4919707" cy="243411"/>
-          </a:xfrm>
-          <a:prstGeom prst="rect">
-            <a:avLst/>
-          </a:prstGeom>
-          <a:noFill/>
-          <a:ln/>
-        </p:spPr>
-        <p:txBody>
-          <a:bodyPr wrap="square" lIns="0" tIns="0" rIns="0" bIns="0" rtlCol="0" anchor="t">
-            <a:normAutofit/>
-          </a:bodyPr>
-          <a:lstStyle/>
-          <a:p>
-            <a:pPr algn="l" indent="0" marL="0">
-              <a:lnSpc>
-                <a:spcPts val="1721"/>
-              </a:lnSpc>
-              <a:buNone/>
-            </a:pPr>
-            <a:r>
-              <a:rPr lang="en-US" sz="1434" b="1" dirty="0">
+          <p:cNvPr id="12" name="Text 10"/>
+          <p:cNvSpPr/>
+          <p:nvPr/>
+        </p:nvSpPr>
+        <p:spPr>
+          <a:xfrm>
+            <a:off x="6393838" y="1984294"/>
+            <a:ext cx="4919707" cy="254009"/>
+          </a:xfrm>
+          <a:prstGeom prst="rect">
+            <a:avLst/>
+          </a:prstGeom>
+          <a:noFill/>
+          <a:ln/>
+        </p:spPr>
+        <p:txBody>
+          <a:bodyPr wrap="square" lIns="0" tIns="0" rIns="0" bIns="0" rtlCol="0" anchor="t">
+            <a:normAutofit/>
+          </a:bodyPr>
+          <a:lstStyle/>
+          <a:p>
+            <a:pPr algn="l" indent="0" marL="0">
+              <a:lnSpc>
+                <a:spcPts val="1800"/>
+              </a:lnSpc>
+              <a:buNone/>
+            </a:pPr>
+            <a:r>
+              <a:rPr lang="en-US" sz="1500" b="1" dirty="0">
                 <a:solidFill>
                   <a:srgbClr val="E0A35F"/>
                 </a:solidFill>
@@ -5099,21 +6372,21 @@
                 <a:ea typeface="Space Grotesk" pitchFamily="34" charset="-122"/>
                 <a:cs typeface="Space Grotesk" pitchFamily="34" charset="-120"/>
               </a:rPr>
-              <a:t>Complex confidence (step 5)</a:t>
-            </a:r>
-            <a:endParaRPr lang="en-US" sz="1434" dirty="0"/>
-          </a:p>
-        </p:txBody>
-      </p:sp>
-      <p:sp>
-        <p:nvSpPr>
-          <p:cNvPr id="15" name="Text 13"/>
-          <p:cNvSpPr/>
-          <p:nvPr/>
-        </p:nvSpPr>
-        <p:spPr>
-          <a:xfrm>
-            <a:off x="6393838" y="2472578"/>
+              <a:t>Complex confidence</a:t>
+            </a:r>
+            <a:endParaRPr lang="en-US" sz="1500" dirty="0"/>
+          </a:p>
+        </p:txBody>
+      </p:sp>
+      <p:sp>
+        <p:nvSpPr>
+          <p:cNvPr id="13" name="Text 11"/>
+          <p:cNvSpPr/>
+          <p:nvPr/>
+        </p:nvSpPr>
+        <p:spPr>
+          <a:xfrm>
+            <a:off x="6393838" y="2314482"/>
             <a:ext cx="1130260" cy="505442"/>
           </a:xfrm>
           <a:prstGeom prst="rect">
@@ -5151,14 +6424,14 @@
       </p:sp>
       <p:sp>
         <p:nvSpPr>
-          <p:cNvPr id="16" name="Text 14"/>
-          <p:cNvSpPr/>
-          <p:nvPr/>
-        </p:nvSpPr>
-        <p:spPr>
-          <a:xfrm>
-            <a:off x="7600283" y="2669667"/>
-            <a:ext cx="2512283" cy="238747"/>
+          <p:cNvPr id="14" name="Text 12"/>
+          <p:cNvSpPr/>
+          <p:nvPr/>
+        </p:nvSpPr>
+        <p:spPr>
+          <a:xfrm>
+            <a:off x="7600283" y="2511571"/>
+            <a:ext cx="2074095" cy="238747"/>
           </a:xfrm>
           <a:prstGeom prst="rect">
             <a:avLst/>
@@ -5187,7 +6460,7 @@
                 <a:ea typeface="Inter" pitchFamily="34" charset="-122"/>
                 <a:cs typeface="Inter" pitchFamily="34" charset="-120"/>
               </a:rPr>
-              <a:t>ipTM — our screening bar is &gt; 0.8</a:t>
+              <a:t>ipTM — screening bar is 0.8</a:t>
             </a:r>
             <a:endParaRPr lang="en-US" sz="1200" dirty="0"/>
           </a:p>
@@ -5195,13 +6468,13 @@
       </p:sp>
       <p:sp>
         <p:nvSpPr>
-          <p:cNvPr id="17" name="Text 15"/>
-          <p:cNvSpPr/>
-          <p:nvPr/>
-        </p:nvSpPr>
-        <p:spPr>
-          <a:xfrm>
-            <a:off x="6393838" y="3032007"/>
+          <p:cNvPr id="15" name="Text 13"/>
+          <p:cNvSpPr/>
+          <p:nvPr/>
+        </p:nvSpPr>
+        <p:spPr>
+          <a:xfrm>
+            <a:off x="6393838" y="2896102"/>
             <a:ext cx="1130260" cy="505442"/>
           </a:xfrm>
           <a:prstGeom prst="rect">
@@ -5239,14 +6512,14 @@
       </p:sp>
       <p:sp>
         <p:nvSpPr>
-          <p:cNvPr id="18" name="Text 16"/>
-          <p:cNvSpPr/>
-          <p:nvPr/>
-        </p:nvSpPr>
-        <p:spPr>
-          <a:xfrm>
-            <a:off x="7600283" y="3229096"/>
-            <a:ext cx="2561401" cy="238747"/>
+          <p:cNvPr id="16" name="Text 14"/>
+          <p:cNvSpPr/>
+          <p:nvPr/>
+        </p:nvSpPr>
+        <p:spPr>
+          <a:xfrm>
+            <a:off x="7600283" y="3093191"/>
+            <a:ext cx="2599651" cy="238747"/>
           </a:xfrm>
           <a:prstGeom prst="rect">
             <a:avLst/>
@@ -5275,7 +6548,7 @@
                 <a:ea typeface="Inter" pitchFamily="34" charset="-122"/>
                 <a:cs typeface="Inter" pitchFamily="34" charset="-120"/>
               </a:rPr>
-              <a:t>interface PAE (Å) — our bar is &lt; 10</a:t>
+              <a:t>interface PAE (Å) — bar is under 10</a:t>
             </a:r>
             <a:endParaRPr lang="en-US" sz="1200" dirty="0"/>
           </a:p>
@@ -5283,45 +6556,111 @@
       </p:sp>
       <p:sp>
         <p:nvSpPr>
+          <p:cNvPr id="17" name="Text 15"/>
+          <p:cNvSpPr/>
+          <p:nvPr/>
+        </p:nvSpPr>
+        <p:spPr>
+          <a:xfrm>
+            <a:off x="6393838" y="3477723"/>
+            <a:ext cx="4919707" cy="452094"/>
+          </a:xfrm>
+          <a:prstGeom prst="rect">
+            <a:avLst/>
+          </a:prstGeom>
+          <a:noFill/>
+          <a:ln/>
+        </p:spPr>
+        <p:txBody>
+          <a:bodyPr wrap="square" lIns="0" tIns="0" rIns="0" bIns="0" rtlCol="0" anchor="t">
+            <a:normAutofit/>
+          </a:bodyPr>
+          <a:lstStyle/>
+          <a:p>
+            <a:pPr algn="l" indent="0" marL="0">
+              <a:lnSpc>
+                <a:spcPts val="1680"/>
+              </a:lnSpc>
+              <a:buNone/>
+            </a:pPr>
+            <a:r>
+              <a:rPr lang="en-US" sz="1200" dirty="0">
+                <a:solidFill>
+                  <a:srgbClr val="C8C6BF"/>
+                </a:solidFill>
+                <a:latin typeface="Inter" pitchFamily="34" charset="0"/>
+                <a:ea typeface="Inter" pitchFamily="34" charset="-122"/>
+                <a:cs typeface="Inter" pitchFamily="34" charset="-120"/>
+              </a:rPr>
+              <a:t>Candidate #2 came back at 0.23 — worse, despite a near-identical monomer score.</a:t>
+            </a:r>
+            <a:endParaRPr lang="en-US" sz="1200" dirty="0"/>
+          </a:p>
+        </p:txBody>
+      </p:sp>
+      <p:sp>
+        <p:nvSpPr>
+          <p:cNvPr id="18" name="Shape 16"/>
+          <p:cNvSpPr/>
+          <p:nvPr/>
+        </p:nvSpPr>
+        <p:spPr>
+          <a:xfrm>
+            <a:off x="812765" y="4303846"/>
+            <a:ext cx="10566443" cy="927658"/>
+          </a:xfrm>
+          <a:prstGeom prst="roundRect">
+            <a:avLst>
+              <a:gd name="adj" fmla="val 10952"/>
+            </a:avLst>
+          </a:prstGeom>
+          <a:solidFill>
+            <a:srgbClr val="16191F"/>
+          </a:solidFill>
+          <a:ln/>
+        </p:spPr>
+      </p:sp>
+      <p:sp>
+        <p:nvSpPr>
           <p:cNvPr id="19" name="Text 17"/>
           <p:cNvSpPr/>
           <p:nvPr/>
         </p:nvSpPr>
         <p:spPr>
           <a:xfrm>
-            <a:off x="6393838" y="3591483"/>
-            <a:ext cx="1130260" cy="505442"/>
-          </a:xfrm>
-          <a:prstGeom prst="rect">
-            <a:avLst/>
-          </a:prstGeom>
-          <a:noFill/>
-          <a:ln/>
-        </p:spPr>
-        <p:txBody>
-          <a:bodyPr wrap="square" lIns="0" tIns="0" rIns="0" bIns="0" rtlCol="0" anchor="t">
-            <a:normAutofit/>
-          </a:bodyPr>
-          <a:lstStyle/>
-          <a:p>
-            <a:pPr algn="l" indent="0" marL="0">
-              <a:lnSpc>
-                <a:spcPts val="3780"/>
-              </a:lnSpc>
-              <a:buNone/>
-            </a:pPr>
-            <a:r>
-              <a:rPr lang="en-US" sz="2700" dirty="0">
-                <a:solidFill>
-                  <a:srgbClr val="F6F5F1"/>
+            <a:off x="1066734" y="4494324"/>
+            <a:ext cx="10360259" cy="269225"/>
+          </a:xfrm>
+          <a:prstGeom prst="rect">
+            <a:avLst/>
+          </a:prstGeom>
+          <a:noFill/>
+          <a:ln/>
+        </p:spPr>
+        <p:txBody>
+          <a:bodyPr wrap="square" lIns="0" tIns="0" rIns="0" bIns="0" rtlCol="0" anchor="t">
+            <a:normAutofit/>
+          </a:bodyPr>
+          <a:lstStyle/>
+          <a:p>
+            <a:pPr algn="l" indent="0" marL="0">
+              <a:lnSpc>
+                <a:spcPts val="1920"/>
+              </a:lnSpc>
+              <a:buNone/>
+            </a:pPr>
+            <a:r>
+              <a:rPr lang="en-US" sz="1600" dirty="0">
+                <a:solidFill>
+                  <a:srgbClr val="5FBFA8"/>
                 </a:solidFill>
                 <a:latin typeface="Space Grotesk" pitchFamily="34" charset="0"/>
                 <a:ea typeface="Space Grotesk" pitchFamily="34" charset="-122"/>
                 <a:cs typeface="Space Grotesk" pitchFamily="34" charset="-120"/>
               </a:rPr>
-              <a:t>88.0</a:t>
-            </a:r>
-            <a:endParaRPr lang="en-US" sz="2700" dirty="0"/>
+              <a:t>Monomer confidence does not assess the binder–target interface.</a:t>
+            </a:r>
+            <a:endParaRPr lang="en-US" sz="1600" dirty="0"/>
           </a:p>
         </p:txBody>
       </p:sp>
@@ -5333,29 +6672,29 @@
         </p:nvSpPr>
         <p:spPr>
           <a:xfrm>
-            <a:off x="7600283" y="3788572"/>
-            <a:ext cx="1197737" cy="238747"/>
-          </a:xfrm>
-          <a:prstGeom prst="rect">
-            <a:avLst/>
-          </a:prstGeom>
-          <a:noFill/>
-          <a:ln/>
-        </p:spPr>
-        <p:txBody>
-          <a:bodyPr wrap="square" lIns="0" tIns="0" rIns="0" bIns="0" rtlCol="0" anchor="t">
-            <a:normAutofit/>
-          </a:bodyPr>
-          <a:lstStyle/>
-          <a:p>
-            <a:pPr algn="l" indent="0" marL="0">
-              <a:lnSpc>
-                <a:spcPts val="1680"/>
-              </a:lnSpc>
-              <a:buNone/>
-            </a:pPr>
-            <a:r>
-              <a:rPr lang="en-US" sz="1200" dirty="0">
+            <a:off x="1066734" y="4801642"/>
+            <a:ext cx="10360259" cy="264787"/>
+          </a:xfrm>
+          <a:prstGeom prst="rect">
+            <a:avLst/>
+          </a:prstGeom>
+          <a:noFill/>
+          <a:ln/>
+        </p:spPr>
+        <p:txBody>
+          <a:bodyPr wrap="square" lIns="0" tIns="0" rIns="0" bIns="0" rtlCol="0" anchor="t">
+            <a:normAutofit/>
+          </a:bodyPr>
+          <a:lstStyle/>
+          <a:p>
+            <a:pPr algn="l" indent="0" marL="0">
+              <a:lnSpc>
+                <a:spcPts val="1885"/>
+              </a:lnSpc>
+              <a:buNone/>
+            </a:pPr>
+            <a:r>
+              <a:rPr lang="en-US" sz="1300" dirty="0">
                 <a:solidFill>
                   <a:srgbClr val="C8C6BF"/>
                 </a:solidFill>
@@ -5363,163 +6702,9 @@
                 <a:ea typeface="Inter" pitchFamily="34" charset="-122"/>
                 <a:cs typeface="Inter" pitchFamily="34" charset="-120"/>
               </a:rPr>
-              <a:t>complex pLDDT</a:t>
-            </a:r>
-            <a:endParaRPr lang="en-US" sz="1200" dirty="0"/>
-          </a:p>
-        </p:txBody>
-      </p:sp>
-      <p:sp>
-        <p:nvSpPr>
-          <p:cNvPr id="21" name="Text 19"/>
-          <p:cNvSpPr/>
-          <p:nvPr/>
-        </p:nvSpPr>
-        <p:spPr>
-          <a:xfrm>
-            <a:off x="6393838" y="4150956"/>
-            <a:ext cx="4919707" cy="432394"/>
-          </a:xfrm>
-          <a:prstGeom prst="rect">
-            <a:avLst/>
-          </a:prstGeom>
-          <a:noFill/>
-          <a:ln/>
-        </p:spPr>
-        <p:txBody>
-          <a:bodyPr wrap="square" lIns="0" tIns="0" rIns="0" bIns="0" rtlCol="0" anchor="t">
-            <a:normAutofit/>
-          </a:bodyPr>
-          <a:lstStyle/>
-          <a:p>
-            <a:pPr algn="l" indent="0" marL="0">
-              <a:lnSpc>
-                <a:spcPts val="1612"/>
-              </a:lnSpc>
-              <a:buNone/>
-            </a:pPr>
-            <a:r>
-              <a:rPr lang="en-US" sz="1151" dirty="0">
-                <a:solidFill>
-                  <a:srgbClr val="C8C6BF"/>
-                </a:solidFill>
-                <a:latin typeface="Inter" pitchFamily="34" charset="0"/>
-                <a:ea typeface="Inter" pitchFamily="34" charset="-122"/>
-                <a:cs typeface="Inter" pitchFamily="34" charset="-120"/>
-              </a:rPr>
-              <a:t>Does not meet the thresholds we screen on. Neither metric measures binding affinity.</a:t>
-            </a:r>
-            <a:endParaRPr lang="en-US" sz="1151" dirty="0"/>
-          </a:p>
-        </p:txBody>
-      </p:sp>
-      <p:sp>
-        <p:nvSpPr>
-          <p:cNvPr id="22" name="Shape 20"/>
-          <p:cNvSpPr/>
-          <p:nvPr/>
-        </p:nvSpPr>
-        <p:spPr>
-          <a:xfrm>
-            <a:off x="812765" y="4957381"/>
-            <a:ext cx="10566443" cy="884635"/>
-          </a:xfrm>
-          <a:prstGeom prst="roundRect">
-            <a:avLst>
-              <a:gd name="adj" fmla="val 11485"/>
-            </a:avLst>
-          </a:prstGeom>
-          <a:solidFill>
-            <a:srgbClr val="16191F"/>
-          </a:solidFill>
-          <a:ln/>
-        </p:spPr>
-      </p:sp>
-      <p:sp>
-        <p:nvSpPr>
-          <p:cNvPr id="23" name="Text 21"/>
-          <p:cNvSpPr/>
-          <p:nvPr/>
-        </p:nvSpPr>
-        <p:spPr>
-          <a:xfrm>
-            <a:off x="1066734" y="5147859"/>
-            <a:ext cx="10360259" cy="247533"/>
-          </a:xfrm>
-          <a:prstGeom prst="rect">
-            <a:avLst/>
-          </a:prstGeom>
-          <a:noFill/>
-          <a:ln/>
-        </p:spPr>
-        <p:txBody>
-          <a:bodyPr wrap="square" lIns="0" tIns="0" rIns="0" bIns="0" rtlCol="0" anchor="t">
-            <a:normAutofit/>
-          </a:bodyPr>
-          <a:lstStyle/>
-          <a:p>
-            <a:pPr algn="l" indent="0" marL="0">
-              <a:lnSpc>
-                <a:spcPts val="1770"/>
-              </a:lnSpc>
-              <a:buNone/>
-            </a:pPr>
-            <a:r>
-              <a:rPr lang="en-US" sz="1475" dirty="0">
-                <a:solidFill>
-                  <a:srgbClr val="5FBFA8"/>
-                </a:solidFill>
-                <a:latin typeface="Space Grotesk" pitchFamily="34" charset="0"/>
-                <a:ea typeface="Space Grotesk" pitchFamily="34" charset="-122"/>
-                <a:cs typeface="Space Grotesk" pitchFamily="34" charset="-120"/>
-              </a:rPr>
-              <a:t>High monomer confidence did not translate into high complex confidence.</a:t>
-            </a:r>
-            <a:endParaRPr lang="en-US" sz="1475" dirty="0"/>
-          </a:p>
-        </p:txBody>
-      </p:sp>
-      <p:sp>
-        <p:nvSpPr>
-          <p:cNvPr id="24" name="Text 22"/>
-          <p:cNvSpPr/>
-          <p:nvPr/>
-        </p:nvSpPr>
-        <p:spPr>
-          <a:xfrm>
-            <a:off x="1066734" y="5433482"/>
-            <a:ext cx="10360259" cy="243457"/>
-          </a:xfrm>
-          <a:prstGeom prst="rect">
-            <a:avLst/>
-          </a:prstGeom>
-          <a:noFill/>
-          <a:ln/>
-        </p:spPr>
-        <p:txBody>
-          <a:bodyPr wrap="square" lIns="0" tIns="0" rIns="0" bIns="0" rtlCol="0" anchor="t">
-            <a:normAutofit/>
-          </a:bodyPr>
-          <a:lstStyle/>
-          <a:p>
-            <a:pPr algn="l" indent="0" marL="0">
-              <a:lnSpc>
-                <a:spcPts val="1720"/>
-              </a:lnSpc>
-              <a:buNone/>
-            </a:pPr>
-            <a:r>
-              <a:rPr lang="en-US" sz="1186" dirty="0">
-                <a:solidFill>
-                  <a:srgbClr val="C8C6BF"/>
-                </a:solidFill>
-                <a:latin typeface="Inter" pitchFamily="34" charset="0"/>
-                <a:ea typeface="Inter" pitchFamily="34" charset="-122"/>
-                <a:cs typeface="Inter" pitchFamily="34" charset="-120"/>
-              </a:rPr>
-              <a:t>Monomer confidence does not assess the binder–target interface. That is what step 5 is for.</a:t>
-            </a:r>
-            <a:endParaRPr lang="en-US" sz="1186" dirty="0"/>
+              <a:t>The scores that ranked our candidates and the score that screens them disagreed. That is what the independent check is for.</a:t>
+            </a:r>
+            <a:endParaRPr lang="en-US" sz="1300" dirty="0"/>
           </a:p>
         </p:txBody>
       </p:sp>
@@ -6278,28 +7463,28 @@
         <p:spPr>
           <a:xfrm>
             <a:off x="812765" y="812766"/>
-            <a:ext cx="10883436" cy="472428"/>
-          </a:xfrm>
-          <a:prstGeom prst="rect">
-            <a:avLst/>
-          </a:prstGeom>
-          <a:noFill/>
-          <a:ln/>
-        </p:spPr>
-        <p:txBody>
-          <a:bodyPr wrap="square" lIns="0" tIns="0" rIns="0" bIns="0" rtlCol="0" anchor="t">
-            <a:normAutofit/>
-          </a:bodyPr>
-          <a:lstStyle/>
-          <a:p>
-            <a:pPr algn="l" indent="0" marL="0">
-              <a:lnSpc>
-                <a:spcPts val="3520"/>
-              </a:lnSpc>
-              <a:buNone/>
-            </a:pPr>
-            <a:r>
-              <a:rPr lang="en-US" sz="3200" dirty="0">
+            <a:ext cx="10883436" cy="444485"/>
+          </a:xfrm>
+          <a:prstGeom prst="rect">
+            <a:avLst/>
+          </a:prstGeom>
+          <a:noFill/>
+          <a:ln/>
+        </p:spPr>
+        <p:txBody>
+          <a:bodyPr wrap="square" lIns="0" tIns="0" rIns="0" bIns="0" rtlCol="0" anchor="t">
+            <a:normAutofit/>
+          </a:bodyPr>
+          <a:lstStyle/>
+          <a:p>
+            <a:pPr algn="l" indent="0" marL="0">
+              <a:lnSpc>
+                <a:spcPts val="3300"/>
+              </a:lnSpc>
+              <a:buNone/>
+            </a:pPr>
+            <a:r>
+              <a:rPr lang="en-US" sz="3000" dirty="0">
                 <a:solidFill>
                   <a:srgbClr val="16191F"/>
                 </a:solidFill>
@@ -6307,9 +7492,9 @@
                 <a:ea typeface="Space Grotesk" pitchFamily="34" charset="-122"/>
                 <a:cs typeface="Space Grotesk" pitchFamily="34" charset="-120"/>
               </a:rPr>
-              <a:t>Three candidates below our screening thresholds</a:t>
-            </a:r>
-            <a:endParaRPr lang="en-US" sz="3200" dirty="0"/>
+              <a:t>Two bugs, found by running it</a:t>
+            </a:r>
+            <a:endParaRPr lang="en-US" sz="3000" dirty="0"/>
           </a:p>
         </p:txBody>
       </p:sp>
@@ -6321,29 +7506,29 @@
         </p:nvSpPr>
         <p:spPr>
           <a:xfrm>
-            <a:off x="812765" y="1335965"/>
-            <a:ext cx="10883436" cy="274297"/>
-          </a:xfrm>
-          <a:prstGeom prst="rect">
-            <a:avLst/>
-          </a:prstGeom>
-          <a:noFill/>
-          <a:ln/>
-        </p:spPr>
-        <p:txBody>
-          <a:bodyPr wrap="square" lIns="0" tIns="0" rIns="0" bIns="0" rtlCol="0" anchor="t">
-            <a:normAutofit/>
-          </a:bodyPr>
-          <a:lstStyle/>
-          <a:p>
-            <a:pPr algn="l" indent="0" marL="0">
-              <a:lnSpc>
-                <a:spcPts val="1960"/>
-              </a:lnSpc>
-              <a:buNone/>
-            </a:pPr>
-            <a:r>
-              <a:rPr lang="en-US" sz="1400" dirty="0">
+            <a:off x="812765" y="1308022"/>
+            <a:ext cx="10883436" cy="265421"/>
+          </a:xfrm>
+          <a:prstGeom prst="rect">
+            <a:avLst/>
+          </a:prstGeom>
+          <a:noFill/>
+          <a:ln/>
+        </p:spPr>
+        <p:txBody>
+          <a:bodyPr wrap="square" lIns="0" tIns="0" rIns="0" bIns="0" rtlCol="0" anchor="t">
+            <a:normAutofit/>
+          </a:bodyPr>
+          <a:lstStyle/>
+          <a:p>
+            <a:pPr algn="l" indent="0" marL="0">
+              <a:lnSpc>
+                <a:spcPts val="1890"/>
+              </a:lnSpc>
+              <a:buNone/>
+            </a:pPr>
+            <a:r>
+              <a:rPr lang="en-US" sz="1350" dirty="0">
                 <a:solidFill>
                   <a:srgbClr val="6B6F76"/>
                 </a:solidFill>
@@ -6351,246 +7536,256 @@
                 <a:ea typeface="Inter" pitchFamily="34" charset="-122"/>
                 <a:cs typeface="Inter" pitchFamily="34" charset="-120"/>
               </a:rPr>
-              <a:t>We kept going. Monomer confidence stayed high; complex confidence stayed below the bar.</a:t>
-            </a:r>
-            <a:endParaRPr lang="en-US" sz="1400" dirty="0"/>
-          </a:p>
-        </p:txBody>
-      </p:sp>
-      <p:sp>
-        <p:nvSpPr>
-          <p:cNvPr id="4" name="Text 2"/>
-          <p:cNvSpPr/>
-          <p:nvPr/>
-        </p:nvSpPr>
-        <p:spPr>
-          <a:xfrm>
-            <a:off x="1003242" y="1775340"/>
-            <a:ext cx="3401021" cy="229871"/>
-          </a:xfrm>
-          <a:prstGeom prst="rect">
-            <a:avLst/>
-          </a:prstGeom>
-          <a:noFill/>
-          <a:ln/>
-        </p:spPr>
-        <p:txBody>
-          <a:bodyPr wrap="square" lIns="0" tIns="0" rIns="0" bIns="0" rtlCol="0" anchor="t">
-            <a:normAutofit/>
-          </a:bodyPr>
-          <a:lstStyle/>
-          <a:p>
-            <a:pPr algn="l" indent="0" marL="0">
-              <a:lnSpc>
-                <a:spcPts val="1610"/>
-              </a:lnSpc>
-              <a:buNone/>
-            </a:pPr>
-            <a:r>
-              <a:rPr lang="en-US" sz="1150" b="1" spc="50" kern="0" dirty="0">
-                <a:solidFill>
-                  <a:srgbClr val="6B6F76"/>
-                </a:solidFill>
-                <a:latin typeface="Inter" pitchFamily="34" charset="0"/>
-                <a:ea typeface="Inter" pitchFamily="34" charset="-122"/>
-                <a:cs typeface="Inter" pitchFamily="34" charset="-120"/>
-              </a:rPr>
-              <a:t>CANDIDATE</a:t>
-            </a:r>
-            <a:endParaRPr lang="en-US" sz="1150" dirty="0"/>
-          </a:p>
-        </p:txBody>
-      </p:sp>
-      <p:sp>
-        <p:nvSpPr>
-          <p:cNvPr id="5" name="Text 3"/>
-          <p:cNvSpPr/>
-          <p:nvPr/>
-        </p:nvSpPr>
-        <p:spPr>
-          <a:xfrm>
-            <a:off x="4457595" y="1775340"/>
-            <a:ext cx="1831305" cy="229871"/>
-          </a:xfrm>
-          <a:prstGeom prst="rect">
-            <a:avLst/>
-          </a:prstGeom>
-          <a:noFill/>
-          <a:ln/>
-        </p:spPr>
-        <p:txBody>
-          <a:bodyPr wrap="square" lIns="0" tIns="0" rIns="0" bIns="0" rtlCol="0" anchor="t">
-            <a:normAutofit/>
-          </a:bodyPr>
-          <a:lstStyle/>
-          <a:p>
-            <a:pPr algn="l" indent="0" marL="0">
-              <a:lnSpc>
-                <a:spcPts val="1610"/>
-              </a:lnSpc>
-              <a:buNone/>
-            </a:pPr>
-            <a:r>
-              <a:rPr lang="en-US" sz="1150" b="1" spc="50" kern="0" dirty="0">
-                <a:solidFill>
-                  <a:srgbClr val="6B6F76"/>
-                </a:solidFill>
-                <a:latin typeface="Inter" pitchFamily="34" charset="0"/>
-                <a:ea typeface="Inter" pitchFamily="34" charset="-122"/>
-                <a:cs typeface="Inter" pitchFamily="34" charset="-120"/>
-              </a:rPr>
-              <a:t>pLDDT / pTM</a:t>
-            </a:r>
-            <a:endParaRPr lang="en-US" sz="1150" dirty="0"/>
-          </a:p>
-        </p:txBody>
-      </p:sp>
-      <p:sp>
-        <p:nvSpPr>
-          <p:cNvPr id="6" name="Text 4"/>
-          <p:cNvSpPr/>
-          <p:nvPr/>
-        </p:nvSpPr>
-        <p:spPr>
-          <a:xfrm>
-            <a:off x="6387951" y="1775340"/>
-            <a:ext cx="1320782" cy="229871"/>
-          </a:xfrm>
-          <a:prstGeom prst="rect">
-            <a:avLst/>
-          </a:prstGeom>
-          <a:noFill/>
-          <a:ln/>
-        </p:spPr>
-        <p:txBody>
-          <a:bodyPr wrap="square" lIns="0" tIns="0" rIns="0" bIns="0" rtlCol="0" anchor="t">
-            <a:normAutofit/>
-          </a:bodyPr>
-          <a:lstStyle/>
-          <a:p>
-            <a:pPr algn="l" indent="0" marL="0">
-              <a:lnSpc>
-                <a:spcPts val="1610"/>
-              </a:lnSpc>
-              <a:buNone/>
-            </a:pPr>
-            <a:r>
-              <a:rPr lang="en-US" sz="1150" b="1" spc="50" kern="0" dirty="0">
-                <a:solidFill>
-                  <a:srgbClr val="6B6F76"/>
-                </a:solidFill>
-                <a:latin typeface="Inter" pitchFamily="34" charset="0"/>
-                <a:ea typeface="Inter" pitchFamily="34" charset="-122"/>
-                <a:cs typeface="Inter" pitchFamily="34" charset="-120"/>
-              </a:rPr>
-              <a:t>ipTM &gt; 0.8</a:t>
-            </a:r>
-            <a:endParaRPr lang="en-US" sz="1150" dirty="0"/>
-          </a:p>
-        </p:txBody>
-      </p:sp>
-      <p:sp>
-        <p:nvSpPr>
-          <p:cNvPr id="7" name="Text 5"/>
-          <p:cNvSpPr/>
-          <p:nvPr/>
-        </p:nvSpPr>
-        <p:spPr>
-          <a:xfrm>
-            <a:off x="7810324" y="1775340"/>
-            <a:ext cx="1511259" cy="229871"/>
-          </a:xfrm>
-          <a:prstGeom prst="rect">
-            <a:avLst/>
-          </a:prstGeom>
-          <a:noFill/>
-          <a:ln/>
-        </p:spPr>
-        <p:txBody>
-          <a:bodyPr wrap="square" lIns="0" tIns="0" rIns="0" bIns="0" rtlCol="0" anchor="t">
-            <a:normAutofit/>
-          </a:bodyPr>
-          <a:lstStyle/>
-          <a:p>
-            <a:pPr algn="l" indent="0" marL="0">
-              <a:lnSpc>
-                <a:spcPts val="1610"/>
-              </a:lnSpc>
-              <a:buNone/>
-            </a:pPr>
-            <a:r>
-              <a:rPr lang="en-US" sz="1150" b="1" spc="50" kern="0" dirty="0">
-                <a:solidFill>
-                  <a:srgbClr val="6B6F76"/>
-                </a:solidFill>
-                <a:latin typeface="Inter" pitchFamily="34" charset="0"/>
-                <a:ea typeface="Inter" pitchFamily="34" charset="-122"/>
-                <a:cs typeface="Inter" pitchFamily="34" charset="-120"/>
-              </a:rPr>
-              <a:t>PAE &lt; 10 Å</a:t>
-            </a:r>
-            <a:endParaRPr lang="en-US" sz="1150" dirty="0"/>
-          </a:p>
-        </p:txBody>
-      </p:sp>
-      <p:sp>
-        <p:nvSpPr>
-          <p:cNvPr id="8" name="Text 6"/>
-          <p:cNvSpPr/>
-          <p:nvPr/>
-        </p:nvSpPr>
-        <p:spPr>
-          <a:xfrm>
-            <a:off x="9423174" y="1775340"/>
-            <a:ext cx="1818524" cy="229871"/>
-          </a:xfrm>
-          <a:prstGeom prst="rect">
-            <a:avLst/>
-          </a:prstGeom>
-          <a:noFill/>
-          <a:ln/>
-        </p:spPr>
-        <p:txBody>
-          <a:bodyPr wrap="square" lIns="0" tIns="0" rIns="0" bIns="0" rtlCol="0" anchor="t">
-            <a:normAutofit/>
-          </a:bodyPr>
-          <a:lstStyle/>
-          <a:p>
-            <a:pPr algn="l" indent="0" marL="0">
-              <a:lnSpc>
-                <a:spcPts val="1610"/>
-              </a:lnSpc>
-              <a:buNone/>
-            </a:pPr>
-            <a:r>
-              <a:rPr lang="en-US" sz="1150" b="1" spc="50" kern="0" dirty="0">
-                <a:solidFill>
-                  <a:srgbClr val="6B6F76"/>
-                </a:solidFill>
-                <a:latin typeface="Inter" pitchFamily="34" charset="0"/>
-                <a:ea typeface="Inter" pitchFamily="34" charset="-122"/>
-                <a:cs typeface="Inter" pitchFamily="34" charset="-120"/>
-              </a:rPr>
-              <a:t>PASSES</a:t>
-            </a:r>
-            <a:endParaRPr lang="en-US" sz="1150" dirty="0"/>
-          </a:p>
-        </p:txBody>
-      </p:sp>
-      <p:sp>
-        <p:nvSpPr>
-          <p:cNvPr id="9" name="Shape 7"/>
-          <p:cNvSpPr/>
-          <p:nvPr/>
-        </p:nvSpPr>
-        <p:spPr>
-          <a:xfrm>
-            <a:off x="815940" y="2046477"/>
-            <a:ext cx="10560093" cy="561413"/>
+              <a:t>A code review of the MCP server found the refinement path was not doing what its interface claimed.</a:t>
+            </a:r>
+            <a:endParaRPr lang="en-US" sz="1350" dirty="0"/>
+          </a:p>
+        </p:txBody>
+      </p:sp>
+      <p:sp>
+        <p:nvSpPr>
+          <p:cNvPr id="4" name="Shape 2"/>
+          <p:cNvSpPr/>
+          <p:nvPr/>
+        </p:nvSpPr>
+        <p:spPr>
+          <a:xfrm>
+            <a:off x="815940" y="1729017"/>
+            <a:ext cx="5200653" cy="1338582"/>
           </a:xfrm>
           <a:prstGeom prst="roundRect">
             <a:avLst>
-              <a:gd name="adj" fmla="val 13007"/>
+              <a:gd name="adj" fmla="val 7353"/>
+            </a:avLst>
+          </a:prstGeom>
+          <a:solidFill>
+            <a:srgbClr val="2A1D18"/>
+          </a:solidFill>
+          <a:ln w="6350">
+            <a:solidFill>
+              <a:srgbClr val="4A332A"/>
+            </a:solidFill>
+            <a:prstDash val="solid"/>
+          </a:ln>
+        </p:spPr>
+      </p:sp>
+      <p:sp>
+        <p:nvSpPr>
+          <p:cNvPr id="5" name="Text 3"/>
+          <p:cNvSpPr/>
+          <p:nvPr/>
+        </p:nvSpPr>
+        <p:spPr>
+          <a:xfrm>
+            <a:off x="1009039" y="1922115"/>
+            <a:ext cx="4958890" cy="238747"/>
+          </a:xfrm>
+          <a:prstGeom prst="rect">
+            <a:avLst/>
+          </a:prstGeom>
+          <a:noFill/>
+          <a:ln/>
+        </p:spPr>
+        <p:txBody>
+          <a:bodyPr wrap="square" lIns="0" tIns="0" rIns="0" bIns="0" rtlCol="0" anchor="t">
+            <a:normAutofit/>
+          </a:bodyPr>
+          <a:lstStyle/>
+          <a:p>
+            <a:pPr algn="l" indent="0" marL="0">
+              <a:lnSpc>
+                <a:spcPts val="1680"/>
+              </a:lnSpc>
+              <a:buNone/>
+            </a:pPr>
+            <a:r>
+              <a:rPr lang="en-US" sz="1400" b="1" dirty="0">
+                <a:solidFill>
+                  <a:srgbClr val="E0A35F"/>
+                </a:solidFill>
+                <a:latin typeface="Space Grotesk" pitchFamily="34" charset="0"/>
+                <a:ea typeface="Space Grotesk" pitchFamily="34" charset="-122"/>
+                <a:cs typeface="Space Grotesk" pitchFamily="34" charset="-120"/>
+              </a:rPr>
+              <a:t>The optimizer ignored the target</a:t>
+            </a:r>
+            <a:endParaRPr lang="en-US" sz="1400" dirty="0"/>
+          </a:p>
+        </p:txBody>
+      </p:sp>
+      <p:sp>
+        <p:nvSpPr>
+          <p:cNvPr id="6" name="Text 4"/>
+          <p:cNvSpPr/>
+          <p:nvPr/>
+        </p:nvSpPr>
+        <p:spPr>
+          <a:xfrm>
+            <a:off x="1009039" y="2211636"/>
+            <a:ext cx="4958890" cy="688265"/>
+          </a:xfrm>
+          <a:prstGeom prst="rect">
+            <a:avLst/>
+          </a:prstGeom>
+          <a:noFill/>
+          <a:ln/>
+        </p:spPr>
+        <p:txBody>
+          <a:bodyPr wrap="square" lIns="0" tIns="0" rIns="0" bIns="0" rtlCol="0" anchor="t">
+            <a:normAutofit/>
+          </a:bodyPr>
+          <a:lstStyle/>
+          <a:p>
+            <a:pPr algn="l" indent="0" marL="0">
+              <a:lnSpc>
+                <a:spcPts val="1740"/>
+              </a:lnSpc>
+              <a:buNone/>
+            </a:pPr>
+            <a:r>
+              <a:rPr lang="en-US" sz="1200" dirty="0">
+                <a:solidFill>
+                  <a:srgbClr val="E8D9CF"/>
+                </a:solidFill>
+                <a:latin typeface="Inter" pitchFamily="34" charset="0"/>
+                <a:ea typeface="Inter" pitchFamily="34" charset="-122"/>
+                <a:cs typeface="Inter" pitchFamily="34" charset="-120"/>
+              </a:rPr>
+              <a:t>optimize_sequence checked that the target file existed and never used it again. Its "affinity" improvement was a monomer refold — no target, no complex.</a:t>
+            </a:r>
+            <a:endParaRPr lang="en-US" sz="1200" dirty="0"/>
+          </a:p>
+        </p:txBody>
+      </p:sp>
+      <p:sp>
+        <p:nvSpPr>
+          <p:cNvPr id="7" name="Shape 5"/>
+          <p:cNvSpPr/>
+          <p:nvPr/>
+        </p:nvSpPr>
+        <p:spPr>
+          <a:xfrm>
+            <a:off x="6175334" y="1729017"/>
+            <a:ext cx="5200699" cy="1338582"/>
+          </a:xfrm>
+          <a:prstGeom prst="roundRect">
+            <a:avLst>
+              <a:gd name="adj" fmla="val 7353"/>
+            </a:avLst>
+          </a:prstGeom>
+          <a:solidFill>
+            <a:srgbClr val="2A1D18"/>
+          </a:solidFill>
+          <a:ln w="6350">
+            <a:solidFill>
+              <a:srgbClr val="4A332A"/>
+            </a:solidFill>
+            <a:prstDash val="solid"/>
+          </a:ln>
+        </p:spPr>
+      </p:sp>
+      <p:sp>
+        <p:nvSpPr>
+          <p:cNvPr id="8" name="Text 6"/>
+          <p:cNvSpPr/>
+          <p:nvPr/>
+        </p:nvSpPr>
+        <p:spPr>
+          <a:xfrm>
+            <a:off x="6368433" y="1922115"/>
+            <a:ext cx="4958937" cy="238747"/>
+          </a:xfrm>
+          <a:prstGeom prst="rect">
+            <a:avLst/>
+          </a:prstGeom>
+          <a:noFill/>
+          <a:ln/>
+        </p:spPr>
+        <p:txBody>
+          <a:bodyPr wrap="square" lIns="0" tIns="0" rIns="0" bIns="0" rtlCol="0" anchor="t">
+            <a:normAutofit/>
+          </a:bodyPr>
+          <a:lstStyle/>
+          <a:p>
+            <a:pPr algn="l" indent="0" marL="0">
+              <a:lnSpc>
+                <a:spcPts val="1680"/>
+              </a:lnSpc>
+              <a:buNone/>
+            </a:pPr>
+            <a:r>
+              <a:rPr lang="en-US" sz="1400" b="1" dirty="0">
+                <a:solidFill>
+                  <a:srgbClr val="E0A35F"/>
+                </a:solidFill>
+                <a:latin typeface="Space Grotesk" pitchFamily="34" charset="0"/>
+                <a:ea typeface="Space Grotesk" pitchFamily="34" charset="-122"/>
+                <a:cs typeface="Space Grotesk" pitchFamily="34" charset="-120"/>
+              </a:rPr>
+              <a:t>The right tool was never wired up</a:t>
+            </a:r>
+            <a:endParaRPr lang="en-US" sz="1400" dirty="0"/>
+          </a:p>
+        </p:txBody>
+      </p:sp>
+      <p:sp>
+        <p:nvSpPr>
+          <p:cNvPr id="9" name="Text 7"/>
+          <p:cNvSpPr/>
+          <p:nvPr/>
+        </p:nvSpPr>
+        <p:spPr>
+          <a:xfrm>
+            <a:off x="6368433" y="2211636"/>
+            <a:ext cx="4958937" cy="688265"/>
+          </a:xfrm>
+          <a:prstGeom prst="rect">
+            <a:avLst/>
+          </a:prstGeom>
+          <a:noFill/>
+          <a:ln/>
+        </p:spPr>
+        <p:txBody>
+          <a:bodyPr wrap="square" lIns="0" tIns="0" rIns="0" bIns="0" rtlCol="0" anchor="t">
+            <a:normAutofit/>
+          </a:bodyPr>
+          <a:lstStyle/>
+          <a:p>
+            <a:pPr algn="l" indent="0" marL="0">
+              <a:lnSpc>
+                <a:spcPts val="1740"/>
+              </a:lnSpc>
+              <a:buNone/>
+            </a:pPr>
+            <a:r>
+              <a:rPr lang="en-US" sz="1200" dirty="0">
+                <a:solidFill>
+                  <a:srgbClr val="E8D9CF"/>
+                </a:solidFill>
+                <a:latin typeface="Inter" pitchFamily="34" charset="0"/>
+                <a:ea typeface="Inter" pitchFamily="34" charset="-122"/>
+                <a:cs typeface="Inter" pitchFamily="34" charset="-120"/>
+              </a:rPr>
+              <a:t>design_for_interface, which does keep the target fixed, was never exposed as a tool and called a ProteinMPNN flag that does not exist on this version.</a:t>
+            </a:r>
+            <a:endParaRPr lang="en-US" sz="1200" dirty="0"/>
+          </a:p>
+        </p:txBody>
+      </p:sp>
+      <p:sp>
+        <p:nvSpPr>
+          <p:cNvPr id="10" name="Shape 8"/>
+          <p:cNvSpPr/>
+          <p:nvPr/>
+        </p:nvSpPr>
+        <p:spPr>
+          <a:xfrm>
+            <a:off x="815940" y="3251746"/>
+            <a:ext cx="10560093" cy="754471"/>
+          </a:xfrm>
+          <a:prstGeom prst="roundRect">
+            <a:avLst>
+              <a:gd name="adj" fmla="val 9679"/>
             </a:avLst>
           </a:prstGeom>
           <a:solidFill>
@@ -6606,43 +7801,43 @@
       </p:sp>
       <p:sp>
         <p:nvSpPr>
-          <p:cNvPr id="10" name="Text 8"/>
-          <p:cNvSpPr/>
-          <p:nvPr/>
-        </p:nvSpPr>
-        <p:spPr>
-          <a:xfrm>
-            <a:off x="1009039" y="2211589"/>
-            <a:ext cx="3401021" cy="256545"/>
-          </a:xfrm>
-          <a:prstGeom prst="rect">
-            <a:avLst/>
-          </a:prstGeom>
-          <a:noFill/>
-          <a:ln/>
-        </p:spPr>
-        <p:txBody>
-          <a:bodyPr wrap="square" lIns="0" tIns="0" rIns="0" bIns="0" rtlCol="0" anchor="t">
-            <a:normAutofit/>
-          </a:bodyPr>
-          <a:lstStyle/>
-          <a:p>
-            <a:pPr algn="l" indent="0" marL="0">
-              <a:lnSpc>
-                <a:spcPts val="1820"/>
+          <p:cNvPr id="11" name="Text 9"/>
+          <p:cNvSpPr/>
+          <p:nvPr/>
+        </p:nvSpPr>
+        <p:spPr>
+          <a:xfrm>
+            <a:off x="1021719" y="3529893"/>
+            <a:ext cx="1447767" cy="223530"/>
+          </a:xfrm>
+          <a:prstGeom prst="rect">
+            <a:avLst/>
+          </a:prstGeom>
+          <a:noFill/>
+          <a:ln/>
+        </p:spPr>
+        <p:txBody>
+          <a:bodyPr wrap="square" lIns="0" tIns="0" rIns="0" bIns="0" rtlCol="0" anchor="t">
+            <a:normAutofit/>
+          </a:bodyPr>
+          <a:lstStyle/>
+          <a:p>
+            <a:pPr algn="l" indent="0" marL="0">
+              <a:lnSpc>
+                <a:spcPts val="1560"/>
               </a:lnSpc>
               <a:buNone/>
             </a:pPr>
             <a:r>
               <a:rPr lang="en-US" sz="1300" b="1" dirty="0">
                 <a:solidFill>
-                  <a:srgbClr val="16191F"/>
-                </a:solidFill>
-                <a:latin typeface="Inter" pitchFamily="34" charset="0"/>
-                <a:ea typeface="Inter" pitchFamily="34" charset="-122"/>
-                <a:cs typeface="Inter" pitchFamily="34" charset="-120"/>
-              </a:rPr>
-              <a:t>#1  highest monomer confidence</a:t>
+                  <a:srgbClr val="B5533A"/>
+                </a:solidFill>
+                <a:latin typeface="Inter" pitchFamily="34" charset="0"/>
+                <a:ea typeface="Inter" pitchFamily="34" charset="-122"/>
+                <a:cs typeface="Inter" pitchFamily="34" charset="-120"/>
+              </a:rPr>
+              <a:t>Retracted</a:t>
             </a:r>
             <a:endParaRPr lang="en-US" sz="1300" dirty="0"/>
           </a:p>
@@ -6650,35 +7845,35 @@
       </p:sp>
       <p:sp>
         <p:nvSpPr>
-          <p:cNvPr id="11" name="Text 9"/>
-          <p:cNvSpPr/>
-          <p:nvPr/>
-        </p:nvSpPr>
-        <p:spPr>
-          <a:xfrm>
-            <a:off x="4463392" y="2211589"/>
-            <a:ext cx="1831305" cy="256545"/>
-          </a:xfrm>
-          <a:prstGeom prst="rect">
-            <a:avLst/>
-          </a:prstGeom>
-          <a:noFill/>
-          <a:ln/>
-        </p:spPr>
-        <p:txBody>
-          <a:bodyPr wrap="square" lIns="0" tIns="0" rIns="0" bIns="0" rtlCol="0" anchor="t">
-            <a:normAutofit/>
-          </a:bodyPr>
-          <a:lstStyle/>
-          <a:p>
-            <a:pPr algn="l" indent="0" marL="0">
-              <a:lnSpc>
-                <a:spcPts val="1820"/>
-              </a:lnSpc>
-              <a:buNone/>
-            </a:pPr>
-            <a:r>
-              <a:rPr lang="en-US" sz="1300" dirty="0">
+          <p:cNvPr id="12" name="Text 10"/>
+          <p:cNvSpPr/>
+          <p:nvPr/>
+        </p:nvSpPr>
+        <p:spPr>
+          <a:xfrm>
+            <a:off x="2596482" y="3406756"/>
+            <a:ext cx="8830984" cy="469846"/>
+          </a:xfrm>
+          <a:prstGeom prst="rect">
+            <a:avLst/>
+          </a:prstGeom>
+          <a:noFill/>
+          <a:ln/>
+        </p:spPr>
+        <p:txBody>
+          <a:bodyPr wrap="square" lIns="0" tIns="0" rIns="0" bIns="0" rtlCol="0" anchor="t">
+            <a:normAutofit/>
+          </a:bodyPr>
+          <a:lstStyle/>
+          <a:p>
+            <a:pPr algn="l" indent="0" marL="0">
+              <a:lnSpc>
+                <a:spcPts val="1750"/>
+              </a:lnSpc>
+              <a:buNone/>
+            </a:pPr>
+            <a:r>
+              <a:rPr lang="en-US" sz="1250" dirty="0">
                 <a:solidFill>
                   <a:srgbClr val="4A4F57"/>
                 </a:solidFill>
@@ -6686,699 +7881,73 @@
                 <a:ea typeface="Inter" pitchFamily="34" charset="-122"/>
                 <a:cs typeface="Inter" pitchFamily="34" charset="-120"/>
               </a:rPr>
-              <a:t>93.5 / 0.85</a:t>
-            </a:r>
-            <a:endParaRPr lang="en-US" sz="1300" dirty="0"/>
-          </a:p>
-        </p:txBody>
-      </p:sp>
-      <p:sp>
-        <p:nvSpPr>
-          <p:cNvPr id="12" name="Text 10"/>
-          <p:cNvSpPr/>
-          <p:nvPr/>
-        </p:nvSpPr>
-        <p:spPr>
-          <a:xfrm>
-            <a:off x="6393748" y="2176084"/>
-            <a:ext cx="1320782" cy="327600"/>
-          </a:xfrm>
-          <a:prstGeom prst="rect">
-            <a:avLst/>
-          </a:prstGeom>
-          <a:noFill/>
-          <a:ln/>
-        </p:spPr>
-        <p:txBody>
-          <a:bodyPr wrap="square" lIns="0" tIns="0" rIns="0" bIns="0" rtlCol="0" anchor="t">
-            <a:normAutofit/>
-          </a:bodyPr>
-          <a:lstStyle/>
-          <a:p>
-            <a:pPr algn="l" indent="0" marL="0">
-              <a:lnSpc>
-                <a:spcPts val="2380"/>
-              </a:lnSpc>
-              <a:buNone/>
-            </a:pPr>
-            <a:r>
-              <a:rPr lang="en-US" sz="1700" dirty="0">
-                <a:solidFill>
-                  <a:srgbClr val="B5533A"/>
+              <a:t>Our earlier headline, ipTM 0.43 → 0.55, used the broken optimizer. We are withdrawing it. The refined sequence was also 76% glutamate, a second reason to doubt it.</a:t>
+            </a:r>
+            <a:endParaRPr lang="en-US" sz="1250" dirty="0"/>
+          </a:p>
+        </p:txBody>
+      </p:sp>
+      <p:sp>
+        <p:nvSpPr>
+          <p:cNvPr id="13" name="Shape 11"/>
+          <p:cNvSpPr/>
+          <p:nvPr/>
+        </p:nvSpPr>
+        <p:spPr>
+          <a:xfrm>
+            <a:off x="812765" y="4187186"/>
+            <a:ext cx="10566443" cy="1107991"/>
+          </a:xfrm>
+          <a:prstGeom prst="roundRect">
+            <a:avLst>
+              <a:gd name="adj" fmla="val 9170"/>
+            </a:avLst>
+          </a:prstGeom>
+          <a:solidFill>
+            <a:srgbClr val="1F3A35"/>
+          </a:solidFill>
+          <a:ln/>
+        </p:spPr>
+      </p:sp>
+      <p:sp>
+        <p:nvSpPr>
+          <p:cNvPr id="14" name="Text 12"/>
+          <p:cNvSpPr/>
+          <p:nvPr/>
+        </p:nvSpPr>
+        <p:spPr>
+          <a:xfrm>
+            <a:off x="1041328" y="4364983"/>
+            <a:ext cx="10412596" cy="254009"/>
+          </a:xfrm>
+          <a:prstGeom prst="rect">
+            <a:avLst/>
+          </a:prstGeom>
+          <a:noFill/>
+          <a:ln/>
+        </p:spPr>
+        <p:txBody>
+          <a:bodyPr wrap="square" lIns="0" tIns="0" rIns="0" bIns="0" rtlCol="0" anchor="t">
+            <a:normAutofit/>
+          </a:bodyPr>
+          <a:lstStyle/>
+          <a:p>
+            <a:pPr algn="l" indent="0" marL="0">
+              <a:lnSpc>
+                <a:spcPts val="1800"/>
+              </a:lnSpc>
+              <a:buNone/>
+            </a:pPr>
+            <a:r>
+              <a:rPr lang="en-US" sz="1500" dirty="0">
+                <a:solidFill>
+                  <a:srgbClr val="7FEE64"/>
                 </a:solidFill>
                 <a:latin typeface="Space Grotesk" pitchFamily="34" charset="0"/>
                 <a:ea typeface="Space Grotesk" pitchFamily="34" charset="-122"/>
                 <a:cs typeface="Space Grotesk" pitchFamily="34" charset="-120"/>
               </a:rPr>
-              <a:t>0.39</a:t>
-            </a:r>
-            <a:endParaRPr lang="en-US" sz="1700" dirty="0"/>
-          </a:p>
-        </p:txBody>
-      </p:sp>
-      <p:sp>
-        <p:nvSpPr>
-          <p:cNvPr id="13" name="Text 11"/>
-          <p:cNvSpPr/>
-          <p:nvPr/>
-        </p:nvSpPr>
-        <p:spPr>
-          <a:xfrm>
-            <a:off x="7816121" y="2176084"/>
-            <a:ext cx="1511259" cy="327600"/>
-          </a:xfrm>
-          <a:prstGeom prst="rect">
-            <a:avLst/>
-          </a:prstGeom>
-          <a:noFill/>
-          <a:ln/>
-        </p:spPr>
-        <p:txBody>
-          <a:bodyPr wrap="square" lIns="0" tIns="0" rIns="0" bIns="0" rtlCol="0" anchor="t">
-            <a:normAutofit/>
-          </a:bodyPr>
-          <a:lstStyle/>
-          <a:p>
-            <a:pPr algn="l" indent="0" marL="0">
-              <a:lnSpc>
-                <a:spcPts val="2380"/>
-              </a:lnSpc>
-              <a:buNone/>
-            </a:pPr>
-            <a:r>
-              <a:rPr lang="en-US" sz="1700" dirty="0">
-                <a:solidFill>
-                  <a:srgbClr val="B5533A"/>
-                </a:solidFill>
-                <a:latin typeface="Space Grotesk" pitchFamily="34" charset="0"/>
-                <a:ea typeface="Space Grotesk" pitchFamily="34" charset="-122"/>
-                <a:cs typeface="Space Grotesk" pitchFamily="34" charset="-120"/>
-              </a:rPr>
-              <a:t>11.6</a:t>
-            </a:r>
-            <a:endParaRPr lang="en-US" sz="1700" dirty="0"/>
-          </a:p>
-        </p:txBody>
-      </p:sp>
-      <p:sp>
-        <p:nvSpPr>
-          <p:cNvPr id="14" name="Text 12"/>
-          <p:cNvSpPr/>
-          <p:nvPr/>
-        </p:nvSpPr>
-        <p:spPr>
-          <a:xfrm>
-            <a:off x="9428970" y="2211589"/>
-            <a:ext cx="1806583" cy="256545"/>
-          </a:xfrm>
-          <a:prstGeom prst="rect">
-            <a:avLst/>
-          </a:prstGeom>
-          <a:noFill/>
-          <a:ln/>
-        </p:spPr>
-        <p:txBody>
-          <a:bodyPr wrap="square" lIns="0" tIns="0" rIns="0" bIns="0" rtlCol="0" anchor="t">
-            <a:normAutofit/>
-          </a:bodyPr>
-          <a:lstStyle/>
-          <a:p>
-            <a:pPr algn="l" indent="0" marL="0">
-              <a:lnSpc>
-                <a:spcPts val="1820"/>
-              </a:lnSpc>
-              <a:buNone/>
-            </a:pPr>
-            <a:r>
-              <a:rPr lang="en-US" sz="1300" b="1" dirty="0">
-                <a:solidFill>
-                  <a:srgbClr val="B5533A"/>
-                </a:solidFill>
-                <a:latin typeface="Inter" pitchFamily="34" charset="0"/>
-                <a:ea typeface="Inter" pitchFamily="34" charset="-122"/>
-                <a:cs typeface="Inter" pitchFamily="34" charset="-120"/>
-              </a:rPr>
-              <a:t>No</a:t>
-            </a:r>
-            <a:endParaRPr lang="en-US" sz="1300" dirty="0"/>
-          </a:p>
-        </p:txBody>
-      </p:sp>
-      <p:sp>
-        <p:nvSpPr>
-          <p:cNvPr id="15" name="Shape 13"/>
-          <p:cNvSpPr/>
-          <p:nvPr/>
-        </p:nvSpPr>
-        <p:spPr>
-          <a:xfrm>
-            <a:off x="815940" y="2677731"/>
-            <a:ext cx="10560093" cy="561413"/>
-          </a:xfrm>
-          <a:prstGeom prst="roundRect">
-            <a:avLst>
-              <a:gd name="adj" fmla="val 13007"/>
-            </a:avLst>
-          </a:prstGeom>
-          <a:solidFill>
-            <a:srgbClr val="FFFFFF"/>
-          </a:solidFill>
-          <a:ln w="6350">
-            <a:solidFill>
-              <a:srgbClr val="DCD9D1"/>
-            </a:solidFill>
-            <a:prstDash val="solid"/>
-          </a:ln>
-        </p:spPr>
-      </p:sp>
-      <p:sp>
-        <p:nvSpPr>
-          <p:cNvPr id="16" name="Text 14"/>
-          <p:cNvSpPr/>
-          <p:nvPr/>
-        </p:nvSpPr>
-        <p:spPr>
-          <a:xfrm>
-            <a:off x="1009039" y="2842844"/>
-            <a:ext cx="3401021" cy="256545"/>
-          </a:xfrm>
-          <a:prstGeom prst="rect">
-            <a:avLst/>
-          </a:prstGeom>
-          <a:noFill/>
-          <a:ln/>
-        </p:spPr>
-        <p:txBody>
-          <a:bodyPr wrap="square" lIns="0" tIns="0" rIns="0" bIns="0" rtlCol="0" anchor="t">
-            <a:normAutofit/>
-          </a:bodyPr>
-          <a:lstStyle/>
-          <a:p>
-            <a:pPr algn="l" indent="0" marL="0">
-              <a:lnSpc>
-                <a:spcPts val="1820"/>
-              </a:lnSpc>
-              <a:buNone/>
-            </a:pPr>
-            <a:r>
-              <a:rPr lang="en-US" sz="1300" b="1" dirty="0">
-                <a:solidFill>
-                  <a:srgbClr val="16191F"/>
-                </a:solidFill>
-                <a:latin typeface="Inter" pitchFamily="34" charset="0"/>
-                <a:ea typeface="Inter" pitchFamily="34" charset="-122"/>
-                <a:cs typeface="Inter" pitchFamily="34" charset="-120"/>
-              </a:rPr>
-              <a:t>#2  same batch</a:t>
-            </a:r>
-            <a:endParaRPr lang="en-US" sz="1300" dirty="0"/>
-          </a:p>
-        </p:txBody>
-      </p:sp>
-      <p:sp>
-        <p:nvSpPr>
-          <p:cNvPr id="17" name="Text 15"/>
-          <p:cNvSpPr/>
-          <p:nvPr/>
-        </p:nvSpPr>
-        <p:spPr>
-          <a:xfrm>
-            <a:off x="4463392" y="2842844"/>
-            <a:ext cx="1831305" cy="256545"/>
-          </a:xfrm>
-          <a:prstGeom prst="rect">
-            <a:avLst/>
-          </a:prstGeom>
-          <a:noFill/>
-          <a:ln/>
-        </p:spPr>
-        <p:txBody>
-          <a:bodyPr wrap="square" lIns="0" tIns="0" rIns="0" bIns="0" rtlCol="0" anchor="t">
-            <a:normAutofit/>
-          </a:bodyPr>
-          <a:lstStyle/>
-          <a:p>
-            <a:pPr algn="l" indent="0" marL="0">
-              <a:lnSpc>
-                <a:spcPts val="1820"/>
-              </a:lnSpc>
-              <a:buNone/>
-            </a:pPr>
-            <a:r>
-              <a:rPr lang="en-US" sz="1300" dirty="0">
-                <a:solidFill>
-                  <a:srgbClr val="4A4F57"/>
-                </a:solidFill>
-                <a:latin typeface="Inter" pitchFamily="34" charset="0"/>
-                <a:ea typeface="Inter" pitchFamily="34" charset="-122"/>
-                <a:cs typeface="Inter" pitchFamily="34" charset="-120"/>
-              </a:rPr>
-              <a:t>93.1 / 0.85</a:t>
-            </a:r>
-            <a:endParaRPr lang="en-US" sz="1300" dirty="0"/>
-          </a:p>
-        </p:txBody>
-      </p:sp>
-      <p:sp>
-        <p:nvSpPr>
-          <p:cNvPr id="18" name="Text 16"/>
-          <p:cNvSpPr/>
-          <p:nvPr/>
-        </p:nvSpPr>
-        <p:spPr>
-          <a:xfrm>
-            <a:off x="6393748" y="2807339"/>
-            <a:ext cx="1320782" cy="327600"/>
-          </a:xfrm>
-          <a:prstGeom prst="rect">
-            <a:avLst/>
-          </a:prstGeom>
-          <a:noFill/>
-          <a:ln/>
-        </p:spPr>
-        <p:txBody>
-          <a:bodyPr wrap="square" lIns="0" tIns="0" rIns="0" bIns="0" rtlCol="0" anchor="t">
-            <a:normAutofit/>
-          </a:bodyPr>
-          <a:lstStyle/>
-          <a:p>
-            <a:pPr algn="l" indent="0" marL="0">
-              <a:lnSpc>
-                <a:spcPts val="2380"/>
-              </a:lnSpc>
-              <a:buNone/>
-            </a:pPr>
-            <a:r>
-              <a:rPr lang="en-US" sz="1700" dirty="0">
-                <a:solidFill>
-                  <a:srgbClr val="B5533A"/>
-                </a:solidFill>
-                <a:latin typeface="Space Grotesk" pitchFamily="34" charset="0"/>
-                <a:ea typeface="Space Grotesk" pitchFamily="34" charset="-122"/>
-                <a:cs typeface="Space Grotesk" pitchFamily="34" charset="-120"/>
-              </a:rPr>
-              <a:t>0.23</a:t>
-            </a:r>
-            <a:endParaRPr lang="en-US" sz="1700" dirty="0"/>
-          </a:p>
-        </p:txBody>
-      </p:sp>
-      <p:sp>
-        <p:nvSpPr>
-          <p:cNvPr id="19" name="Text 17"/>
-          <p:cNvSpPr/>
-          <p:nvPr/>
-        </p:nvSpPr>
-        <p:spPr>
-          <a:xfrm>
-            <a:off x="7816121" y="2807339"/>
-            <a:ext cx="1511259" cy="327600"/>
-          </a:xfrm>
-          <a:prstGeom prst="rect">
-            <a:avLst/>
-          </a:prstGeom>
-          <a:noFill/>
-          <a:ln/>
-        </p:spPr>
-        <p:txBody>
-          <a:bodyPr wrap="square" lIns="0" tIns="0" rIns="0" bIns="0" rtlCol="0" anchor="t">
-            <a:normAutofit/>
-          </a:bodyPr>
-          <a:lstStyle/>
-          <a:p>
-            <a:pPr algn="l" indent="0" marL="0">
-              <a:lnSpc>
-                <a:spcPts val="2380"/>
-              </a:lnSpc>
-              <a:buNone/>
-            </a:pPr>
-            <a:r>
-              <a:rPr lang="en-US" sz="1700" dirty="0">
-                <a:solidFill>
-                  <a:srgbClr val="B5533A"/>
-                </a:solidFill>
-                <a:latin typeface="Space Grotesk" pitchFamily="34" charset="0"/>
-                <a:ea typeface="Space Grotesk" pitchFamily="34" charset="-122"/>
-                <a:cs typeface="Space Grotesk" pitchFamily="34" charset="-120"/>
-              </a:rPr>
-              <a:t>16.5</a:t>
-            </a:r>
-            <a:endParaRPr lang="en-US" sz="1700" dirty="0"/>
-          </a:p>
-        </p:txBody>
-      </p:sp>
-      <p:sp>
-        <p:nvSpPr>
-          <p:cNvPr id="20" name="Text 18"/>
-          <p:cNvSpPr/>
-          <p:nvPr/>
-        </p:nvSpPr>
-        <p:spPr>
-          <a:xfrm>
-            <a:off x="9428970" y="2842844"/>
-            <a:ext cx="1806583" cy="256545"/>
-          </a:xfrm>
-          <a:prstGeom prst="rect">
-            <a:avLst/>
-          </a:prstGeom>
-          <a:noFill/>
-          <a:ln/>
-        </p:spPr>
-        <p:txBody>
-          <a:bodyPr wrap="square" lIns="0" tIns="0" rIns="0" bIns="0" rtlCol="0" anchor="t">
-            <a:normAutofit/>
-          </a:bodyPr>
-          <a:lstStyle/>
-          <a:p>
-            <a:pPr algn="l" indent="0" marL="0">
-              <a:lnSpc>
-                <a:spcPts val="1820"/>
-              </a:lnSpc>
-              <a:buNone/>
-            </a:pPr>
-            <a:r>
-              <a:rPr lang="en-US" sz="1300" b="1" dirty="0">
-                <a:solidFill>
-                  <a:srgbClr val="B5533A"/>
-                </a:solidFill>
-                <a:latin typeface="Inter" pitchFamily="34" charset="0"/>
-                <a:ea typeface="Inter" pitchFamily="34" charset="-122"/>
-                <a:cs typeface="Inter" pitchFamily="34" charset="-120"/>
-              </a:rPr>
-              <a:t>No</a:t>
-            </a:r>
-            <a:endParaRPr lang="en-US" sz="1300" dirty="0"/>
-          </a:p>
-        </p:txBody>
-      </p:sp>
-      <p:sp>
-        <p:nvSpPr>
-          <p:cNvPr id="21" name="Shape 19"/>
-          <p:cNvSpPr/>
-          <p:nvPr/>
-        </p:nvSpPr>
-        <p:spPr>
-          <a:xfrm>
-            <a:off x="815940" y="3308989"/>
-            <a:ext cx="10560093" cy="561413"/>
-          </a:xfrm>
-          <a:prstGeom prst="roundRect">
-            <a:avLst>
-              <a:gd name="adj" fmla="val 13007"/>
-            </a:avLst>
-          </a:prstGeom>
-          <a:solidFill>
-            <a:srgbClr val="FFFFFF"/>
-          </a:solidFill>
-          <a:ln w="6350">
-            <a:solidFill>
-              <a:srgbClr val="DCD9D1"/>
-            </a:solidFill>
-            <a:prstDash val="solid"/>
-          </a:ln>
-        </p:spPr>
-      </p:sp>
-      <p:sp>
-        <p:nvSpPr>
-          <p:cNvPr id="22" name="Text 20"/>
-          <p:cNvSpPr/>
-          <p:nvPr/>
-        </p:nvSpPr>
-        <p:spPr>
-          <a:xfrm>
-            <a:off x="1009039" y="3474098"/>
-            <a:ext cx="3401021" cy="256545"/>
-          </a:xfrm>
-          <a:prstGeom prst="rect">
-            <a:avLst/>
-          </a:prstGeom>
-          <a:noFill/>
-          <a:ln/>
-        </p:spPr>
-        <p:txBody>
-          <a:bodyPr wrap="square" lIns="0" tIns="0" rIns="0" bIns="0" rtlCol="0" anchor="t">
-            <a:normAutofit/>
-          </a:bodyPr>
-          <a:lstStyle/>
-          <a:p>
-            <a:pPr algn="l" indent="0" marL="0">
-              <a:lnSpc>
-                <a:spcPts val="1820"/>
-              </a:lnSpc>
-              <a:buNone/>
-            </a:pPr>
-            <a:r>
-              <a:rPr lang="en-US" sz="1300" b="1" dirty="0">
-                <a:solidFill>
-                  <a:srgbClr val="16191F"/>
-                </a:solidFill>
-                <a:latin typeface="Inter" pitchFamily="34" charset="0"/>
-                <a:ea typeface="Inter" pitchFamily="34" charset="-122"/>
-                <a:cs typeface="Inter" pitchFamily="34" charset="-120"/>
-              </a:rPr>
-              <a:t>#3  fresh call, 7 hotspots</a:t>
-            </a:r>
-            <a:endParaRPr lang="en-US" sz="1300" dirty="0"/>
-          </a:p>
-        </p:txBody>
-      </p:sp>
-      <p:sp>
-        <p:nvSpPr>
-          <p:cNvPr id="23" name="Text 21"/>
-          <p:cNvSpPr/>
-          <p:nvPr/>
-        </p:nvSpPr>
-        <p:spPr>
-          <a:xfrm>
-            <a:off x="4463392" y="3474098"/>
-            <a:ext cx="1831305" cy="256545"/>
-          </a:xfrm>
-          <a:prstGeom prst="rect">
-            <a:avLst/>
-          </a:prstGeom>
-          <a:noFill/>
-          <a:ln/>
-        </p:spPr>
-        <p:txBody>
-          <a:bodyPr wrap="square" lIns="0" tIns="0" rIns="0" bIns="0" rtlCol="0" anchor="t">
-            <a:normAutofit/>
-          </a:bodyPr>
-          <a:lstStyle/>
-          <a:p>
-            <a:pPr algn="l" indent="0" marL="0">
-              <a:lnSpc>
-                <a:spcPts val="1820"/>
-              </a:lnSpc>
-              <a:buNone/>
-            </a:pPr>
-            <a:r>
-              <a:rPr lang="en-US" sz="1300" dirty="0">
-                <a:solidFill>
-                  <a:srgbClr val="4A4F57"/>
-                </a:solidFill>
-                <a:latin typeface="Inter" pitchFamily="34" charset="0"/>
-                <a:ea typeface="Inter" pitchFamily="34" charset="-122"/>
-                <a:cs typeface="Inter" pitchFamily="34" charset="-120"/>
-              </a:rPr>
-              <a:t>91.2 / 0.61</a:t>
-            </a:r>
-            <a:endParaRPr lang="en-US" sz="1300" dirty="0"/>
-          </a:p>
-        </p:txBody>
-      </p:sp>
-      <p:sp>
-        <p:nvSpPr>
-          <p:cNvPr id="24" name="Text 22"/>
-          <p:cNvSpPr/>
-          <p:nvPr/>
-        </p:nvSpPr>
-        <p:spPr>
-          <a:xfrm>
-            <a:off x="6393748" y="3438593"/>
-            <a:ext cx="1320782" cy="327600"/>
-          </a:xfrm>
-          <a:prstGeom prst="rect">
-            <a:avLst/>
-          </a:prstGeom>
-          <a:noFill/>
-          <a:ln/>
-        </p:spPr>
-        <p:txBody>
-          <a:bodyPr wrap="square" lIns="0" tIns="0" rIns="0" bIns="0" rtlCol="0" anchor="t">
-            <a:normAutofit/>
-          </a:bodyPr>
-          <a:lstStyle/>
-          <a:p>
-            <a:pPr algn="l" indent="0" marL="0">
-              <a:lnSpc>
-                <a:spcPts val="2380"/>
-              </a:lnSpc>
-              <a:buNone/>
-            </a:pPr>
-            <a:r>
-              <a:rPr lang="en-US" sz="1700" dirty="0">
-                <a:solidFill>
-                  <a:srgbClr val="8A6A2F"/>
-                </a:solidFill>
-                <a:latin typeface="Space Grotesk" pitchFamily="34" charset="0"/>
-                <a:ea typeface="Space Grotesk" pitchFamily="34" charset="-122"/>
-                <a:cs typeface="Space Grotesk" pitchFamily="34" charset="-120"/>
-              </a:rPr>
-              <a:t>0.43</a:t>
-            </a:r>
-            <a:endParaRPr lang="en-US" sz="1700" dirty="0"/>
-          </a:p>
-        </p:txBody>
-      </p:sp>
-      <p:sp>
-        <p:nvSpPr>
-          <p:cNvPr id="25" name="Text 23"/>
-          <p:cNvSpPr/>
-          <p:nvPr/>
-        </p:nvSpPr>
-        <p:spPr>
-          <a:xfrm>
-            <a:off x="7816121" y="3438593"/>
-            <a:ext cx="1511259" cy="327600"/>
-          </a:xfrm>
-          <a:prstGeom prst="rect">
-            <a:avLst/>
-          </a:prstGeom>
-          <a:noFill/>
-          <a:ln/>
-        </p:spPr>
-        <p:txBody>
-          <a:bodyPr wrap="square" lIns="0" tIns="0" rIns="0" bIns="0" rtlCol="0" anchor="t">
-            <a:normAutofit/>
-          </a:bodyPr>
-          <a:lstStyle/>
-          <a:p>
-            <a:pPr algn="l" indent="0" marL="0">
-              <a:lnSpc>
-                <a:spcPts val="2380"/>
-              </a:lnSpc>
-              <a:buNone/>
-            </a:pPr>
-            <a:r>
-              <a:rPr lang="en-US" sz="1700" dirty="0">
-                <a:solidFill>
-                  <a:srgbClr val="B5533A"/>
-                </a:solidFill>
-                <a:latin typeface="Space Grotesk" pitchFamily="34" charset="0"/>
-                <a:ea typeface="Space Grotesk" pitchFamily="34" charset="-122"/>
-                <a:cs typeface="Space Grotesk" pitchFamily="34" charset="-120"/>
-              </a:rPr>
-              <a:t>14.7</a:t>
-            </a:r>
-            <a:endParaRPr lang="en-US" sz="1700" dirty="0"/>
-          </a:p>
-        </p:txBody>
-      </p:sp>
-      <p:sp>
-        <p:nvSpPr>
-          <p:cNvPr id="26" name="Text 24"/>
-          <p:cNvSpPr/>
-          <p:nvPr/>
-        </p:nvSpPr>
-        <p:spPr>
-          <a:xfrm>
-            <a:off x="9428970" y="3474098"/>
-            <a:ext cx="1806583" cy="256545"/>
-          </a:xfrm>
-          <a:prstGeom prst="rect">
-            <a:avLst/>
-          </a:prstGeom>
-          <a:noFill/>
-          <a:ln/>
-        </p:spPr>
-        <p:txBody>
-          <a:bodyPr wrap="square" lIns="0" tIns="0" rIns="0" bIns="0" rtlCol="0" anchor="t">
-            <a:normAutofit/>
-          </a:bodyPr>
-          <a:lstStyle/>
-          <a:p>
-            <a:pPr algn="l" indent="0" marL="0">
-              <a:lnSpc>
-                <a:spcPts val="1820"/>
-              </a:lnSpc>
-              <a:buNone/>
-            </a:pPr>
-            <a:r>
-              <a:rPr lang="en-US" sz="1300" b="1" dirty="0">
-                <a:solidFill>
-                  <a:srgbClr val="B5533A"/>
-                </a:solidFill>
-                <a:latin typeface="Inter" pitchFamily="34" charset="0"/>
-                <a:ea typeface="Inter" pitchFamily="34" charset="-122"/>
-                <a:cs typeface="Inter" pitchFamily="34" charset="-120"/>
-              </a:rPr>
-              <a:t>No</a:t>
-            </a:r>
-            <a:endParaRPr lang="en-US" sz="1300" dirty="0"/>
-          </a:p>
-        </p:txBody>
-      </p:sp>
-      <p:sp>
-        <p:nvSpPr>
-          <p:cNvPr id="27" name="Shape 25"/>
-          <p:cNvSpPr/>
-          <p:nvPr/>
-        </p:nvSpPr>
-        <p:spPr>
-          <a:xfrm>
-            <a:off x="812765" y="4064053"/>
-            <a:ext cx="10566443" cy="1275009"/>
-          </a:xfrm>
-          <a:prstGeom prst="roundRect">
-            <a:avLst>
-              <a:gd name="adj" fmla="val 6972"/>
-            </a:avLst>
-          </a:prstGeom>
-          <a:solidFill>
-            <a:srgbClr val="16191F"/>
-          </a:solidFill>
-          <a:ln/>
-        </p:spPr>
-      </p:sp>
-      <p:sp>
-        <p:nvSpPr>
-          <p:cNvPr id="28" name="Text 26"/>
-          <p:cNvSpPr/>
-          <p:nvPr/>
-        </p:nvSpPr>
-        <p:spPr>
-          <a:xfrm>
-            <a:off x="1041328" y="4241850"/>
-            <a:ext cx="5075504" cy="254009"/>
-          </a:xfrm>
-          <a:prstGeom prst="rect">
-            <a:avLst/>
-          </a:prstGeom>
-          <a:noFill/>
-          <a:ln/>
-        </p:spPr>
-        <p:txBody>
-          <a:bodyPr wrap="square" lIns="0" tIns="0" rIns="0" bIns="0" rtlCol="0" anchor="t">
-            <a:normAutofit/>
-          </a:bodyPr>
-          <a:lstStyle/>
-          <a:p>
-            <a:pPr algn="l" indent="0" marL="0">
-              <a:lnSpc>
-                <a:spcPts val="1800"/>
-              </a:lnSpc>
-              <a:buNone/>
-            </a:pPr>
-            <a:r>
-              <a:rPr lang="en-US" sz="1500" dirty="0">
-                <a:solidFill>
-                  <a:srgbClr val="5FBFA8"/>
-                </a:solidFill>
-                <a:latin typeface="Space Grotesk" pitchFamily="34" charset="0"/>
-                <a:ea typeface="Space Grotesk" pitchFamily="34" charset="-122"/>
-                <a:cs typeface="Space Grotesk" pitchFamily="34" charset="-120"/>
-              </a:rPr>
-              <a:t>Ranking differed in these three cases</a:t>
+              <a:t>Rewired to ProteinMPNN's real multi-chain workflow</a:t>
             </a:r>
             <a:endParaRPr lang="en-US" sz="1500" dirty="0"/>
           </a:p>
@@ -7386,133 +7955,45 @@
       </p:sp>
       <p:sp>
         <p:nvSpPr>
-          <p:cNvPr id="29" name="Text 27"/>
-          <p:cNvSpPr/>
-          <p:nvPr/>
-        </p:nvSpPr>
-        <p:spPr>
-          <a:xfrm>
-            <a:off x="1041328" y="4521225"/>
-            <a:ext cx="5075504" cy="665441"/>
-          </a:xfrm>
-          <a:prstGeom prst="rect">
-            <a:avLst/>
-          </a:prstGeom>
-          <a:noFill/>
-          <a:ln/>
-        </p:spPr>
-        <p:txBody>
-          <a:bodyPr wrap="square" lIns="0" tIns="0" rIns="0" bIns="0" rtlCol="0" anchor="t">
-            <a:normAutofit/>
-          </a:bodyPr>
-          <a:lstStyle/>
-          <a:p>
-            <a:pPr algn="l" indent="0" marL="0">
-              <a:lnSpc>
-                <a:spcPts val="1680"/>
-              </a:lnSpc>
-              <a:buNone/>
-            </a:pPr>
-            <a:r>
-              <a:rPr lang="en-US" sz="1200" dirty="0">
-                <a:solidFill>
-                  <a:srgbClr val="C8C6BF"/>
-                </a:solidFill>
-                <a:latin typeface="Inter" pitchFamily="34" charset="0"/>
-                <a:ea typeface="Inter" pitchFamily="34" charset="-122"/>
-                <a:cs typeface="Inter" pitchFamily="34" charset="-120"/>
-              </a:rPr>
-              <a:t>The lowest complex confidence came from the second-highest monomer score. Three cases, so this shows the two did not agree here — not that monomer score never predicts.</a:t>
-            </a:r>
-            <a:endParaRPr lang="en-US" sz="1200" dirty="0"/>
-          </a:p>
-        </p:txBody>
-      </p:sp>
-      <p:sp>
-        <p:nvSpPr>
-          <p:cNvPr id="30" name="Text 28"/>
-          <p:cNvSpPr/>
-          <p:nvPr/>
-        </p:nvSpPr>
-        <p:spPr>
-          <a:xfrm>
-            <a:off x="6222971" y="4241850"/>
-            <a:ext cx="5075504" cy="254009"/>
-          </a:xfrm>
-          <a:prstGeom prst="rect">
-            <a:avLst/>
-          </a:prstGeom>
-          <a:noFill/>
-          <a:ln/>
-        </p:spPr>
-        <p:txBody>
-          <a:bodyPr wrap="square" lIns="0" tIns="0" rIns="0" bIns="0" rtlCol="0" anchor="t">
-            <a:normAutofit/>
-          </a:bodyPr>
-          <a:lstStyle/>
-          <a:p>
-            <a:pPr algn="l" indent="0" marL="0">
-              <a:lnSpc>
-                <a:spcPts val="1800"/>
-              </a:lnSpc>
-              <a:buNone/>
-            </a:pPr>
-            <a:r>
-              <a:rPr lang="en-US" sz="1500" dirty="0">
-                <a:solidFill>
-                  <a:srgbClr val="E0A35F"/>
-                </a:solidFill>
-                <a:latin typeface="Space Grotesk" pitchFamily="34" charset="0"/>
-                <a:ea typeface="Space Grotesk" pitchFamily="34" charset="-122"/>
-                <a:cs typeface="Space Grotesk" pitchFamily="34" charset="-120"/>
-              </a:rPr>
-              <a:t>The 8 may share one backbone</a:t>
-            </a:r>
-            <a:endParaRPr lang="en-US" sz="1500" dirty="0"/>
-          </a:p>
-        </p:txBody>
-      </p:sp>
-      <p:sp>
-        <p:nvSpPr>
-          <p:cNvPr id="31" name="Text 29"/>
-          <p:cNvSpPr/>
-          <p:nvPr/>
-        </p:nvSpPr>
-        <p:spPr>
-          <a:xfrm>
-            <a:off x="6222971" y="4521225"/>
-            <a:ext cx="5075504" cy="665441"/>
-          </a:xfrm>
-          <a:prstGeom prst="rect">
-            <a:avLst/>
-          </a:prstGeom>
-          <a:noFill/>
-          <a:ln/>
-        </p:spPr>
-        <p:txBody>
-          <a:bodyPr wrap="square" lIns="0" tIns="0" rIns="0" bIns="0" rtlCol="0" anchor="t">
-            <a:normAutofit/>
-          </a:bodyPr>
-          <a:lstStyle/>
-          <a:p>
-            <a:pPr algn="l" indent="0" marL="0">
-              <a:lnSpc>
-                <a:spcPts val="1680"/>
-              </a:lnSpc>
-              <a:buNone/>
-            </a:pPr>
-            <a:r>
-              <a:rPr lang="en-US" sz="1200" dirty="0">
-                <a:solidFill>
-                  <a:srgbClr val="C8C6BF"/>
-                </a:solidFill>
-                <a:latin typeface="Inter" pitchFamily="34" charset="0"/>
-                <a:ea typeface="Inter" pitchFamily="34" charset="-122"/>
-                <a:cs typeface="Inter" pitchFamily="34" charset="-120"/>
-              </a:rPr>
-              <a:t>All 8 share a length, a start/end pattern and a motif near residue 52. Suggestive of sequence resampling on one backbone — we have not yet checked the generation records to confirm.</a:t>
-            </a:r>
-            <a:endParaRPr lang="en-US" sz="1200" dirty="0"/>
+          <p:cNvPr id="15" name="Text 13"/>
+          <p:cNvSpPr/>
+          <p:nvPr/>
+        </p:nvSpPr>
+        <p:spPr>
+          <a:xfrm>
+            <a:off x="1041328" y="4657083"/>
+            <a:ext cx="10412596" cy="485697"/>
+          </a:xfrm>
+          <a:prstGeom prst="rect">
+            <a:avLst/>
+          </a:prstGeom>
+          <a:noFill/>
+          <a:ln/>
+        </p:spPr>
+        <p:txBody>
+          <a:bodyPr wrap="square" lIns="0" tIns="0" rIns="0" bIns="0" rtlCol="0" anchor="t">
+            <a:normAutofit/>
+          </a:bodyPr>
+          <a:lstStyle/>
+          <a:p>
+            <a:pPr algn="l" indent="0" marL="0">
+              <a:lnSpc>
+                <a:spcPts val="1813"/>
+              </a:lnSpc>
+              <a:buNone/>
+            </a:pPr>
+            <a:r>
+              <a:rPr lang="en-US" sz="1250" dirty="0">
+                <a:solidFill>
+                  <a:srgbClr val="BFD4CF"/>
+                </a:solidFill>
+                <a:latin typeface="Inter" pitchFamily="34" charset="0"/>
+                <a:ea typeface="Inter" pitchFamily="34" charset="-122"/>
+                <a:cs typeface="Inter" pitchFamily="34" charset="-120"/>
+              </a:rPr>
+              <a:t>The target chain is now genuinely held fixed, and specific binder residues can be locked. A second bug surfaced immediately: locking against a raw backbone locked to placeholder glycines, so we now thread the real designed sequence through first.</a:t>
+            </a:r>
+            <a:endParaRPr lang="en-US" sz="1250" dirty="0"/>
           </a:p>
         </p:txBody>
       </p:sp>
@@ -7557,28 +8038,28 @@
         <p:spPr>
           <a:xfrm>
             <a:off x="812765" y="812766"/>
-            <a:ext cx="10883436" cy="836716"/>
-          </a:xfrm>
-          <a:prstGeom prst="rect">
-            <a:avLst/>
-          </a:prstGeom>
-          <a:noFill/>
-          <a:ln/>
-        </p:spPr>
-        <p:txBody>
-          <a:bodyPr wrap="square" lIns="0" tIns="0" rIns="0" bIns="0" rtlCol="0" anchor="t">
-            <a:normAutofit/>
-          </a:bodyPr>
-          <a:lstStyle/>
-          <a:p>
-            <a:pPr algn="l" indent="0" marL="0">
-              <a:lnSpc>
-                <a:spcPts val="3207"/>
-              </a:lnSpc>
-              <a:buNone/>
-            </a:pPr>
-            <a:r>
-              <a:rPr lang="en-US" sz="2916" dirty="0">
+            <a:ext cx="10883436" cy="444485"/>
+          </a:xfrm>
+          <a:prstGeom prst="rect">
+            <a:avLst/>
+          </a:prstGeom>
+          <a:noFill/>
+          <a:ln/>
+        </p:spPr>
+        <p:txBody>
+          <a:bodyPr wrap="square" lIns="0" tIns="0" rIns="0" bIns="0" rtlCol="0" anchor="t">
+            <a:normAutofit/>
+          </a:bodyPr>
+          <a:lstStyle/>
+          <a:p>
+            <a:pPr algn="l" indent="0" marL="0">
+              <a:lnSpc>
+                <a:spcPts val="3300"/>
+              </a:lnSpc>
+              <a:buNone/>
+            </a:pPr>
+            <a:r>
+              <a:rPr lang="en-US" sz="3000" dirty="0">
                 <a:solidFill>
                   <a:srgbClr val="16191F"/>
                 </a:solidFill>
@@ -7586,9 +8067,9 @@
                 <a:ea typeface="Space Grotesk" pitchFamily="34" charset="-122"/>
                 <a:cs typeface="Space Grotesk" pitchFamily="34" charset="-120"/>
               </a:rPr>
-              <a:t>PAE-guided refinement improved complex-confidence scores</a:t>
-            </a:r>
-            <a:endParaRPr lang="en-US" sz="2916" dirty="0"/>
+              <a:t>A candidate that clears the bar</a:t>
+            </a:r>
+            <a:endParaRPr lang="en-US" sz="3000" dirty="0"/>
           </a:p>
         </p:txBody>
       </p:sp>
@@ -7600,29 +8081,29 @@
         </p:nvSpPr>
         <p:spPr>
           <a:xfrm>
-            <a:off x="812765" y="1700253"/>
-            <a:ext cx="10883436" cy="490044"/>
-          </a:xfrm>
-          <a:prstGeom prst="rect">
-            <a:avLst/>
-          </a:prstGeom>
-          <a:noFill/>
-          <a:ln/>
-        </p:spPr>
-        <p:txBody>
-          <a:bodyPr wrap="square" lIns="0" tIns="0" rIns="0" bIns="0" rtlCol="0" anchor="t">
-            <a:normAutofit/>
-          </a:bodyPr>
-          <a:lstStyle/>
-          <a:p>
-            <a:pPr algn="l" indent="0" marL="0">
-              <a:lnSpc>
-                <a:spcPts val="1837"/>
-              </a:lnSpc>
-              <a:buNone/>
-            </a:pPr>
-            <a:r>
-              <a:rPr lang="en-US" sz="1312" dirty="0">
+            <a:off x="812765" y="1308022"/>
+            <a:ext cx="10883436" cy="265421"/>
+          </a:xfrm>
+          <a:prstGeom prst="rect">
+            <a:avLst/>
+          </a:prstGeom>
+          <a:noFill/>
+          <a:ln/>
+        </p:spPr>
+        <p:txBody>
+          <a:bodyPr wrap="square" lIns="0" tIns="0" rIns="0" bIns="0" rtlCol="0" anchor="t">
+            <a:normAutofit/>
+          </a:bodyPr>
+          <a:lstStyle/>
+          <a:p>
+            <a:pPr algn="l" indent="0" marL="0">
+              <a:lnSpc>
+                <a:spcPts val="1890"/>
+              </a:lnSpc>
+              <a:buNone/>
+            </a:pPr>
+            <a:r>
+              <a:rPr lang="en-US" sz="1350" dirty="0">
                 <a:solidFill>
                   <a:srgbClr val="6B6F76"/>
                 </a:solidFill>
@@ -7630,9 +8111,9 @@
                 <a:ea typeface="Inter" pitchFamily="34" charset="-122"/>
                 <a:cs typeface="Inter" pitchFamily="34" charset="-120"/>
               </a:rPr>
-              <a:t>The single failing score is an average. The full residue-by-residue output showed which parts of the design the model was confident about — and that suggested a fix.</a:t>
-            </a:r>
-            <a:endParaRPr lang="en-US" sz="1312" dirty="0"/>
+              <a:t>First candidate from the corrected pipeline, straight through, no refinement.</a:t>
+            </a:r>
+            <a:endParaRPr lang="en-US" sz="1350" dirty="0"/>
           </a:p>
         </p:txBody>
       </p:sp>
@@ -7644,12 +8125,166 @@
         </p:nvSpPr>
         <p:spPr>
           <a:xfrm>
-            <a:off x="815940" y="2333144"/>
-            <a:ext cx="5200110" cy="3505698"/>
+            <a:off x="812765" y="1713114"/>
+            <a:ext cx="2528144" cy="1778011"/>
           </a:xfrm>
           <a:prstGeom prst="roundRect">
             <a:avLst>
-              <a:gd name="adj" fmla="val 2808"/>
+              <a:gd name="adj" fmla="val 5714"/>
+            </a:avLst>
+          </a:prstGeom>
+          <a:solidFill>
+            <a:srgbClr val="1F3A35"/>
+          </a:solidFill>
+          <a:ln/>
+        </p:spPr>
+      </p:sp>
+      <p:sp>
+        <p:nvSpPr>
+          <p:cNvPr id="5" name="Text 3"/>
+          <p:cNvSpPr/>
+          <p:nvPr/>
+        </p:nvSpPr>
+        <p:spPr>
+          <a:xfrm>
+            <a:off x="1003242" y="1903592"/>
+            <a:ext cx="2211606" cy="208269"/>
+          </a:xfrm>
+          <a:prstGeom prst="rect">
+            <a:avLst/>
+          </a:prstGeom>
+          <a:noFill/>
+          <a:ln/>
+        </p:spPr>
+        <p:txBody>
+          <a:bodyPr wrap="square" lIns="0" tIns="0" rIns="0" bIns="0" rtlCol="0" anchor="t">
+            <a:normAutofit/>
+          </a:bodyPr>
+          <a:lstStyle/>
+          <a:p>
+            <a:pPr algn="l" indent="0" marL="0">
+              <a:lnSpc>
+                <a:spcPts val="1440"/>
+              </a:lnSpc>
+              <a:buNone/>
+            </a:pPr>
+            <a:r>
+              <a:rPr lang="en-US" sz="1200" b="1" dirty="0">
+                <a:solidFill>
+                  <a:srgbClr val="BFD4CF"/>
+                </a:solidFill>
+                <a:latin typeface="Inter" pitchFamily="34" charset="0"/>
+                <a:ea typeface="Inter" pitchFamily="34" charset="-122"/>
+                <a:cs typeface="Inter" pitchFamily="34" charset="-120"/>
+              </a:rPr>
+              <a:t>ipTM</a:t>
+            </a:r>
+            <a:endParaRPr lang="en-US" sz="1200" dirty="0"/>
+          </a:p>
+        </p:txBody>
+      </p:sp>
+      <p:sp>
+        <p:nvSpPr>
+          <p:cNvPr id="6" name="Text 4"/>
+          <p:cNvSpPr/>
+          <p:nvPr/>
+        </p:nvSpPr>
+        <p:spPr>
+          <a:xfrm>
+            <a:off x="1003242" y="2149952"/>
+            <a:ext cx="2211606" cy="507978"/>
+          </a:xfrm>
+          <a:prstGeom prst="rect">
+            <a:avLst/>
+          </a:prstGeom>
+          <a:noFill/>
+          <a:ln/>
+        </p:spPr>
+        <p:txBody>
+          <a:bodyPr wrap="square" lIns="0" tIns="0" rIns="0" bIns="0" rtlCol="0" anchor="t">
+            <a:normAutofit/>
+          </a:bodyPr>
+          <a:lstStyle/>
+          <a:p>
+            <a:pPr algn="l" indent="0" marL="0">
+              <a:lnSpc>
+                <a:spcPts val="3800"/>
+              </a:lnSpc>
+              <a:buNone/>
+            </a:pPr>
+            <a:r>
+              <a:rPr lang="en-US" sz="3800" dirty="0">
+                <a:solidFill>
+                  <a:srgbClr val="7FEE64"/>
+                </a:solidFill>
+                <a:latin typeface="Space Grotesk" pitchFamily="34" charset="0"/>
+                <a:ea typeface="Space Grotesk" pitchFamily="34" charset="-122"/>
+                <a:cs typeface="Space Grotesk" pitchFamily="34" charset="-120"/>
+              </a:rPr>
+              <a:t>0.81</a:t>
+            </a:r>
+            <a:endParaRPr lang="en-US" sz="3800" dirty="0"/>
+          </a:p>
+        </p:txBody>
+      </p:sp>
+      <p:sp>
+        <p:nvSpPr>
+          <p:cNvPr id="7" name="Text 5"/>
+          <p:cNvSpPr/>
+          <p:nvPr/>
+        </p:nvSpPr>
+        <p:spPr>
+          <a:xfrm>
+            <a:off x="1003242" y="2696025"/>
+            <a:ext cx="2211606" cy="229871"/>
+          </a:xfrm>
+          <a:prstGeom prst="rect">
+            <a:avLst/>
+          </a:prstGeom>
+          <a:noFill/>
+          <a:ln/>
+        </p:spPr>
+        <p:txBody>
+          <a:bodyPr wrap="square" lIns="0" tIns="0" rIns="0" bIns="0" rtlCol="0" anchor="t">
+            <a:normAutofit/>
+          </a:bodyPr>
+          <a:lstStyle/>
+          <a:p>
+            <a:pPr algn="l" indent="0" marL="0">
+              <a:lnSpc>
+                <a:spcPts val="1610"/>
+              </a:lnSpc>
+              <a:buNone/>
+            </a:pPr>
+            <a:r>
+              <a:rPr lang="en-US" sz="1150" dirty="0">
+                <a:solidFill>
+                  <a:srgbClr val="BFD4CF"/>
+                </a:solidFill>
+                <a:latin typeface="Inter" pitchFamily="34" charset="0"/>
+                <a:ea typeface="Inter" pitchFamily="34" charset="-122"/>
+                <a:cs typeface="Inter" pitchFamily="34" charset="-120"/>
+              </a:rPr>
+              <a:t>bar is 0.8</a:t>
+            </a:r>
+            <a:endParaRPr lang="en-US" sz="1150" dirty="0"/>
+          </a:p>
+        </p:txBody>
+      </p:sp>
+      <p:sp>
+        <p:nvSpPr>
+          <p:cNvPr id="8" name="Shape 6"/>
+          <p:cNvSpPr/>
+          <p:nvPr/>
+        </p:nvSpPr>
+        <p:spPr>
+          <a:xfrm>
+            <a:off x="3483749" y="1716289"/>
+            <a:ext cx="2533433" cy="1771661"/>
+          </a:xfrm>
+          <a:prstGeom prst="roundRect">
+            <a:avLst>
+              <a:gd name="adj" fmla="val 5556"/>
             </a:avLst>
           </a:prstGeom>
           <a:solidFill>
@@ -7665,124 +8300,102 @@
       </p:sp>
       <p:sp>
         <p:nvSpPr>
-          <p:cNvPr id="5" name="Text 3"/>
-          <p:cNvSpPr/>
-          <p:nvPr/>
-        </p:nvSpPr>
-        <p:spPr>
-          <a:xfrm>
-            <a:off x="1009039" y="2526243"/>
-            <a:ext cx="4958330" cy="246355"/>
-          </a:xfrm>
-          <a:prstGeom prst="rect">
-            <a:avLst/>
-          </a:prstGeom>
-          <a:noFill/>
-          <a:ln/>
-        </p:spPr>
-        <p:txBody>
-          <a:bodyPr wrap="square" lIns="0" tIns="0" rIns="0" bIns="0" rtlCol="0" anchor="t">
-            <a:normAutofit/>
-          </a:bodyPr>
-          <a:lstStyle/>
-          <a:p>
-            <a:pPr algn="l" indent="0" marL="0">
-              <a:lnSpc>
-                <a:spcPts val="1740"/>
-              </a:lnSpc>
-              <a:buNone/>
-            </a:pPr>
-            <a:r>
-              <a:rPr lang="en-US" sz="1450" b="1" dirty="0">
-                <a:solidFill>
-                  <a:srgbClr val="1F7A6C"/>
+          <p:cNvPr id="9" name="Text 7"/>
+          <p:cNvSpPr/>
+          <p:nvPr/>
+        </p:nvSpPr>
+        <p:spPr>
+          <a:xfrm>
+            <a:off x="3676848" y="1909390"/>
+            <a:ext cx="2211653" cy="208269"/>
+          </a:xfrm>
+          <a:prstGeom prst="rect">
+            <a:avLst/>
+          </a:prstGeom>
+          <a:noFill/>
+          <a:ln/>
+        </p:spPr>
+        <p:txBody>
+          <a:bodyPr wrap="square" lIns="0" tIns="0" rIns="0" bIns="0" rtlCol="0" anchor="t">
+            <a:normAutofit/>
+          </a:bodyPr>
+          <a:lstStyle/>
+          <a:p>
+            <a:pPr algn="l" indent="0" marL="0">
+              <a:lnSpc>
+                <a:spcPts val="1440"/>
+              </a:lnSpc>
+              <a:buNone/>
+            </a:pPr>
+            <a:r>
+              <a:rPr lang="en-US" sz="1200" b="1" dirty="0">
+                <a:solidFill>
+                  <a:srgbClr val="6B6F76"/>
+                </a:solidFill>
+                <a:latin typeface="Inter" pitchFamily="34" charset="0"/>
+                <a:ea typeface="Inter" pitchFamily="34" charset="-122"/>
+                <a:cs typeface="Inter" pitchFamily="34" charset="-120"/>
+              </a:rPr>
+              <a:t>Complex pLDDT</a:t>
+            </a:r>
+            <a:endParaRPr lang="en-US" sz="1200" dirty="0"/>
+          </a:p>
+        </p:txBody>
+      </p:sp>
+      <p:sp>
+        <p:nvSpPr>
+          <p:cNvPr id="10" name="Text 8"/>
+          <p:cNvSpPr/>
+          <p:nvPr/>
+        </p:nvSpPr>
+        <p:spPr>
+          <a:xfrm>
+            <a:off x="3676848" y="2155751"/>
+            <a:ext cx="2211653" cy="507978"/>
+          </a:xfrm>
+          <a:prstGeom prst="rect">
+            <a:avLst/>
+          </a:prstGeom>
+          <a:noFill/>
+          <a:ln/>
+        </p:spPr>
+        <p:txBody>
+          <a:bodyPr wrap="square" lIns="0" tIns="0" rIns="0" bIns="0" rtlCol="0" anchor="t">
+            <a:normAutofit/>
+          </a:bodyPr>
+          <a:lstStyle/>
+          <a:p>
+            <a:pPr algn="l" indent="0" marL="0">
+              <a:lnSpc>
+                <a:spcPts val="3800"/>
+              </a:lnSpc>
+              <a:buNone/>
+            </a:pPr>
+            <a:r>
+              <a:rPr lang="en-US" sz="3800" dirty="0">
+                <a:solidFill>
+                  <a:srgbClr val="16191F"/>
                 </a:solidFill>
                 <a:latin typeface="Space Grotesk" pitchFamily="34" charset="0"/>
                 <a:ea typeface="Space Grotesk" pitchFamily="34" charset="-122"/>
                 <a:cs typeface="Space Grotesk" pitchFamily="34" charset="-120"/>
               </a:rPr>
-              <a:t>Lower-PAE regions in candidate #3</a:t>
-            </a:r>
-            <a:endParaRPr lang="en-US" sz="1450" dirty="0"/>
-          </a:p>
-        </p:txBody>
-      </p:sp>
-      <p:sp>
-        <p:nvSpPr>
-          <p:cNvPr id="6" name="Text 4"/>
-          <p:cNvSpPr/>
-          <p:nvPr/>
-        </p:nvSpPr>
-        <p:spPr>
-          <a:xfrm>
-            <a:off x="1009039" y="2836097"/>
-            <a:ext cx="4958330" cy="688265"/>
-          </a:xfrm>
-          <a:prstGeom prst="rect">
-            <a:avLst/>
-          </a:prstGeom>
-          <a:noFill/>
-          <a:ln/>
-        </p:spPr>
-        <p:txBody>
-          <a:bodyPr wrap="square" lIns="0" tIns="0" rIns="0" bIns="0" rtlCol="0" anchor="t">
-            <a:normAutofit/>
-          </a:bodyPr>
-          <a:lstStyle/>
-          <a:p>
-            <a:pPr algn="l" indent="0" marL="0">
-              <a:lnSpc>
-                <a:spcPts val="1740"/>
-              </a:lnSpc>
-              <a:buNone/>
-            </a:pPr>
-            <a:r>
-              <a:rPr lang="en-US" sz="1200" dirty="0">
-                <a:solidFill>
-                  <a:srgbClr val="4A4F57"/>
-                </a:solidFill>
-                <a:latin typeface="Inter" pitchFamily="34" charset="0"/>
-                <a:ea typeface="Inter" pitchFamily="34" charset="-122"/>
-                <a:cs typeface="Inter" pitchFamily="34" charset="-120"/>
-              </a:rPr>
-              <a:t>Taking each binder residue's minimum PAE across all 115 target residues, </a:t>
-            </a:r>
-            <a:r>
-              <a:rPr lang="en-US" sz="1200" b="1" dirty="0">
-                <a:solidFill>
-                  <a:srgbClr val="4A4F57"/>
-                </a:solidFill>
-                <a:latin typeface="Inter" pitchFamily="34" charset="0"/>
-                <a:ea typeface="Inter" pitchFamily="34" charset="-122"/>
-                <a:cs typeface="Inter" pitchFamily="34" charset="-120"/>
-              </a:rPr>
-              <a:t>49 of 80</a:t>
-            </a:r>
-            <a:r>
-              <a:rPr lang="en-US" sz="1200" dirty="0">
-                <a:solidFill>
-                  <a:srgbClr val="4A4F57"/>
-                </a:solidFill>
-                <a:latin typeface="Inter" pitchFamily="34" charset="0"/>
-                <a:ea typeface="Inter" pitchFamily="34" charset="-122"/>
-                <a:cs typeface="Inter" pitchFamily="34" charset="-120"/>
-              </a:rPr>
-              <a:t> fall below 10 Å. That is a PAE summary, not a count of physical contacts.</a:t>
-            </a:r>
-            <a:endParaRPr lang="en-US" sz="1200" dirty="0"/>
-          </a:p>
-        </p:txBody>
-      </p:sp>
-      <p:sp>
-        <p:nvSpPr>
-          <p:cNvPr id="7" name="Text 5"/>
-          <p:cNvSpPr/>
-          <p:nvPr/>
-        </p:nvSpPr>
-        <p:spPr>
-          <a:xfrm>
-            <a:off x="1009039" y="3587859"/>
-            <a:ext cx="4958330" cy="229871"/>
+              <a:t>95.3</a:t>
+            </a:r>
+            <a:endParaRPr lang="en-US" sz="3800" dirty="0"/>
+          </a:p>
+        </p:txBody>
+      </p:sp>
+      <p:sp>
+        <p:nvSpPr>
+          <p:cNvPr id="11" name="Text 9"/>
+          <p:cNvSpPr/>
+          <p:nvPr/>
+        </p:nvSpPr>
+        <p:spPr>
+          <a:xfrm>
+            <a:off x="3676848" y="2701820"/>
+            <a:ext cx="2211653" cy="229871"/>
           </a:xfrm>
           <a:prstGeom prst="rect">
             <a:avLst/>
@@ -7805,35 +8418,13 @@
             <a:r>
               <a:rPr lang="en-US" sz="1150" dirty="0">
                 <a:solidFill>
-                  <a:srgbClr val="4A4F57"/>
-                </a:solidFill>
-                <a:latin typeface="Inter" pitchFamily="34" charset="0"/>
-                <a:ea typeface="Inter" pitchFamily="34" charset="-122"/>
-                <a:cs typeface="Inter" pitchFamily="34" charset="-120"/>
-              </a:rPr>
-              <a:t>Residues 29–39  →  </a:t>
-            </a:r>
-            <a:r>
-              <a:rPr lang="en-US" sz="1150" b="1" dirty="0">
-                <a:solidFill>
-                  <a:srgbClr val="4A4F57"/>
-                </a:solidFill>
-                <a:latin typeface="Inter" pitchFamily="34" charset="0"/>
-                <a:ea typeface="Inter" pitchFamily="34" charset="-122"/>
-                <a:cs typeface="Inter" pitchFamily="34" charset="-120"/>
-              </a:rPr>
-              <a:t>Met115</a:t>
-            </a:r>
-            <a:r>
-              <a:rPr lang="en-US" sz="1150" dirty="0">
-                <a:solidFill>
-                  <a:srgbClr val="4A4F57"/>
-                </a:solidFill>
-                <a:latin typeface="Inter" pitchFamily="34" charset="0"/>
-                <a:ea typeface="Inter" pitchFamily="34" charset="-122"/>
-                <a:cs typeface="Inter" pitchFamily="34" charset="-120"/>
-              </a:rPr>
-              <a:t>  (min PAE 4.73)</a:t>
+                  <a:srgbClr val="6B6F76"/>
+                </a:solidFill>
+                <a:latin typeface="Inter" pitchFamily="34" charset="0"/>
+                <a:ea typeface="Inter" pitchFamily="34" charset="-122"/>
+                <a:cs typeface="Inter" pitchFamily="34" charset="-120"/>
+              </a:rPr>
+              <a:t>pTM 0.88</a:t>
             </a:r>
             <a:endParaRPr lang="en-US" sz="1150" dirty="0"/>
           </a:p>
@@ -7841,498 +8432,678 @@
       </p:sp>
       <p:sp>
         <p:nvSpPr>
-          <p:cNvPr id="8" name="Text 6"/>
-          <p:cNvSpPr/>
-          <p:nvPr/>
-        </p:nvSpPr>
-        <p:spPr>
-          <a:xfrm>
-            <a:off x="1009039" y="3830417"/>
-            <a:ext cx="4958330" cy="229871"/>
-          </a:xfrm>
-          <a:prstGeom prst="rect">
-            <a:avLst/>
-          </a:prstGeom>
-          <a:noFill/>
-          <a:ln/>
-        </p:spPr>
-        <p:txBody>
-          <a:bodyPr wrap="square" lIns="0" tIns="0" rIns="0" bIns="0" rtlCol="0" anchor="t">
-            <a:normAutofit/>
-          </a:bodyPr>
-          <a:lstStyle/>
-          <a:p>
-            <a:pPr algn="l" indent="0" marL="0">
-              <a:lnSpc>
-                <a:spcPts val="1610"/>
-              </a:lnSpc>
-              <a:buNone/>
-            </a:pPr>
-            <a:r>
-              <a:rPr lang="en-US" sz="1150" dirty="0">
-                <a:solidFill>
-                  <a:srgbClr val="4A4F57"/>
-                </a:solidFill>
-                <a:latin typeface="Inter" pitchFamily="34" charset="0"/>
-                <a:ea typeface="Inter" pitchFamily="34" charset="-122"/>
-                <a:cs typeface="Inter" pitchFamily="34" charset="-120"/>
-              </a:rPr>
-              <a:t>Residues 13–27  →  </a:t>
-            </a:r>
-            <a:r>
-              <a:rPr lang="en-US" sz="1150" b="1" dirty="0">
-                <a:solidFill>
-                  <a:srgbClr val="4A4F57"/>
-                </a:solidFill>
-                <a:latin typeface="Inter" pitchFamily="34" charset="0"/>
-                <a:ea typeface="Inter" pitchFamily="34" charset="-122"/>
-                <a:cs typeface="Inter" pitchFamily="34" charset="-120"/>
-              </a:rPr>
-              <a:t>Tyr56</a:t>
-            </a:r>
-            <a:r>
-              <a:rPr lang="en-US" sz="1150" dirty="0">
-                <a:solidFill>
-                  <a:srgbClr val="4A4F57"/>
-                </a:solidFill>
-                <a:latin typeface="Inter" pitchFamily="34" charset="0"/>
-                <a:ea typeface="Inter" pitchFamily="34" charset="-122"/>
-                <a:cs typeface="Inter" pitchFamily="34" charset="-120"/>
-              </a:rPr>
-              <a:t>  (6–10)</a:t>
-            </a:r>
-            <a:endParaRPr lang="en-US" sz="1150" dirty="0"/>
-          </a:p>
-        </p:txBody>
-      </p:sp>
-      <p:sp>
-        <p:nvSpPr>
-          <p:cNvPr id="9" name="Text 7"/>
-          <p:cNvSpPr/>
-          <p:nvPr/>
-        </p:nvSpPr>
-        <p:spPr>
-          <a:xfrm>
-            <a:off x="1009039" y="4072976"/>
-            <a:ext cx="4958330" cy="229871"/>
-          </a:xfrm>
-          <a:prstGeom prst="rect">
-            <a:avLst/>
-          </a:prstGeom>
-          <a:noFill/>
-          <a:ln/>
-        </p:spPr>
-        <p:txBody>
-          <a:bodyPr wrap="square" lIns="0" tIns="0" rIns="0" bIns="0" rtlCol="0" anchor="t">
-            <a:normAutofit/>
-          </a:bodyPr>
-          <a:lstStyle/>
-          <a:p>
-            <a:pPr algn="l" indent="0" marL="0">
-              <a:lnSpc>
-                <a:spcPts val="1610"/>
-              </a:lnSpc>
-              <a:buNone/>
-            </a:pPr>
-            <a:r>
-              <a:rPr lang="en-US" sz="1150" dirty="0">
-                <a:solidFill>
-                  <a:srgbClr val="4A4F57"/>
-                </a:solidFill>
-                <a:latin typeface="Inter" pitchFamily="34" charset="0"/>
-                <a:ea typeface="Inter" pitchFamily="34" charset="-122"/>
-                <a:cs typeface="Inter" pitchFamily="34" charset="-120"/>
-              </a:rPr>
-              <a:t>Residues 49–63  →  </a:t>
-            </a:r>
-            <a:r>
-              <a:rPr lang="en-US" sz="1150" b="1" dirty="0">
-                <a:solidFill>
-                  <a:srgbClr val="4A4F57"/>
-                </a:solidFill>
-                <a:latin typeface="Inter" pitchFamily="34" charset="0"/>
-                <a:ea typeface="Inter" pitchFamily="34" charset="-122"/>
-                <a:cs typeface="Inter" pitchFamily="34" charset="-120"/>
-              </a:rPr>
-              <a:t>Ile54</a:t>
-            </a:r>
-            <a:r>
-              <a:rPr lang="en-US" sz="1150" dirty="0">
-                <a:solidFill>
-                  <a:srgbClr val="4A4F57"/>
-                </a:solidFill>
-                <a:latin typeface="Inter" pitchFamily="34" charset="0"/>
-                <a:ea typeface="Inter" pitchFamily="34" charset="-122"/>
-                <a:cs typeface="Inter" pitchFamily="34" charset="-120"/>
-              </a:rPr>
-              <a:t>  (8.6–9.9)</a:t>
-            </a:r>
-            <a:endParaRPr lang="en-US" sz="1150" dirty="0"/>
-          </a:p>
-        </p:txBody>
-      </p:sp>
-      <p:sp>
-        <p:nvSpPr>
-          <p:cNvPr id="10" name="Text 8"/>
-          <p:cNvSpPr/>
-          <p:nvPr/>
-        </p:nvSpPr>
-        <p:spPr>
-          <a:xfrm>
-            <a:off x="1009039" y="4366341"/>
-            <a:ext cx="4958330" cy="448924"/>
-          </a:xfrm>
-          <a:prstGeom prst="rect">
-            <a:avLst/>
-          </a:prstGeom>
-          <a:noFill/>
-          <a:ln/>
-        </p:spPr>
-        <p:txBody>
-          <a:bodyPr wrap="square" lIns="0" tIns="0" rIns="0" bIns="0" rtlCol="0" anchor="t">
-            <a:normAutofit/>
-          </a:bodyPr>
-          <a:lstStyle/>
-          <a:p>
-            <a:pPr algn="l" indent="0" marL="0">
-              <a:lnSpc>
-                <a:spcPts val="1668"/>
-              </a:lnSpc>
-              <a:buNone/>
-            </a:pPr>
-            <a:r>
-              <a:rPr lang="en-US" sz="1150" dirty="0">
-                <a:solidFill>
-                  <a:srgbClr val="4A4F57"/>
-                </a:solidFill>
-                <a:latin typeface="Inter" pitchFamily="34" charset="0"/>
-                <a:ea typeface="Inter" pitchFamily="34" charset="-122"/>
-                <a:cs typeface="Inter" pitchFamily="34" charset="-120"/>
-              </a:rPr>
-              <a:t>These map to known PD-1 contact residues, which motivated preserving 29–39 and redesigning the rest.</a:t>
-            </a:r>
-            <a:endParaRPr lang="en-US" sz="1150" dirty="0"/>
-          </a:p>
-        </p:txBody>
-      </p:sp>
-      <p:sp>
-        <p:nvSpPr>
-          <p:cNvPr id="11" name="Shape 9"/>
-          <p:cNvSpPr/>
-          <p:nvPr/>
-        </p:nvSpPr>
-        <p:spPr>
-          <a:xfrm>
-            <a:off x="6184296" y="2329969"/>
-            <a:ext cx="5194912" cy="3512048"/>
+          <p:cNvPr id="12" name="Shape 10"/>
+          <p:cNvSpPr/>
+          <p:nvPr/>
+        </p:nvSpPr>
+        <p:spPr>
+          <a:xfrm>
+            <a:off x="6163197" y="1716289"/>
+            <a:ext cx="2533388" cy="1771661"/>
           </a:xfrm>
           <a:prstGeom prst="roundRect">
             <a:avLst>
-              <a:gd name="adj" fmla="val 2893"/>
+              <a:gd name="adj" fmla="val 5556"/>
             </a:avLst>
           </a:prstGeom>
           <a:solidFill>
-            <a:srgbClr val="1F3A35"/>
+            <a:srgbClr val="FFFFFF"/>
           </a:solidFill>
-          <a:ln/>
-        </p:spPr>
-      </p:sp>
-      <p:sp>
-        <p:nvSpPr>
-          <p:cNvPr id="12" name="Text 10"/>
-          <p:cNvSpPr/>
-          <p:nvPr/>
-        </p:nvSpPr>
-        <p:spPr>
-          <a:xfrm>
-            <a:off x="6374773" y="2520445"/>
-            <a:ext cx="4958377" cy="237524"/>
-          </a:xfrm>
-          <a:prstGeom prst="rect">
-            <a:avLst/>
-          </a:prstGeom>
-          <a:noFill/>
-          <a:ln/>
-        </p:spPr>
-        <p:txBody>
-          <a:bodyPr wrap="square" lIns="0" tIns="0" rIns="0" bIns="0" rtlCol="0" anchor="t">
-            <a:normAutofit/>
-          </a:bodyPr>
-          <a:lstStyle/>
-          <a:p>
-            <a:pPr algn="l" indent="0" marL="0">
-              <a:lnSpc>
-                <a:spcPts val="1675"/>
-              </a:lnSpc>
-              <a:buNone/>
-            </a:pPr>
-            <a:r>
-              <a:rPr lang="en-US" sz="1396" b="1" dirty="0">
-                <a:solidFill>
-                  <a:srgbClr val="5FBFA8"/>
+          <a:ln w="6350">
+            <a:solidFill>
+              <a:srgbClr val="DCD9D1"/>
+            </a:solidFill>
+            <a:prstDash val="solid"/>
+          </a:ln>
+        </p:spPr>
+      </p:sp>
+      <p:sp>
+        <p:nvSpPr>
+          <p:cNvPr id="13" name="Text 11"/>
+          <p:cNvSpPr/>
+          <p:nvPr/>
+        </p:nvSpPr>
+        <p:spPr>
+          <a:xfrm>
+            <a:off x="6356296" y="1909390"/>
+            <a:ext cx="2211606" cy="208269"/>
+          </a:xfrm>
+          <a:prstGeom prst="rect">
+            <a:avLst/>
+          </a:prstGeom>
+          <a:noFill/>
+          <a:ln/>
+        </p:spPr>
+        <p:txBody>
+          <a:bodyPr wrap="square" lIns="0" tIns="0" rIns="0" bIns="0" rtlCol="0" anchor="t">
+            <a:normAutofit/>
+          </a:bodyPr>
+          <a:lstStyle/>
+          <a:p>
+            <a:pPr algn="l" indent="0" marL="0">
+              <a:lnSpc>
+                <a:spcPts val="1440"/>
+              </a:lnSpc>
+              <a:buNone/>
+            </a:pPr>
+            <a:r>
+              <a:rPr lang="en-US" sz="1200" b="1" dirty="0">
+                <a:solidFill>
+                  <a:srgbClr val="6B6F76"/>
+                </a:solidFill>
+                <a:latin typeface="Inter" pitchFamily="34" charset="0"/>
+                <a:ea typeface="Inter" pitchFamily="34" charset="-122"/>
+                <a:cs typeface="Inter" pitchFamily="34" charset="-120"/>
+              </a:rPr>
+              <a:t>Confident residues</a:t>
+            </a:r>
+            <a:endParaRPr lang="en-US" sz="1200" dirty="0"/>
+          </a:p>
+        </p:txBody>
+      </p:sp>
+      <p:sp>
+        <p:nvSpPr>
+          <p:cNvPr id="14" name="Text 12"/>
+          <p:cNvSpPr/>
+          <p:nvPr/>
+        </p:nvSpPr>
+        <p:spPr>
+          <a:xfrm>
+            <a:off x="6356296" y="2155751"/>
+            <a:ext cx="2211606" cy="507978"/>
+          </a:xfrm>
+          <a:prstGeom prst="rect">
+            <a:avLst/>
+          </a:prstGeom>
+          <a:noFill/>
+          <a:ln/>
+        </p:spPr>
+        <p:txBody>
+          <a:bodyPr wrap="square" lIns="0" tIns="0" rIns="0" bIns="0" rtlCol="0" anchor="t">
+            <a:normAutofit/>
+          </a:bodyPr>
+          <a:lstStyle/>
+          <a:p>
+            <a:pPr algn="l" indent="0" marL="0">
+              <a:lnSpc>
+                <a:spcPts val="3800"/>
+              </a:lnSpc>
+              <a:buNone/>
+            </a:pPr>
+            <a:r>
+              <a:rPr lang="en-US" sz="3800" dirty="0">
+                <a:solidFill>
+                  <a:srgbClr val="16191F"/>
                 </a:solidFill>
                 <a:latin typeface="Space Grotesk" pitchFamily="34" charset="0"/>
                 <a:ea typeface="Space Grotesk" pitchFamily="34" charset="-122"/>
                 <a:cs typeface="Space Grotesk" pitchFamily="34" charset="-120"/>
               </a:rPr>
-              <a:t>Improved AF2-Multimer confidence</a:t>
-            </a:r>
-            <a:endParaRPr lang="en-US" sz="1396" dirty="0"/>
-          </a:p>
-        </p:txBody>
-      </p:sp>
-      <p:sp>
-        <p:nvSpPr>
-          <p:cNvPr id="13" name="Shape 11"/>
-          <p:cNvSpPr/>
-          <p:nvPr/>
-        </p:nvSpPr>
-        <p:spPr>
-          <a:xfrm>
-            <a:off x="6374773" y="2821468"/>
-            <a:ext cx="2349849" cy="809550"/>
-          </a:xfrm>
-          <a:prstGeom prst="roundRect">
-            <a:avLst>
-              <a:gd name="adj" fmla="val 9413"/>
-            </a:avLst>
-          </a:prstGeom>
-          <a:solidFill>
-            <a:srgbClr val="2A4A44"/>
-          </a:solidFill>
-          <a:ln/>
-        </p:spPr>
-      </p:sp>
-      <p:sp>
-        <p:nvSpPr>
-          <p:cNvPr id="14" name="Text 12"/>
-          <p:cNvSpPr/>
-          <p:nvPr/>
-        </p:nvSpPr>
-        <p:spPr>
-          <a:xfrm>
-            <a:off x="6501757" y="2948453"/>
-            <a:ext cx="2158757" cy="209039"/>
-          </a:xfrm>
-          <a:prstGeom prst="rect">
-            <a:avLst/>
-          </a:prstGeom>
-          <a:noFill/>
-          <a:ln/>
-        </p:spPr>
-        <p:txBody>
-          <a:bodyPr wrap="square" lIns="0" tIns="0" rIns="0" bIns="0" rtlCol="0" anchor="t">
-            <a:normAutofit/>
-          </a:bodyPr>
-          <a:lstStyle/>
-          <a:p>
-            <a:pPr algn="l" indent="0" marL="0">
-              <a:lnSpc>
-                <a:spcPts val="1473"/>
-              </a:lnSpc>
-              <a:buNone/>
-            </a:pPr>
-            <a:r>
-              <a:rPr lang="en-US" sz="1052" dirty="0">
-                <a:solidFill>
-                  <a:srgbClr val="BFD4CF"/>
-                </a:solidFill>
-                <a:latin typeface="Inter" pitchFamily="34" charset="0"/>
-                <a:ea typeface="Inter" pitchFamily="34" charset="-122"/>
-                <a:cs typeface="Inter" pitchFamily="34" charset="-120"/>
-              </a:rPr>
-              <a:t>ipTM</a:t>
-            </a:r>
-            <a:endParaRPr lang="en-US" sz="1052" dirty="0"/>
-          </a:p>
-        </p:txBody>
-      </p:sp>
-      <p:sp>
-        <p:nvSpPr>
-          <p:cNvPr id="15" name="Text 13"/>
-          <p:cNvSpPr/>
-          <p:nvPr/>
-        </p:nvSpPr>
-        <p:spPr>
-          <a:xfrm>
-            <a:off x="6501757" y="3170179"/>
-            <a:ext cx="2158757" cy="359255"/>
-          </a:xfrm>
-          <a:prstGeom prst="rect">
-            <a:avLst/>
-          </a:prstGeom>
-          <a:noFill/>
-          <a:ln/>
-        </p:spPr>
-        <p:txBody>
-          <a:bodyPr wrap="square" lIns="0" tIns="0" rIns="0" bIns="0" rtlCol="0" anchor="t">
-            <a:normAutofit/>
-          </a:bodyPr>
-          <a:lstStyle/>
-          <a:p>
-            <a:pPr algn="l" indent="0" marL="0">
-              <a:lnSpc>
-                <a:spcPts val="2669"/>
-              </a:lnSpc>
-              <a:buNone/>
-            </a:pPr>
-            <a:r>
-              <a:rPr lang="en-US" sz="1906" dirty="0">
-                <a:solidFill>
-                  <a:srgbClr val="F6F5F1"/>
+              <a:t>78</a:t>
+            </a:r>
+            <a:r>
+              <a:rPr lang="en-US" sz="3800" dirty="0">
+                <a:solidFill>
+                  <a:srgbClr val="6B6F76"/>
                 </a:solidFill>
                 <a:latin typeface="Space Grotesk" pitchFamily="34" charset="0"/>
                 <a:ea typeface="Space Grotesk" pitchFamily="34" charset="-122"/>
                 <a:cs typeface="Space Grotesk" pitchFamily="34" charset="-120"/>
               </a:rPr>
-              <a:t>0.43 → </a:t>
-            </a:r>
-            <a:r>
-              <a:rPr lang="en-US" sz="1906" dirty="0">
-                <a:solidFill>
-                  <a:srgbClr val="7FEE64"/>
+              <a:t>/80</a:t>
+            </a:r>
+            <a:endParaRPr lang="en-US" sz="3800" dirty="0"/>
+          </a:p>
+        </p:txBody>
+      </p:sp>
+      <p:sp>
+        <p:nvSpPr>
+          <p:cNvPr id="15" name="Text 13"/>
+          <p:cNvSpPr/>
+          <p:nvPr/>
+        </p:nvSpPr>
+        <p:spPr>
+          <a:xfrm>
+            <a:off x="6356296" y="2701820"/>
+            <a:ext cx="2211606" cy="229871"/>
+          </a:xfrm>
+          <a:prstGeom prst="rect">
+            <a:avLst/>
+          </a:prstGeom>
+          <a:noFill/>
+          <a:ln/>
+        </p:spPr>
+        <p:txBody>
+          <a:bodyPr wrap="square" lIns="0" tIns="0" rIns="0" bIns="0" rtlCol="0" anchor="t">
+            <a:normAutofit/>
+          </a:bodyPr>
+          <a:lstStyle/>
+          <a:p>
+            <a:pPr algn="l" indent="0" marL="0">
+              <a:lnSpc>
+                <a:spcPts val="1610"/>
+              </a:lnSpc>
+              <a:buNone/>
+            </a:pPr>
+            <a:r>
+              <a:rPr lang="en-US" sz="1150" dirty="0">
+                <a:solidFill>
+                  <a:srgbClr val="6B6F76"/>
+                </a:solidFill>
+                <a:latin typeface="Inter" pitchFamily="34" charset="0"/>
+                <a:ea typeface="Inter" pitchFamily="34" charset="-122"/>
+                <a:cs typeface="Inter" pitchFamily="34" charset="-120"/>
+              </a:rPr>
+              <a:t>mean interface PAE 5.14 Å</a:t>
+            </a:r>
+            <a:endParaRPr lang="en-US" sz="1150" dirty="0"/>
+          </a:p>
+        </p:txBody>
+      </p:sp>
+      <p:sp>
+        <p:nvSpPr>
+          <p:cNvPr id="16" name="Shape 14"/>
+          <p:cNvSpPr/>
+          <p:nvPr/>
+        </p:nvSpPr>
+        <p:spPr>
+          <a:xfrm>
+            <a:off x="8842600" y="1716289"/>
+            <a:ext cx="2533433" cy="1771661"/>
+          </a:xfrm>
+          <a:prstGeom prst="roundRect">
+            <a:avLst>
+              <a:gd name="adj" fmla="val 5556"/>
+            </a:avLst>
+          </a:prstGeom>
+          <a:solidFill>
+            <a:srgbClr val="FFFFFF"/>
+          </a:solidFill>
+          <a:ln w="6350">
+            <a:solidFill>
+              <a:srgbClr val="DCD9D1"/>
+            </a:solidFill>
+            <a:prstDash val="solid"/>
+          </a:ln>
+        </p:spPr>
+      </p:sp>
+      <p:sp>
+        <p:nvSpPr>
+          <p:cNvPr id="17" name="Text 15"/>
+          <p:cNvSpPr/>
+          <p:nvPr/>
+        </p:nvSpPr>
+        <p:spPr>
+          <a:xfrm>
+            <a:off x="9035698" y="1909390"/>
+            <a:ext cx="2211653" cy="208269"/>
+          </a:xfrm>
+          <a:prstGeom prst="rect">
+            <a:avLst/>
+          </a:prstGeom>
+          <a:noFill/>
+          <a:ln/>
+        </p:spPr>
+        <p:txBody>
+          <a:bodyPr wrap="square" lIns="0" tIns="0" rIns="0" bIns="0" rtlCol="0" anchor="t">
+            <a:normAutofit/>
+          </a:bodyPr>
+          <a:lstStyle/>
+          <a:p>
+            <a:pPr algn="l" indent="0" marL="0">
+              <a:lnSpc>
+                <a:spcPts val="1440"/>
+              </a:lnSpc>
+              <a:buNone/>
+            </a:pPr>
+            <a:r>
+              <a:rPr lang="en-US" sz="1200" b="1" dirty="0">
+                <a:solidFill>
+                  <a:srgbClr val="6B6F76"/>
+                </a:solidFill>
+                <a:latin typeface="Inter" pitchFamily="34" charset="0"/>
+                <a:ea typeface="Inter" pitchFamily="34" charset="-122"/>
+                <a:cs typeface="Inter" pitchFamily="34" charset="-120"/>
+              </a:rPr>
+              <a:t>Contacts</a:t>
+            </a:r>
+            <a:endParaRPr lang="en-US" sz="1200" dirty="0"/>
+          </a:p>
+        </p:txBody>
+      </p:sp>
+      <p:sp>
+        <p:nvSpPr>
+          <p:cNvPr id="18" name="Text 16"/>
+          <p:cNvSpPr/>
+          <p:nvPr/>
+        </p:nvSpPr>
+        <p:spPr>
+          <a:xfrm>
+            <a:off x="9035698" y="2155751"/>
+            <a:ext cx="2211653" cy="692069"/>
+          </a:xfrm>
+          <a:prstGeom prst="rect">
+            <a:avLst/>
+          </a:prstGeom>
+          <a:noFill/>
+          <a:ln/>
+        </p:spPr>
+        <p:txBody>
+          <a:bodyPr wrap="square" lIns="0" tIns="0" rIns="0" bIns="0" rtlCol="0" anchor="t">
+            <a:normAutofit/>
+          </a:bodyPr>
+          <a:lstStyle/>
+          <a:p>
+            <a:pPr algn="l" indent="0" marL="0">
+              <a:lnSpc>
+                <a:spcPts val="1750"/>
+              </a:lnSpc>
+              <a:buNone/>
+            </a:pPr>
+            <a:r>
+              <a:rPr lang="en-US" sz="1250" dirty="0">
+                <a:solidFill>
+                  <a:srgbClr val="4A4F57"/>
+                </a:solidFill>
+                <a:latin typeface="Inter" pitchFamily="34" charset="0"/>
+                <a:ea typeface="Inter" pitchFamily="34" charset="-122"/>
+                <a:cs typeface="Inter" pitchFamily="34" charset="-120"/>
+              </a:rPr>
+              <a:t>Tyr56, Met115, Asp122, Arg121 — real PD-L1 hotspots</a:t>
+            </a:r>
+            <a:endParaRPr lang="en-US" sz="1250" dirty="0"/>
+          </a:p>
+        </p:txBody>
+      </p:sp>
+      <p:sp>
+        <p:nvSpPr>
+          <p:cNvPr id="19" name="Text 17"/>
+          <p:cNvSpPr/>
+          <p:nvPr/>
+        </p:nvSpPr>
+        <p:spPr>
+          <a:xfrm>
+            <a:off x="9035698" y="2885911"/>
+            <a:ext cx="2211653" cy="434341"/>
+          </a:xfrm>
+          <a:prstGeom prst="rect">
+            <a:avLst/>
+          </a:prstGeom>
+          <a:noFill/>
+          <a:ln/>
+        </p:spPr>
+        <p:txBody>
+          <a:bodyPr wrap="square" lIns="0" tIns="0" rIns="0" bIns="0" rtlCol="0" anchor="t">
+            <a:normAutofit/>
+          </a:bodyPr>
+          <a:lstStyle/>
+          <a:p>
+            <a:pPr algn="l" indent="0" marL="0">
+              <a:lnSpc>
+                <a:spcPts val="1610"/>
+              </a:lnSpc>
+              <a:buNone/>
+            </a:pPr>
+            <a:r>
+              <a:rPr lang="en-US" sz="1150" dirty="0">
+                <a:solidFill>
+                  <a:srgbClr val="6B6F76"/>
+                </a:solidFill>
+                <a:latin typeface="Inter" pitchFamily="34" charset="0"/>
+                <a:ea typeface="Inter" pitchFamily="34" charset="-122"/>
+                <a:cs typeface="Inter" pitchFamily="34" charset="-120"/>
+              </a:rPr>
+              <a:t>Reproduced exactly on a second call</a:t>
+            </a:r>
+            <a:endParaRPr lang="en-US" sz="1150" dirty="0"/>
+          </a:p>
+        </p:txBody>
+      </p:sp>
+      <p:sp>
+        <p:nvSpPr>
+          <p:cNvPr id="20" name="Shape 18"/>
+          <p:cNvSpPr/>
+          <p:nvPr/>
+        </p:nvSpPr>
+        <p:spPr>
+          <a:xfrm>
+            <a:off x="815940" y="3659374"/>
+            <a:ext cx="10560093" cy="923436"/>
+          </a:xfrm>
+          <a:prstGeom prst="roundRect">
+            <a:avLst>
+              <a:gd name="adj" fmla="val 9283"/>
+            </a:avLst>
+          </a:prstGeom>
+          <a:solidFill>
+            <a:srgbClr val="FFFFFF"/>
+          </a:solidFill>
+          <a:ln w="6350">
+            <a:solidFill>
+              <a:srgbClr val="DCD9D1"/>
+            </a:solidFill>
+            <a:prstDash val="solid"/>
+          </a:ln>
+        </p:spPr>
+      </p:sp>
+      <p:sp>
+        <p:nvSpPr>
+          <p:cNvPr id="21" name="Text 19"/>
+          <p:cNvSpPr/>
+          <p:nvPr/>
+        </p:nvSpPr>
+        <p:spPr>
+          <a:xfrm>
+            <a:off x="1021719" y="3930591"/>
+            <a:ext cx="1831305" cy="406354"/>
+          </a:xfrm>
+          <a:prstGeom prst="rect">
+            <a:avLst/>
+          </a:prstGeom>
+          <a:noFill/>
+          <a:ln/>
+        </p:spPr>
+        <p:txBody>
+          <a:bodyPr wrap="square" lIns="0" tIns="0" rIns="0" bIns="0" rtlCol="0" anchor="t">
+            <a:normAutofit/>
+          </a:bodyPr>
+          <a:lstStyle/>
+          <a:p>
+            <a:pPr algn="l" indent="0" marL="0">
+              <a:lnSpc>
+                <a:spcPts val="1500"/>
+              </a:lnSpc>
+              <a:buNone/>
+            </a:pPr>
+            <a:r>
+              <a:rPr lang="en-US" sz="1250" b="1" dirty="0">
+                <a:solidFill>
+                  <a:srgbClr val="16191F"/>
+                </a:solidFill>
+                <a:latin typeface="Inter" pitchFamily="34" charset="0"/>
+                <a:ea typeface="Inter" pitchFamily="34" charset="-122"/>
+                <a:cs typeface="Inter" pitchFamily="34" charset="-120"/>
+              </a:rPr>
+              <a:t>Six independent attempts</a:t>
+            </a:r>
+            <a:endParaRPr lang="en-US" sz="1250" dirty="0"/>
+          </a:p>
+        </p:txBody>
+      </p:sp>
+      <p:sp>
+        <p:nvSpPr>
+          <p:cNvPr id="22" name="Text 20"/>
+          <p:cNvSpPr/>
+          <p:nvPr/>
+        </p:nvSpPr>
+        <p:spPr>
+          <a:xfrm>
+            <a:off x="2952081" y="4049970"/>
+            <a:ext cx="1016182" cy="238747"/>
+          </a:xfrm>
+          <a:prstGeom prst="rect">
+            <a:avLst/>
+          </a:prstGeom>
+          <a:noFill/>
+          <a:ln/>
+        </p:spPr>
+        <p:txBody>
+          <a:bodyPr wrap="square" lIns="0" tIns="0" rIns="0" bIns="0" rtlCol="0" anchor="t">
+            <a:normAutofit/>
+          </a:bodyPr>
+          <a:lstStyle/>
+          <a:p>
+            <a:pPr algn="ctr" indent="0" marL="0">
+              <a:lnSpc>
+                <a:spcPts val="1680"/>
+              </a:lnSpc>
+              <a:buNone/>
+            </a:pPr>
+            <a:r>
+              <a:rPr lang="en-US" sz="1200" b="1" dirty="0">
+                <a:solidFill>
+                  <a:srgbClr val="B5533A"/>
+                </a:solidFill>
+                <a:latin typeface="Inter" pitchFamily="34" charset="0"/>
+                <a:ea typeface="Inter" pitchFamily="34" charset="-122"/>
+                <a:cs typeface="Inter" pitchFamily="34" charset="-120"/>
+              </a:rPr>
+              <a:t>0.20</a:t>
+            </a:r>
+            <a:endParaRPr lang="en-US" sz="1200" dirty="0"/>
+          </a:p>
+        </p:txBody>
+      </p:sp>
+      <p:sp>
+        <p:nvSpPr>
+          <p:cNvPr id="23" name="Text 21"/>
+          <p:cNvSpPr/>
+          <p:nvPr/>
+        </p:nvSpPr>
+        <p:spPr>
+          <a:xfrm>
+            <a:off x="3980956" y="4049970"/>
+            <a:ext cx="1016227" cy="238747"/>
+          </a:xfrm>
+          <a:prstGeom prst="rect">
+            <a:avLst/>
+          </a:prstGeom>
+          <a:noFill/>
+          <a:ln/>
+        </p:spPr>
+        <p:txBody>
+          <a:bodyPr wrap="square" lIns="0" tIns="0" rIns="0" bIns="0" rtlCol="0" anchor="t">
+            <a:normAutofit/>
+          </a:bodyPr>
+          <a:lstStyle/>
+          <a:p>
+            <a:pPr algn="ctr" indent="0" marL="0">
+              <a:lnSpc>
+                <a:spcPts val="1680"/>
+              </a:lnSpc>
+              <a:buNone/>
+            </a:pPr>
+            <a:r>
+              <a:rPr lang="en-US" sz="1200" b="1" dirty="0">
+                <a:solidFill>
+                  <a:srgbClr val="B5533A"/>
+                </a:solidFill>
+                <a:latin typeface="Inter" pitchFamily="34" charset="0"/>
+                <a:ea typeface="Inter" pitchFamily="34" charset="-122"/>
+                <a:cs typeface="Inter" pitchFamily="34" charset="-120"/>
+              </a:rPr>
+              <a:t>0.23</a:t>
+            </a:r>
+            <a:endParaRPr lang="en-US" sz="1200" dirty="0"/>
+          </a:p>
+        </p:txBody>
+      </p:sp>
+      <p:sp>
+        <p:nvSpPr>
+          <p:cNvPr id="24" name="Text 22"/>
+          <p:cNvSpPr/>
+          <p:nvPr/>
+        </p:nvSpPr>
+        <p:spPr>
+          <a:xfrm>
+            <a:off x="5009875" y="4049970"/>
+            <a:ext cx="1016227" cy="238747"/>
+          </a:xfrm>
+          <a:prstGeom prst="rect">
+            <a:avLst/>
+          </a:prstGeom>
+          <a:noFill/>
+          <a:ln/>
+        </p:spPr>
+        <p:txBody>
+          <a:bodyPr wrap="square" lIns="0" tIns="0" rIns="0" bIns="0" rtlCol="0" anchor="t">
+            <a:normAutofit/>
+          </a:bodyPr>
+          <a:lstStyle/>
+          <a:p>
+            <a:pPr algn="ctr" indent="0" marL="0">
+              <a:lnSpc>
+                <a:spcPts val="1680"/>
+              </a:lnSpc>
+              <a:buNone/>
+            </a:pPr>
+            <a:r>
+              <a:rPr lang="en-US" sz="1200" b="1" dirty="0">
+                <a:solidFill>
+                  <a:srgbClr val="B5533A"/>
+                </a:solidFill>
+                <a:latin typeface="Inter" pitchFamily="34" charset="0"/>
+                <a:ea typeface="Inter" pitchFamily="34" charset="-122"/>
+                <a:cs typeface="Inter" pitchFamily="34" charset="-120"/>
+              </a:rPr>
+              <a:t>0.39</a:t>
+            </a:r>
+            <a:endParaRPr lang="en-US" sz="1200" dirty="0"/>
+          </a:p>
+        </p:txBody>
+      </p:sp>
+      <p:sp>
+        <p:nvSpPr>
+          <p:cNvPr id="25" name="Text 23"/>
+          <p:cNvSpPr/>
+          <p:nvPr/>
+        </p:nvSpPr>
+        <p:spPr>
+          <a:xfrm>
+            <a:off x="6038795" y="4049970"/>
+            <a:ext cx="1016227" cy="238747"/>
+          </a:xfrm>
+          <a:prstGeom prst="rect">
+            <a:avLst/>
+          </a:prstGeom>
+          <a:noFill/>
+          <a:ln/>
+        </p:spPr>
+        <p:txBody>
+          <a:bodyPr wrap="square" lIns="0" tIns="0" rIns="0" bIns="0" rtlCol="0" anchor="t">
+            <a:normAutofit/>
+          </a:bodyPr>
+          <a:lstStyle/>
+          <a:p>
+            <a:pPr algn="ctr" indent="0" marL="0">
+              <a:lnSpc>
+                <a:spcPts val="1680"/>
+              </a:lnSpc>
+              <a:buNone/>
+            </a:pPr>
+            <a:r>
+              <a:rPr lang="en-US" sz="1200" b="1" dirty="0">
+                <a:solidFill>
+                  <a:srgbClr val="B5533A"/>
+                </a:solidFill>
+                <a:latin typeface="Inter" pitchFamily="34" charset="0"/>
+                <a:ea typeface="Inter" pitchFamily="34" charset="-122"/>
+                <a:cs typeface="Inter" pitchFamily="34" charset="-120"/>
+              </a:rPr>
+              <a:t>0.43</a:t>
+            </a:r>
+            <a:endParaRPr lang="en-US" sz="1200" dirty="0"/>
+          </a:p>
+        </p:txBody>
+      </p:sp>
+      <p:sp>
+        <p:nvSpPr>
+          <p:cNvPr id="26" name="Text 24"/>
+          <p:cNvSpPr/>
+          <p:nvPr/>
+        </p:nvSpPr>
+        <p:spPr>
+          <a:xfrm>
+            <a:off x="7067714" y="4049970"/>
+            <a:ext cx="1016227" cy="238747"/>
+          </a:xfrm>
+          <a:prstGeom prst="rect">
+            <a:avLst/>
+          </a:prstGeom>
+          <a:noFill/>
+          <a:ln/>
+        </p:spPr>
+        <p:txBody>
+          <a:bodyPr wrap="square" lIns="0" tIns="0" rIns="0" bIns="0" rtlCol="0" anchor="t">
+            <a:normAutofit/>
+          </a:bodyPr>
+          <a:lstStyle/>
+          <a:p>
+            <a:pPr algn="ctr" indent="0" marL="0">
+              <a:lnSpc>
+                <a:spcPts val="1680"/>
+              </a:lnSpc>
+              <a:buNone/>
+            </a:pPr>
+            <a:r>
+              <a:rPr lang="en-US" sz="1200" b="1" dirty="0">
+                <a:solidFill>
+                  <a:srgbClr val="8A6A2F"/>
+                </a:solidFill>
+                <a:latin typeface="Inter" pitchFamily="34" charset="0"/>
+                <a:ea typeface="Inter" pitchFamily="34" charset="-122"/>
+                <a:cs typeface="Inter" pitchFamily="34" charset="-120"/>
+              </a:rPr>
+              <a:t>0.45</a:t>
+            </a:r>
+            <a:endParaRPr lang="en-US" sz="1200" dirty="0"/>
+          </a:p>
+        </p:txBody>
+      </p:sp>
+      <p:sp>
+        <p:nvSpPr>
+          <p:cNvPr id="27" name="Text 25"/>
+          <p:cNvSpPr/>
+          <p:nvPr/>
+        </p:nvSpPr>
+        <p:spPr>
+          <a:xfrm>
+            <a:off x="8096634" y="3978867"/>
+            <a:ext cx="1016227" cy="309847"/>
+          </a:xfrm>
+          <a:prstGeom prst="rect">
+            <a:avLst/>
+          </a:prstGeom>
+          <a:noFill/>
+          <a:ln/>
+        </p:spPr>
+        <p:txBody>
+          <a:bodyPr wrap="square" lIns="0" tIns="0" rIns="0" bIns="0" rtlCol="0" anchor="t">
+            <a:normAutofit/>
+          </a:bodyPr>
+          <a:lstStyle/>
+          <a:p>
+            <a:pPr algn="ctr" indent="0" marL="0">
+              <a:lnSpc>
+                <a:spcPts val="2240"/>
+              </a:lnSpc>
+              <a:buNone/>
+            </a:pPr>
+            <a:r>
+              <a:rPr lang="en-US" sz="1600" b="1" dirty="0">
+                <a:solidFill>
+                  <a:srgbClr val="1F7A6C"/>
                 </a:solidFill>
                 <a:latin typeface="Space Grotesk" pitchFamily="34" charset="0"/>
                 <a:ea typeface="Space Grotesk" pitchFamily="34" charset="-122"/>
                 <a:cs typeface="Space Grotesk" pitchFamily="34" charset="-120"/>
               </a:rPr>
-              <a:t>0.55</a:t>
-            </a:r>
-            <a:endParaRPr lang="en-US" sz="1906" dirty="0"/>
-          </a:p>
-        </p:txBody>
-      </p:sp>
-      <p:sp>
-        <p:nvSpPr>
-          <p:cNvPr id="16" name="Shape 14"/>
-          <p:cNvSpPr/>
-          <p:nvPr/>
-        </p:nvSpPr>
-        <p:spPr>
-          <a:xfrm>
-            <a:off x="8838881" y="2821468"/>
-            <a:ext cx="2349849" cy="809550"/>
-          </a:xfrm>
-          <a:prstGeom prst="roundRect">
-            <a:avLst>
-              <a:gd name="adj" fmla="val 9413"/>
-            </a:avLst>
-          </a:prstGeom>
-          <a:solidFill>
-            <a:srgbClr val="2A4A44"/>
-          </a:solidFill>
-          <a:ln/>
-        </p:spPr>
-      </p:sp>
-      <p:sp>
-        <p:nvSpPr>
-          <p:cNvPr id="17" name="Text 15"/>
-          <p:cNvSpPr/>
-          <p:nvPr/>
-        </p:nvSpPr>
-        <p:spPr>
-          <a:xfrm>
-            <a:off x="8965866" y="2948453"/>
-            <a:ext cx="2158757" cy="209039"/>
-          </a:xfrm>
-          <a:prstGeom prst="rect">
-            <a:avLst/>
-          </a:prstGeom>
-          <a:noFill/>
-          <a:ln/>
-        </p:spPr>
-        <p:txBody>
-          <a:bodyPr wrap="square" lIns="0" tIns="0" rIns="0" bIns="0" rtlCol="0" anchor="t">
-            <a:normAutofit/>
-          </a:bodyPr>
-          <a:lstStyle/>
-          <a:p>
-            <a:pPr algn="l" indent="0" marL="0">
-              <a:lnSpc>
-                <a:spcPts val="1473"/>
-              </a:lnSpc>
-              <a:buNone/>
-            </a:pPr>
-            <a:r>
-              <a:rPr lang="en-US" sz="1052" dirty="0">
-                <a:solidFill>
-                  <a:srgbClr val="BFD4CF"/>
-                </a:solidFill>
-                <a:latin typeface="Inter" pitchFamily="34" charset="0"/>
-                <a:ea typeface="Inter" pitchFamily="34" charset="-122"/>
-                <a:cs typeface="Inter" pitchFamily="34" charset="-120"/>
-              </a:rPr>
-              <a:t>interface PAE</a:t>
-            </a:r>
-            <a:endParaRPr lang="en-US" sz="1052" dirty="0"/>
-          </a:p>
-        </p:txBody>
-      </p:sp>
-      <p:sp>
-        <p:nvSpPr>
-          <p:cNvPr id="18" name="Text 16"/>
-          <p:cNvSpPr/>
-          <p:nvPr/>
-        </p:nvSpPr>
-        <p:spPr>
-          <a:xfrm>
-            <a:off x="8965866" y="3170179"/>
-            <a:ext cx="2158757" cy="359255"/>
-          </a:xfrm>
-          <a:prstGeom prst="rect">
-            <a:avLst/>
-          </a:prstGeom>
-          <a:noFill/>
-          <a:ln/>
-        </p:spPr>
-        <p:txBody>
-          <a:bodyPr wrap="square" lIns="0" tIns="0" rIns="0" bIns="0" rtlCol="0" anchor="t">
-            <a:normAutofit/>
-          </a:bodyPr>
-          <a:lstStyle/>
-          <a:p>
-            <a:pPr algn="l" indent="0" marL="0">
-              <a:lnSpc>
-                <a:spcPts val="2669"/>
-              </a:lnSpc>
-              <a:buNone/>
-            </a:pPr>
-            <a:r>
-              <a:rPr lang="en-US" sz="1906" dirty="0">
-                <a:solidFill>
-                  <a:srgbClr val="F6F5F1"/>
-                </a:solidFill>
-                <a:latin typeface="Space Grotesk" pitchFamily="34" charset="0"/>
-                <a:ea typeface="Space Grotesk" pitchFamily="34" charset="-122"/>
-                <a:cs typeface="Space Grotesk" pitchFamily="34" charset="-120"/>
-              </a:rPr>
-              <a:t>14.69 → </a:t>
-            </a:r>
-            <a:r>
-              <a:rPr lang="en-US" sz="1906" dirty="0">
-                <a:solidFill>
-                  <a:srgbClr val="7FEE64"/>
-                </a:solidFill>
-                <a:latin typeface="Space Grotesk" pitchFamily="34" charset="0"/>
-                <a:ea typeface="Space Grotesk" pitchFamily="34" charset="-122"/>
-                <a:cs typeface="Space Grotesk" pitchFamily="34" charset="-120"/>
-              </a:rPr>
-              <a:t>11.58</a:t>
-            </a:r>
-            <a:endParaRPr lang="en-US" sz="1906" dirty="0"/>
-          </a:p>
-        </p:txBody>
-      </p:sp>
-      <p:sp>
-        <p:nvSpPr>
-          <p:cNvPr id="19" name="Text 17"/>
-          <p:cNvSpPr/>
-          <p:nvPr/>
-        </p:nvSpPr>
-        <p:spPr>
-          <a:xfrm>
-            <a:off x="6374773" y="3719916"/>
-            <a:ext cx="4958377" cy="838573"/>
+              <a:t>0.81</a:t>
+            </a:r>
+            <a:endParaRPr lang="en-US" sz="1600" dirty="0"/>
+          </a:p>
+        </p:txBody>
+      </p:sp>
+      <p:sp>
+        <p:nvSpPr>
+          <p:cNvPr id="28" name="Text 26"/>
+          <p:cNvSpPr/>
+          <p:nvPr/>
+        </p:nvSpPr>
+        <p:spPr>
+          <a:xfrm>
+            <a:off x="9265258" y="3814384"/>
+            <a:ext cx="1962146" cy="638812"/>
           </a:xfrm>
           <a:prstGeom prst="rect">
             <a:avLst/>
@@ -8353,171 +9124,17 @@
               <a:buNone/>
             </a:pPr>
             <a:r>
-              <a:rPr lang="en-US" sz="1110" dirty="0">
-                <a:solidFill>
-                  <a:srgbClr val="BFD4CF"/>
-                </a:solidFill>
-                <a:latin typeface="Inter" pitchFamily="34" charset="0"/>
-                <a:ea typeface="Inter" pitchFamily="34" charset="-122"/>
-                <a:cs typeface="Inter" pitchFamily="34" charset="-120"/>
-              </a:rPr>
-              <a:t>Five mutations. The redesign and the re-prediction were both Modal GPU tool calls. One before/after comparison. Still below our 0.8 / 10 bar. No matched baseline, so we cannot say this beats unguided refinement.</a:t>
-            </a:r>
-            <a:endParaRPr lang="en-US" sz="1110" dirty="0"/>
-          </a:p>
-        </p:txBody>
-      </p:sp>
-      <p:sp>
-        <p:nvSpPr>
-          <p:cNvPr id="20" name="Shape 18"/>
-          <p:cNvSpPr/>
-          <p:nvPr/>
-        </p:nvSpPr>
-        <p:spPr>
-          <a:xfrm>
-            <a:off x="6374773" y="4621985"/>
-            <a:ext cx="4813958" cy="1029554"/>
-          </a:xfrm>
-          <a:prstGeom prst="roundRect">
-            <a:avLst>
-              <a:gd name="adj" fmla="val 7401"/>
-            </a:avLst>
-          </a:prstGeom>
-          <a:solidFill>
-            <a:srgbClr val="3D2A22"/>
-          </a:solidFill>
-          <a:ln/>
-        </p:spPr>
-      </p:sp>
-      <p:sp>
-        <p:nvSpPr>
-          <p:cNvPr id="21" name="Text 19"/>
-          <p:cNvSpPr/>
-          <p:nvPr/>
-        </p:nvSpPr>
-        <p:spPr>
-          <a:xfrm>
-            <a:off x="6514438" y="4736247"/>
-            <a:ext cx="4670667" cy="200570"/>
-          </a:xfrm>
-          <a:prstGeom prst="rect">
-            <a:avLst/>
-          </a:prstGeom>
-          <a:noFill/>
-          <a:ln/>
-        </p:spPr>
-        <p:txBody>
-          <a:bodyPr wrap="square" lIns="0" tIns="0" rIns="0" bIns="0" rtlCol="0" anchor="t">
-            <a:normAutofit/>
-          </a:bodyPr>
-          <a:lstStyle/>
-          <a:p>
-            <a:pPr algn="l" indent="0" marL="0">
-              <a:lnSpc>
-                <a:spcPts val="1422"/>
-              </a:lnSpc>
-              <a:buNone/>
-            </a:pPr>
-            <a:r>
-              <a:rPr lang="en-US" sz="1185" b="1" dirty="0">
-                <a:solidFill>
-                  <a:srgbClr val="E0A35F"/>
-                </a:solidFill>
-                <a:latin typeface="Inter" pitchFamily="34" charset="0"/>
-                <a:ea typeface="Inter" pitchFamily="34" charset="-122"/>
-                <a:cs typeface="Inter" pitchFamily="34" charset="-120"/>
-              </a:rPr>
-              <a:t>Composition caveat</a:t>
-            </a:r>
-            <a:endParaRPr lang="en-US" sz="1185" dirty="0"/>
-          </a:p>
-        </p:txBody>
-      </p:sp>
-      <p:sp>
-        <p:nvSpPr>
-          <p:cNvPr id="22" name="Text 20"/>
-          <p:cNvSpPr/>
-          <p:nvPr/>
-        </p:nvSpPr>
-        <p:spPr>
-          <a:xfrm>
-            <a:off x="6514438" y="4949499"/>
-            <a:ext cx="4670667" cy="613179"/>
-          </a:xfrm>
-          <a:prstGeom prst="rect">
-            <a:avLst/>
-          </a:prstGeom>
-          <a:noFill/>
-          <a:ln/>
-        </p:spPr>
-        <p:txBody>
-          <a:bodyPr wrap="square" lIns="0" tIns="0" rIns="0" bIns="0" rtlCol="0" anchor="t">
-            <a:normAutofit/>
-          </a:bodyPr>
-          <a:lstStyle/>
-          <a:p>
-            <a:pPr algn="l" indent="0" marL="0">
-              <a:lnSpc>
-                <a:spcPts val="1555"/>
-              </a:lnSpc>
-              <a:buNone/>
-            </a:pPr>
-            <a:r>
-              <a:rPr lang="en-US" sz="1110" dirty="0">
-                <a:solidFill>
-                  <a:srgbClr val="E8D9CF"/>
-                </a:solidFill>
-                <a:latin typeface="Inter" pitchFamily="34" charset="0"/>
-                <a:ea typeface="Inter" pitchFamily="34" charset="-122"/>
-                <a:cs typeface="Inter" pitchFamily="34" charset="-120"/>
-              </a:rPr>
-              <a:t>The sequence is 70% glutamate before refinement and 76% after — all five mutations add glutamate. A repetitive sequence scoring better may be a model artifact.</a:t>
-            </a:r>
-            <a:endParaRPr lang="en-US" sz="1110" dirty="0"/>
-          </a:p>
-        </p:txBody>
-      </p:sp>
-      <p:sp>
-        <p:nvSpPr>
-          <p:cNvPr id="23" name="Text 21"/>
-          <p:cNvSpPr/>
-          <p:nvPr/>
-        </p:nvSpPr>
-        <p:spPr>
-          <a:xfrm>
-            <a:off x="812765" y="6007178"/>
-            <a:ext cx="10883390" cy="469846"/>
-          </a:xfrm>
-          <a:prstGeom prst="rect">
-            <a:avLst/>
-          </a:prstGeom>
-          <a:noFill/>
-          <a:ln/>
-        </p:spPr>
-        <p:txBody>
-          <a:bodyPr wrap="square" lIns="0" tIns="0" rIns="0" bIns="0" rtlCol="0" anchor="t">
-            <a:normAutofit/>
-          </a:bodyPr>
-          <a:lstStyle/>
-          <a:p>
-            <a:pPr algn="l" indent="0" marL="0">
-              <a:lnSpc>
-                <a:spcPts val="1750"/>
-              </a:lnSpc>
-              <a:buNone/>
-            </a:pPr>
-            <a:r>
-              <a:rPr lang="en-US" sz="1250" dirty="0">
-                <a:solidFill>
-                  <a:srgbClr val="4A4F57"/>
-                </a:solidFill>
-                <a:latin typeface="Inter" pitchFamily="34" charset="0"/>
-                <a:ea typeface="Inter" pitchFamily="34" charset="-122"/>
-                <a:cs typeface="Inter" pitchFamily="34" charset="-120"/>
-              </a:rPr>
-              <a:t>Humans read the matrix and chose this fix. An agent doing it automatically — and deciding when to refine rather than start over — is the next step, not something we ran.</a:t>
-            </a:r>
-            <a:endParaRPr lang="en-US" sz="1250" dirty="0"/>
+              <a:rPr lang="en-US" sz="1150" dirty="0">
+                <a:solidFill>
+                  <a:srgbClr val="6B6F76"/>
+                </a:solidFill>
+                <a:latin typeface="Inter" pitchFamily="34" charset="0"/>
+                <a:ea typeface="Inter" pitchFamily="34" charset="-122"/>
+                <a:cs typeface="Inter" pitchFamily="34" charset="-120"/>
+              </a:rPr>
+              <a:t>One clear hit, wide spread otherwise. This is what the funnel actually looks like.</a:t>
+            </a:r>
+            <a:endParaRPr lang="en-US" sz="1150" dirty="0"/>
           </a:p>
         </p:txBody>
       </p:sp>
@@ -8562,28 +9179,28 @@
         <p:spPr>
           <a:xfrm>
             <a:off x="812765" y="812763"/>
-            <a:ext cx="10883436" cy="416543"/>
-          </a:xfrm>
-          <a:prstGeom prst="rect">
-            <a:avLst/>
-          </a:prstGeom>
-          <a:noFill/>
-          <a:ln/>
-        </p:spPr>
-        <p:txBody>
-          <a:bodyPr wrap="square" lIns="0" tIns="0" rIns="0" bIns="0" rtlCol="0" anchor="t">
-            <a:normAutofit/>
-          </a:bodyPr>
-          <a:lstStyle/>
-          <a:p>
-            <a:pPr algn="l" indent="0" marL="0">
-              <a:lnSpc>
-                <a:spcPts val="3080"/>
-              </a:lnSpc>
-              <a:buNone/>
-            </a:pPr>
-            <a:r>
-              <a:rPr lang="en-US" sz="2800" dirty="0">
+            <a:ext cx="10883436" cy="444485"/>
+          </a:xfrm>
+          <a:prstGeom prst="rect">
+            <a:avLst/>
+          </a:prstGeom>
+          <a:noFill/>
+          <a:ln/>
+        </p:spPr>
+        <p:txBody>
+          <a:bodyPr wrap="square" lIns="0" tIns="0" rIns="0" bIns="0" rtlCol="0" anchor="t">
+            <a:normAutofit/>
+          </a:bodyPr>
+          <a:lstStyle/>
+          <a:p>
+            <a:pPr algn="l" indent="0" marL="0">
+              <a:lnSpc>
+                <a:spcPts val="3300"/>
+              </a:lnSpc>
+              <a:buNone/>
+            </a:pPr>
+            <a:r>
+              <a:rPr lang="en-US" sz="3000" dirty="0">
                 <a:solidFill>
                   <a:srgbClr val="16191F"/>
                 </a:solidFill>
@@ -8591,9 +9208,9 @@
                 <a:ea typeface="Space Grotesk" pitchFamily="34" charset="-122"/>
                 <a:cs typeface="Space Grotesk" pitchFamily="34" charset="-120"/>
               </a:rPr>
-              <a:t>Limitations</a:t>
-            </a:r>
-            <a:endParaRPr lang="en-US" sz="2800" dirty="0"/>
+              <a:t>PAE-guided refinement, tested cleanly</a:t>
+            </a:r>
+            <a:endParaRPr lang="en-US" sz="3000" dirty="0"/>
           </a:p>
         </p:txBody>
       </p:sp>
@@ -8605,7 +9222,7 @@
         </p:nvSpPr>
         <p:spPr>
           <a:xfrm>
-            <a:off x="812765" y="1267402"/>
+            <a:off x="812765" y="1308026"/>
             <a:ext cx="10883436" cy="265421"/>
           </a:xfrm>
           <a:prstGeom prst="rect">
@@ -8635,7 +9252,7 @@
                 <a:ea typeface="Inter" pitchFamily="34" charset="-122"/>
                 <a:cs typeface="Inter" pitchFamily="34" charset="-120"/>
               </a:rPr>
-              <a:t>What this run does not establish, in order of how much it matters.</a:t>
+              <a:t>Lock the residues AlphaFold is confident about, redesign the rest. Three trials with the corrected tool.</a:t>
             </a:r>
             <a:endParaRPr lang="en-US" sz="1350" dirty="0"/>
           </a:p>
@@ -8643,18 +9260,194 @@
       </p:sp>
       <p:sp>
         <p:nvSpPr>
-          <p:cNvPr id="4" name="Shape 2"/>
-          <p:cNvSpPr/>
-          <p:nvPr/>
-        </p:nvSpPr>
-        <p:spPr>
-          <a:xfrm>
-            <a:off x="815940" y="1637581"/>
-            <a:ext cx="10560093" cy="426865"/>
+          <p:cNvPr id="4" name="Text 2"/>
+          <p:cNvSpPr/>
+          <p:nvPr/>
+        </p:nvSpPr>
+        <p:spPr>
+          <a:xfrm>
+            <a:off x="1003242" y="1713117"/>
+            <a:ext cx="2747004" cy="229871"/>
+          </a:xfrm>
+          <a:prstGeom prst="rect">
+            <a:avLst/>
+          </a:prstGeom>
+          <a:noFill/>
+          <a:ln/>
+        </p:spPr>
+        <p:txBody>
+          <a:bodyPr wrap="square" lIns="0" tIns="0" rIns="0" bIns="0" rtlCol="0" anchor="t">
+            <a:normAutofit/>
+          </a:bodyPr>
+          <a:lstStyle/>
+          <a:p>
+            <a:pPr algn="l" indent="0" marL="0">
+              <a:lnSpc>
+                <a:spcPts val="1610"/>
+              </a:lnSpc>
+              <a:buNone/>
+            </a:pPr>
+            <a:r>
+              <a:rPr lang="en-US" sz="1150" b="1" spc="50" kern="0" dirty="0">
+                <a:solidFill>
+                  <a:srgbClr val="6B6F76"/>
+                </a:solidFill>
+                <a:latin typeface="Inter" pitchFamily="34" charset="0"/>
+                <a:ea typeface="Inter" pitchFamily="34" charset="-122"/>
+                <a:cs typeface="Inter" pitchFamily="34" charset="-120"/>
+              </a:rPr>
+              <a:t>STARTING CANDIDATE</a:t>
+            </a:r>
+            <a:endParaRPr lang="en-US" sz="1150" dirty="0"/>
+          </a:p>
+        </p:txBody>
+      </p:sp>
+      <p:sp>
+        <p:nvSpPr>
+          <p:cNvPr id="5" name="Text 3"/>
+          <p:cNvSpPr/>
+          <p:nvPr/>
+        </p:nvSpPr>
+        <p:spPr>
+          <a:xfrm>
+            <a:off x="3822626" y="1713117"/>
+            <a:ext cx="1701781" cy="229871"/>
+          </a:xfrm>
+          <a:prstGeom prst="rect">
+            <a:avLst/>
+          </a:prstGeom>
+          <a:noFill/>
+          <a:ln/>
+        </p:spPr>
+        <p:txBody>
+          <a:bodyPr wrap="square" lIns="0" tIns="0" rIns="0" bIns="0" rtlCol="0" anchor="t">
+            <a:normAutofit/>
+          </a:bodyPr>
+          <a:lstStyle/>
+          <a:p>
+            <a:pPr algn="l" indent="0" marL="0">
+              <a:lnSpc>
+                <a:spcPts val="1610"/>
+              </a:lnSpc>
+              <a:buNone/>
+            </a:pPr>
+            <a:r>
+              <a:rPr lang="en-US" sz="1150" b="1" spc="50" kern="0" dirty="0">
+                <a:solidFill>
+                  <a:srgbClr val="6B6F76"/>
+                </a:solidFill>
+                <a:latin typeface="Inter" pitchFamily="34" charset="0"/>
+                <a:ea typeface="Inter" pitchFamily="34" charset="-122"/>
+                <a:cs typeface="Inter" pitchFamily="34" charset="-120"/>
+              </a:rPr>
+              <a:t>CONFIDENT</a:t>
+            </a:r>
+            <a:endParaRPr lang="en-US" sz="1150" dirty="0"/>
+          </a:p>
+        </p:txBody>
+      </p:sp>
+      <p:sp>
+        <p:nvSpPr>
+          <p:cNvPr id="6" name="Text 4"/>
+          <p:cNvSpPr/>
+          <p:nvPr/>
+        </p:nvSpPr>
+        <p:spPr>
+          <a:xfrm>
+            <a:off x="5625998" y="1713117"/>
+            <a:ext cx="1962146" cy="229871"/>
+          </a:xfrm>
+          <a:prstGeom prst="rect">
+            <a:avLst/>
+          </a:prstGeom>
+          <a:noFill/>
+          <a:ln/>
+        </p:spPr>
+        <p:txBody>
+          <a:bodyPr wrap="square" lIns="0" tIns="0" rIns="0" bIns="0" rtlCol="0" anchor="t">
+            <a:normAutofit/>
+          </a:bodyPr>
+          <a:lstStyle/>
+          <a:p>
+            <a:pPr algn="l" indent="0" marL="0">
+              <a:lnSpc>
+                <a:spcPts val="1610"/>
+              </a:lnSpc>
+              <a:buNone/>
+            </a:pPr>
+            <a:r>
+              <a:rPr lang="en-US" sz="1150" b="1" spc="50" kern="0" dirty="0">
+                <a:solidFill>
+                  <a:srgbClr val="6B6F76"/>
+                </a:solidFill>
+                <a:latin typeface="Inter" pitchFamily="34" charset="0"/>
+                <a:ea typeface="Inter" pitchFamily="34" charset="-122"/>
+                <a:cs typeface="Inter" pitchFamily="34" charset="-120"/>
+              </a:rPr>
+              <a:t>ipTM</a:t>
+            </a:r>
+            <a:endParaRPr lang="en-US" sz="1150" dirty="0"/>
+          </a:p>
+        </p:txBody>
+      </p:sp>
+      <p:sp>
+        <p:nvSpPr>
+          <p:cNvPr id="7" name="Text 5"/>
+          <p:cNvSpPr/>
+          <p:nvPr/>
+        </p:nvSpPr>
+        <p:spPr>
+          <a:xfrm>
+            <a:off x="7683385" y="1713117"/>
+            <a:ext cx="3610506" cy="229871"/>
+          </a:xfrm>
+          <a:prstGeom prst="rect">
+            <a:avLst/>
+          </a:prstGeom>
+          <a:noFill/>
+          <a:ln/>
+        </p:spPr>
+        <p:txBody>
+          <a:bodyPr wrap="square" lIns="0" tIns="0" rIns="0" bIns="0" rtlCol="0" anchor="t">
+            <a:normAutofit/>
+          </a:bodyPr>
+          <a:lstStyle/>
+          <a:p>
+            <a:pPr algn="l" indent="0" marL="0">
+              <a:lnSpc>
+                <a:spcPts val="1610"/>
+              </a:lnSpc>
+              <a:buNone/>
+            </a:pPr>
+            <a:r>
+              <a:rPr lang="en-US" sz="1150" b="1" spc="50" kern="0" dirty="0">
+                <a:solidFill>
+                  <a:srgbClr val="6B6F76"/>
+                </a:solidFill>
+                <a:latin typeface="Inter" pitchFamily="34" charset="0"/>
+                <a:ea typeface="Inter" pitchFamily="34" charset="-122"/>
+                <a:cs typeface="Inter" pitchFamily="34" charset="-120"/>
+              </a:rPr>
+              <a:t>COMPOSITION</a:t>
+            </a:r>
+            <a:endParaRPr lang="en-US" sz="1150" dirty="0"/>
+          </a:p>
+        </p:txBody>
+      </p:sp>
+      <p:sp>
+        <p:nvSpPr>
+          <p:cNvPr id="8" name="Shape 6"/>
+          <p:cNvSpPr/>
+          <p:nvPr/>
+        </p:nvSpPr>
+        <p:spPr>
+          <a:xfrm>
+            <a:off x="815940" y="1984251"/>
+            <a:ext cx="10560093" cy="525908"/>
           </a:xfrm>
           <a:prstGeom prst="roundRect">
             <a:avLst>
-              <a:gd name="adj" fmla="val 17107"/>
+              <a:gd name="adj" fmla="val 13886"/>
             </a:avLst>
           </a:prstGeom>
           <a:solidFill>
@@ -8670,150 +9463,194 @@
       </p:sp>
       <p:sp>
         <p:nvSpPr>
-          <p:cNvPr id="5" name="Text 3"/>
-          <p:cNvSpPr/>
-          <p:nvPr/>
-        </p:nvSpPr>
-        <p:spPr>
-          <a:xfrm>
-            <a:off x="996358" y="1735441"/>
-            <a:ext cx="380987" cy="256545"/>
-          </a:xfrm>
-          <a:prstGeom prst="rect">
-            <a:avLst/>
-          </a:prstGeom>
-          <a:noFill/>
-          <a:ln/>
-        </p:spPr>
-        <p:txBody>
-          <a:bodyPr wrap="square" lIns="0" tIns="0" rIns="0" bIns="0" rtlCol="0" anchor="t">
-            <a:normAutofit/>
-          </a:bodyPr>
-          <a:lstStyle/>
-          <a:p>
-            <a:pPr algn="l" indent="0" marL="0">
-              <a:lnSpc>
-                <a:spcPts val="1820"/>
-              </a:lnSpc>
-              <a:buNone/>
-            </a:pPr>
-            <a:r>
-              <a:rPr lang="en-US" sz="1300" b="1" dirty="0">
-                <a:solidFill>
-                  <a:srgbClr val="B5533A"/>
+          <p:cNvPr id="9" name="Text 7"/>
+          <p:cNvSpPr/>
+          <p:nvPr/>
+        </p:nvSpPr>
+        <p:spPr>
+          <a:xfrm>
+            <a:off x="1009039" y="2136093"/>
+            <a:ext cx="2747004" cy="247623"/>
+          </a:xfrm>
+          <a:prstGeom prst="rect">
+            <a:avLst/>
+          </a:prstGeom>
+          <a:noFill/>
+          <a:ln/>
+        </p:spPr>
+        <p:txBody>
+          <a:bodyPr wrap="square" lIns="0" tIns="0" rIns="0" bIns="0" rtlCol="0" anchor="t">
+            <a:normAutofit/>
+          </a:bodyPr>
+          <a:lstStyle/>
+          <a:p>
+            <a:pPr algn="l" indent="0" marL="0">
+              <a:lnSpc>
+                <a:spcPts val="1750"/>
+              </a:lnSpc>
+              <a:buNone/>
+            </a:pPr>
+            <a:r>
+              <a:rPr lang="en-US" sz="1250" b="1" dirty="0">
+                <a:solidFill>
+                  <a:srgbClr val="16191F"/>
+                </a:solidFill>
+                <a:latin typeface="Inter" pitchFamily="34" charset="0"/>
+                <a:ea typeface="Inter" pitchFamily="34" charset="-122"/>
+                <a:cs typeface="Inter" pitchFamily="34" charset="-120"/>
+              </a:rPr>
+              <a:t>Already strong</a:t>
+            </a:r>
+            <a:endParaRPr lang="en-US" sz="1250" dirty="0"/>
+          </a:p>
+        </p:txBody>
+      </p:sp>
+      <p:sp>
+        <p:nvSpPr>
+          <p:cNvPr id="10" name="Text 8"/>
+          <p:cNvSpPr/>
+          <p:nvPr/>
+        </p:nvSpPr>
+        <p:spPr>
+          <a:xfrm>
+            <a:off x="3828423" y="2136093"/>
+            <a:ext cx="1701781" cy="247623"/>
+          </a:xfrm>
+          <a:prstGeom prst="rect">
+            <a:avLst/>
+          </a:prstGeom>
+          <a:noFill/>
+          <a:ln/>
+        </p:spPr>
+        <p:txBody>
+          <a:bodyPr wrap="square" lIns="0" tIns="0" rIns="0" bIns="0" rtlCol="0" anchor="t">
+            <a:normAutofit/>
+          </a:bodyPr>
+          <a:lstStyle/>
+          <a:p>
+            <a:pPr algn="l" indent="0" marL="0">
+              <a:lnSpc>
+                <a:spcPts val="1750"/>
+              </a:lnSpc>
+              <a:buNone/>
+            </a:pPr>
+            <a:r>
+              <a:rPr lang="en-US" sz="1250" dirty="0">
+                <a:solidFill>
+                  <a:srgbClr val="4A4F57"/>
+                </a:solidFill>
+                <a:latin typeface="Inter" pitchFamily="34" charset="0"/>
+                <a:ea typeface="Inter" pitchFamily="34" charset="-122"/>
+                <a:cs typeface="Inter" pitchFamily="34" charset="-120"/>
+              </a:rPr>
+              <a:t>78/80</a:t>
+            </a:r>
+            <a:endParaRPr lang="en-US" sz="1250" dirty="0"/>
+          </a:p>
+        </p:txBody>
+      </p:sp>
+      <p:sp>
+        <p:nvSpPr>
+          <p:cNvPr id="11" name="Text 9"/>
+          <p:cNvSpPr/>
+          <p:nvPr/>
+        </p:nvSpPr>
+        <p:spPr>
+          <a:xfrm>
+            <a:off x="5631795" y="2113862"/>
+            <a:ext cx="1962146" cy="292095"/>
+          </a:xfrm>
+          <a:prstGeom prst="rect">
+            <a:avLst/>
+          </a:prstGeom>
+          <a:noFill/>
+          <a:ln/>
+        </p:spPr>
+        <p:txBody>
+          <a:bodyPr wrap="square" lIns="0" tIns="0" rIns="0" bIns="0" rtlCol="0" anchor="t">
+            <a:normAutofit/>
+          </a:bodyPr>
+          <a:lstStyle/>
+          <a:p>
+            <a:pPr algn="l" indent="0" marL="0">
+              <a:lnSpc>
+                <a:spcPts val="2100"/>
+              </a:lnSpc>
+              <a:buNone/>
+            </a:pPr>
+            <a:r>
+              <a:rPr lang="en-US" sz="1500" dirty="0">
+                <a:solidFill>
+                  <a:srgbClr val="16191F"/>
                 </a:solidFill>
                 <a:latin typeface="Space Grotesk" pitchFamily="34" charset="0"/>
                 <a:ea typeface="Space Grotesk" pitchFamily="34" charset="-122"/>
                 <a:cs typeface="Space Grotesk" pitchFamily="34" charset="-120"/>
               </a:rPr>
-              <a:t>01</a:t>
-            </a:r>
-            <a:endParaRPr lang="en-US" sz="1300" dirty="0"/>
-          </a:p>
-        </p:txBody>
-      </p:sp>
-      <p:sp>
-        <p:nvSpPr>
-          <p:cNvPr id="6" name="Text 4"/>
-          <p:cNvSpPr/>
-          <p:nvPr/>
-        </p:nvSpPr>
-        <p:spPr>
-          <a:xfrm>
-            <a:off x="1478936" y="1751924"/>
-            <a:ext cx="2616163" cy="223530"/>
-          </a:xfrm>
-          <a:prstGeom prst="rect">
-            <a:avLst/>
-          </a:prstGeom>
-          <a:noFill/>
-          <a:ln/>
-        </p:spPr>
-        <p:txBody>
-          <a:bodyPr wrap="square" lIns="0" tIns="0" rIns="0" bIns="0" rtlCol="0" anchor="t">
-            <a:normAutofit/>
-          </a:bodyPr>
-          <a:lstStyle/>
-          <a:p>
-            <a:pPr algn="l" indent="0" marL="0">
-              <a:lnSpc>
-                <a:spcPts val="1560"/>
-              </a:lnSpc>
-              <a:buNone/>
-            </a:pPr>
-            <a:r>
-              <a:rPr lang="en-US" sz="1300" b="1" dirty="0">
-                <a:solidFill>
-                  <a:srgbClr val="16191F"/>
-                </a:solidFill>
-                <a:latin typeface="Inter" pitchFamily="34" charset="0"/>
-                <a:ea typeface="Inter" pitchFamily="34" charset="-122"/>
-                <a:cs typeface="Inter" pitchFamily="34" charset="-120"/>
-              </a:rPr>
-              <a:t>No experimental binding data</a:t>
-            </a:r>
-            <a:endParaRPr lang="en-US" sz="1300" dirty="0"/>
-          </a:p>
-        </p:txBody>
-      </p:sp>
-      <p:sp>
-        <p:nvSpPr>
-          <p:cNvPr id="7" name="Text 5"/>
-          <p:cNvSpPr/>
-          <p:nvPr/>
-        </p:nvSpPr>
-        <p:spPr>
-          <a:xfrm>
-            <a:off x="4171291" y="1752426"/>
-            <a:ext cx="7235054" cy="222534"/>
-          </a:xfrm>
-          <a:prstGeom prst="rect">
-            <a:avLst/>
-          </a:prstGeom>
-          <a:noFill/>
-          <a:ln/>
-        </p:spPr>
-        <p:txBody>
-          <a:bodyPr wrap="square" lIns="0" tIns="0" rIns="0" bIns="0" rtlCol="0" anchor="t">
-            <a:normAutofit/>
-          </a:bodyPr>
-          <a:lstStyle/>
-          <a:p>
-            <a:pPr algn="l" indent="0" marL="0">
-              <a:lnSpc>
-                <a:spcPts val="1553"/>
-              </a:lnSpc>
-              <a:buNone/>
-            </a:pPr>
-            <a:r>
-              <a:rPr lang="en-US" sz="1150" dirty="0">
-                <a:solidFill>
-                  <a:srgbClr val="4A4F57"/>
-                </a:solidFill>
-                <a:latin typeface="Inter" pitchFamily="34" charset="0"/>
-                <a:ea typeface="Inter" pitchFamily="34" charset="-122"/>
-                <a:cs typeface="Inter" pitchFamily="34" charset="-120"/>
-              </a:rPr>
-              <a:t>Every number here is a model prediction. Nothing has been made or tested in a lab</a:t>
-            </a:r>
-            <a:endParaRPr lang="en-US" sz="1150" dirty="0"/>
-          </a:p>
-        </p:txBody>
-      </p:sp>
-      <p:sp>
-        <p:nvSpPr>
-          <p:cNvPr id="8" name="Shape 6"/>
-          <p:cNvSpPr/>
-          <p:nvPr/>
-        </p:nvSpPr>
-        <p:spPr>
-          <a:xfrm>
-            <a:off x="815940" y="2127901"/>
-            <a:ext cx="10560093" cy="426865"/>
+              <a:t>0.81 → 0.81</a:t>
+            </a:r>
+            <a:endParaRPr lang="en-US" sz="1500" dirty="0"/>
+          </a:p>
+        </p:txBody>
+      </p:sp>
+      <p:sp>
+        <p:nvSpPr>
+          <p:cNvPr id="12" name="Text 10"/>
+          <p:cNvSpPr/>
+          <p:nvPr/>
+        </p:nvSpPr>
+        <p:spPr>
+          <a:xfrm>
+            <a:off x="7689181" y="2140533"/>
+            <a:ext cx="3598565" cy="238747"/>
+          </a:xfrm>
+          <a:prstGeom prst="rect">
+            <a:avLst/>
+          </a:prstGeom>
+          <a:noFill/>
+          <a:ln/>
+        </p:spPr>
+        <p:txBody>
+          <a:bodyPr wrap="square" lIns="0" tIns="0" rIns="0" bIns="0" rtlCol="0" anchor="t">
+            <a:normAutofit/>
+          </a:bodyPr>
+          <a:lstStyle/>
+          <a:p>
+            <a:pPr algn="l" indent="0" marL="0">
+              <a:lnSpc>
+                <a:spcPts val="1680"/>
+              </a:lnSpc>
+              <a:buNone/>
+            </a:pPr>
+            <a:r>
+              <a:rPr lang="en-US" sz="1200" dirty="0">
+                <a:solidFill>
+                  <a:srgbClr val="6B6F76"/>
+                </a:solidFill>
+                <a:latin typeface="Inter" pitchFamily="34" charset="0"/>
+                <a:ea typeface="Inter" pitchFamily="34" charset="-122"/>
+                <a:cs typeface="Inter" pitchFamily="34" charset="-120"/>
+              </a:rPr>
+              <a:t>no positions changed</a:t>
+            </a:r>
+            <a:endParaRPr lang="en-US" sz="1200" dirty="0"/>
+          </a:p>
+        </p:txBody>
+      </p:sp>
+      <p:sp>
+        <p:nvSpPr>
+          <p:cNvPr id="13" name="Shape 11"/>
+          <p:cNvSpPr/>
+          <p:nvPr/>
+        </p:nvSpPr>
+        <p:spPr>
+          <a:xfrm>
+            <a:off x="815940" y="2580004"/>
+            <a:ext cx="10560093" cy="525908"/>
           </a:xfrm>
           <a:prstGeom prst="roundRect">
             <a:avLst>
-              <a:gd name="adj" fmla="val 17107"/>
+              <a:gd name="adj" fmla="val 13886"/>
             </a:avLst>
           </a:prstGeom>
           <a:solidFill>
@@ -8829,158 +9666,202 @@
       </p:sp>
       <p:sp>
         <p:nvSpPr>
-          <p:cNvPr id="9" name="Text 7"/>
-          <p:cNvSpPr/>
-          <p:nvPr/>
-        </p:nvSpPr>
-        <p:spPr>
-          <a:xfrm>
-            <a:off x="996358" y="2225762"/>
-            <a:ext cx="380987" cy="256545"/>
-          </a:xfrm>
-          <a:prstGeom prst="rect">
-            <a:avLst/>
-          </a:prstGeom>
-          <a:noFill/>
-          <a:ln/>
-        </p:spPr>
-        <p:txBody>
-          <a:bodyPr wrap="square" lIns="0" tIns="0" rIns="0" bIns="0" rtlCol="0" anchor="t">
-            <a:normAutofit/>
-          </a:bodyPr>
-          <a:lstStyle/>
-          <a:p>
-            <a:pPr algn="l" indent="0" marL="0">
-              <a:lnSpc>
-                <a:spcPts val="1820"/>
-              </a:lnSpc>
-              <a:buNone/>
-            </a:pPr>
-            <a:r>
-              <a:rPr lang="en-US" sz="1300" b="1" dirty="0">
-                <a:solidFill>
-                  <a:srgbClr val="B5533A"/>
+          <p:cNvPr id="14" name="Text 12"/>
+          <p:cNvSpPr/>
+          <p:nvPr/>
+        </p:nvSpPr>
+        <p:spPr>
+          <a:xfrm>
+            <a:off x="1009039" y="2731846"/>
+            <a:ext cx="2747004" cy="247623"/>
+          </a:xfrm>
+          <a:prstGeom prst="rect">
+            <a:avLst/>
+          </a:prstGeom>
+          <a:noFill/>
+          <a:ln/>
+        </p:spPr>
+        <p:txBody>
+          <a:bodyPr wrap="square" lIns="0" tIns="0" rIns="0" bIns="0" rtlCol="0" anchor="t">
+            <a:normAutofit/>
+          </a:bodyPr>
+          <a:lstStyle/>
+          <a:p>
+            <a:pPr algn="l" indent="0" marL="0">
+              <a:lnSpc>
+                <a:spcPts val="1750"/>
+              </a:lnSpc>
+              <a:buNone/>
+            </a:pPr>
+            <a:r>
+              <a:rPr lang="en-US" sz="1250" b="1" dirty="0">
+                <a:solidFill>
+                  <a:srgbClr val="16191F"/>
+                </a:solidFill>
+                <a:latin typeface="Inter" pitchFamily="34" charset="0"/>
+                <a:ea typeface="Inter" pitchFamily="34" charset="-122"/>
+                <a:cs typeface="Inter" pitchFamily="34" charset="-120"/>
+              </a:rPr>
+              <a:t>Weak</a:t>
+            </a:r>
+            <a:endParaRPr lang="en-US" sz="1250" dirty="0"/>
+          </a:p>
+        </p:txBody>
+      </p:sp>
+      <p:sp>
+        <p:nvSpPr>
+          <p:cNvPr id="15" name="Text 13"/>
+          <p:cNvSpPr/>
+          <p:nvPr/>
+        </p:nvSpPr>
+        <p:spPr>
+          <a:xfrm>
+            <a:off x="3828423" y="2731846"/>
+            <a:ext cx="1701781" cy="247623"/>
+          </a:xfrm>
+          <a:prstGeom prst="rect">
+            <a:avLst/>
+          </a:prstGeom>
+          <a:noFill/>
+          <a:ln/>
+        </p:spPr>
+        <p:txBody>
+          <a:bodyPr wrap="square" lIns="0" tIns="0" rIns="0" bIns="0" rtlCol="0" anchor="t">
+            <a:normAutofit/>
+          </a:bodyPr>
+          <a:lstStyle/>
+          <a:p>
+            <a:pPr algn="l" indent="0" marL="0">
+              <a:lnSpc>
+                <a:spcPts val="1750"/>
+              </a:lnSpc>
+              <a:buNone/>
+            </a:pPr>
+            <a:r>
+              <a:rPr lang="en-US" sz="1250" dirty="0">
+                <a:solidFill>
+                  <a:srgbClr val="4A4F57"/>
+                </a:solidFill>
+                <a:latin typeface="Inter" pitchFamily="34" charset="0"/>
+                <a:ea typeface="Inter" pitchFamily="34" charset="-122"/>
+                <a:cs typeface="Inter" pitchFamily="34" charset="-120"/>
+              </a:rPr>
+              <a:t>60/80</a:t>
+            </a:r>
+            <a:endParaRPr lang="en-US" sz="1250" dirty="0"/>
+          </a:p>
+        </p:txBody>
+      </p:sp>
+      <p:sp>
+        <p:nvSpPr>
+          <p:cNvPr id="16" name="Text 14"/>
+          <p:cNvSpPr/>
+          <p:nvPr/>
+        </p:nvSpPr>
+        <p:spPr>
+          <a:xfrm>
+            <a:off x="5631795" y="2709608"/>
+            <a:ext cx="1962146" cy="292095"/>
+          </a:xfrm>
+          <a:prstGeom prst="rect">
+            <a:avLst/>
+          </a:prstGeom>
+          <a:noFill/>
+          <a:ln/>
+        </p:spPr>
+        <p:txBody>
+          <a:bodyPr wrap="square" lIns="0" tIns="0" rIns="0" bIns="0" rtlCol="0" anchor="t">
+            <a:normAutofit/>
+          </a:bodyPr>
+          <a:lstStyle/>
+          <a:p>
+            <a:pPr algn="l" indent="0" marL="0">
+              <a:lnSpc>
+                <a:spcPts val="2100"/>
+              </a:lnSpc>
+              <a:buNone/>
+            </a:pPr>
+            <a:r>
+              <a:rPr lang="en-US" sz="1500" dirty="0">
+                <a:solidFill>
+                  <a:srgbClr val="16191F"/>
                 </a:solidFill>
                 <a:latin typeface="Space Grotesk" pitchFamily="34" charset="0"/>
                 <a:ea typeface="Space Grotesk" pitchFamily="34" charset="-122"/>
                 <a:cs typeface="Space Grotesk" pitchFamily="34" charset="-120"/>
               </a:rPr>
-              <a:t>02</a:t>
-            </a:r>
-            <a:endParaRPr lang="en-US" sz="1300" dirty="0"/>
-          </a:p>
-        </p:txBody>
-      </p:sp>
-      <p:sp>
-        <p:nvSpPr>
-          <p:cNvPr id="10" name="Text 8"/>
-          <p:cNvSpPr/>
-          <p:nvPr/>
-        </p:nvSpPr>
-        <p:spPr>
-          <a:xfrm>
-            <a:off x="1478936" y="2242251"/>
-            <a:ext cx="2616163" cy="223530"/>
-          </a:xfrm>
-          <a:prstGeom prst="rect">
-            <a:avLst/>
-          </a:prstGeom>
-          <a:noFill/>
-          <a:ln/>
-        </p:spPr>
-        <p:txBody>
-          <a:bodyPr wrap="square" lIns="0" tIns="0" rIns="0" bIns="0" rtlCol="0" anchor="t">
-            <a:normAutofit/>
-          </a:bodyPr>
-          <a:lstStyle/>
-          <a:p>
-            <a:pPr algn="l" indent="0" marL="0">
-              <a:lnSpc>
-                <a:spcPts val="1560"/>
-              </a:lnSpc>
-              <a:buNone/>
-            </a:pPr>
-            <a:r>
-              <a:rPr lang="en-US" sz="1300" b="1" dirty="0">
-                <a:solidFill>
-                  <a:srgbClr val="16191F"/>
-                </a:solidFill>
-                <a:latin typeface="Inter" pitchFamily="34" charset="0"/>
-                <a:ea typeface="Inter" pitchFamily="34" charset="-122"/>
-                <a:cs typeface="Inter" pitchFamily="34" charset="-120"/>
-              </a:rPr>
-              <a:t>One refinement comparison</a:t>
-            </a:r>
-            <a:endParaRPr lang="en-US" sz="1300" dirty="0"/>
-          </a:p>
-        </p:txBody>
-      </p:sp>
-      <p:sp>
-        <p:nvSpPr>
-          <p:cNvPr id="11" name="Text 9"/>
-          <p:cNvSpPr/>
-          <p:nvPr/>
-        </p:nvSpPr>
-        <p:spPr>
-          <a:xfrm>
-            <a:off x="4171291" y="2242747"/>
-            <a:ext cx="7235054" cy="222534"/>
-          </a:xfrm>
-          <a:prstGeom prst="rect">
-            <a:avLst/>
-          </a:prstGeom>
-          <a:noFill/>
-          <a:ln/>
-        </p:spPr>
-        <p:txBody>
-          <a:bodyPr wrap="square" lIns="0" tIns="0" rIns="0" bIns="0" rtlCol="0" anchor="t">
-            <a:normAutofit/>
-          </a:bodyPr>
-          <a:lstStyle/>
-          <a:p>
-            <a:pPr algn="l" indent="0" marL="0">
-              <a:lnSpc>
-                <a:spcPts val="1553"/>
-              </a:lnSpc>
-              <a:buNone/>
-            </a:pPr>
-            <a:r>
-              <a:rPr lang="en-US" sz="1150" dirty="0">
-                <a:solidFill>
-                  <a:srgbClr val="4A4F57"/>
-                </a:solidFill>
-                <a:latin typeface="Inter" pitchFamily="34" charset="0"/>
-                <a:ea typeface="Inter" pitchFamily="34" charset="-122"/>
-                <a:cs typeface="Inter" pitchFamily="34" charset="-120"/>
-              </a:rPr>
-              <a:t>A single before/after on one candidate, with no repeats across seeds</a:t>
-            </a:r>
-            <a:endParaRPr lang="en-US" sz="1150" dirty="0"/>
-          </a:p>
-        </p:txBody>
-      </p:sp>
-      <p:sp>
-        <p:nvSpPr>
-          <p:cNvPr id="12" name="Shape 10"/>
-          <p:cNvSpPr/>
-          <p:nvPr/>
-        </p:nvSpPr>
-        <p:spPr>
-          <a:xfrm>
-            <a:off x="815940" y="2618228"/>
-            <a:ext cx="10560093" cy="426865"/>
+              <a:t>0.23 → 0.26</a:t>
+            </a:r>
+            <a:endParaRPr lang="en-US" sz="1500" dirty="0"/>
+          </a:p>
+        </p:txBody>
+      </p:sp>
+      <p:sp>
+        <p:nvSpPr>
+          <p:cNvPr id="17" name="Text 15"/>
+          <p:cNvSpPr/>
+          <p:nvPr/>
+        </p:nvSpPr>
+        <p:spPr>
+          <a:xfrm>
+            <a:off x="7689181" y="2736286"/>
+            <a:ext cx="3598565" cy="238747"/>
+          </a:xfrm>
+          <a:prstGeom prst="rect">
+            <a:avLst/>
+          </a:prstGeom>
+          <a:noFill/>
+          <a:ln/>
+        </p:spPr>
+        <p:txBody>
+          <a:bodyPr wrap="square" lIns="0" tIns="0" rIns="0" bIns="0" rtlCol="0" anchor="t">
+            <a:normAutofit/>
+          </a:bodyPr>
+          <a:lstStyle/>
+          <a:p>
+            <a:pPr algn="l" indent="0" marL="0">
+              <a:lnSpc>
+                <a:spcPts val="1680"/>
+              </a:lnSpc>
+              <a:buNone/>
+            </a:pPr>
+            <a:r>
+              <a:rPr lang="en-US" sz="1200" dirty="0">
+                <a:solidFill>
+                  <a:srgbClr val="6B6F76"/>
+                </a:solidFill>
+                <a:latin typeface="Inter" pitchFamily="34" charset="0"/>
+                <a:ea typeface="Inter" pitchFamily="34" charset="-122"/>
+                <a:cs typeface="Inter" pitchFamily="34" charset="-120"/>
+              </a:rPr>
+              <a:t>clean</a:t>
+            </a:r>
+            <a:endParaRPr lang="en-US" sz="1200" dirty="0"/>
+          </a:p>
+        </p:txBody>
+      </p:sp>
+      <p:sp>
+        <p:nvSpPr>
+          <p:cNvPr id="18" name="Shape 16"/>
+          <p:cNvSpPr/>
+          <p:nvPr/>
+        </p:nvSpPr>
+        <p:spPr>
+          <a:xfrm>
+            <a:off x="815940" y="3175750"/>
+            <a:ext cx="10560093" cy="525908"/>
           </a:xfrm>
           <a:prstGeom prst="roundRect">
             <a:avLst>
-              <a:gd name="adj" fmla="val 17107"/>
+              <a:gd name="adj" fmla="val 13886"/>
             </a:avLst>
           </a:prstGeom>
           <a:solidFill>
-            <a:srgbClr val="FFFFFF"/>
+            <a:srgbClr val="E8EFE9"/>
           </a:solidFill>
           <a:ln w="6350">
             <a:solidFill>
-              <a:srgbClr val="DCD9D1"/>
+              <a:srgbClr val="9CC4B4"/>
             </a:solidFill>
             <a:prstDash val="solid"/>
           </a:ln>
@@ -8988,123 +9869,167 @@
       </p:sp>
       <p:sp>
         <p:nvSpPr>
-          <p:cNvPr id="13" name="Text 11"/>
-          <p:cNvSpPr/>
-          <p:nvPr/>
-        </p:nvSpPr>
-        <p:spPr>
-          <a:xfrm>
-            <a:off x="996358" y="2716088"/>
-            <a:ext cx="380987" cy="256545"/>
-          </a:xfrm>
-          <a:prstGeom prst="rect">
-            <a:avLst/>
-          </a:prstGeom>
-          <a:noFill/>
-          <a:ln/>
-        </p:spPr>
-        <p:txBody>
-          <a:bodyPr wrap="square" lIns="0" tIns="0" rIns="0" bIns="0" rtlCol="0" anchor="t">
-            <a:normAutofit/>
-          </a:bodyPr>
-          <a:lstStyle/>
-          <a:p>
-            <a:pPr algn="l" indent="0" marL="0">
-              <a:lnSpc>
-                <a:spcPts val="1820"/>
-              </a:lnSpc>
-              <a:buNone/>
-            </a:pPr>
-            <a:r>
-              <a:rPr lang="en-US" sz="1300" b="1" dirty="0">
-                <a:solidFill>
-                  <a:srgbClr val="B5533A"/>
+          <p:cNvPr id="19" name="Text 17"/>
+          <p:cNvSpPr/>
+          <p:nvPr/>
+        </p:nvSpPr>
+        <p:spPr>
+          <a:xfrm>
+            <a:off x="1009039" y="3327598"/>
+            <a:ext cx="2747004" cy="247623"/>
+          </a:xfrm>
+          <a:prstGeom prst="rect">
+            <a:avLst/>
+          </a:prstGeom>
+          <a:noFill/>
+          <a:ln/>
+        </p:spPr>
+        <p:txBody>
+          <a:bodyPr wrap="square" lIns="0" tIns="0" rIns="0" bIns="0" rtlCol="0" anchor="t">
+            <a:normAutofit/>
+          </a:bodyPr>
+          <a:lstStyle/>
+          <a:p>
+            <a:pPr algn="l" indent="0" marL="0">
+              <a:lnSpc>
+                <a:spcPts val="1750"/>
+              </a:lnSpc>
+              <a:buNone/>
+            </a:pPr>
+            <a:r>
+              <a:rPr lang="en-US" sz="1250" b="1" dirty="0">
+                <a:solidFill>
+                  <a:srgbClr val="16191F"/>
+                </a:solidFill>
+                <a:latin typeface="Inter" pitchFamily="34" charset="0"/>
+                <a:ea typeface="Inter" pitchFamily="34" charset="-122"/>
+                <a:cs typeface="Inter" pitchFamily="34" charset="-120"/>
+              </a:rPr>
+              <a:t>Middling</a:t>
+            </a:r>
+            <a:endParaRPr lang="en-US" sz="1250" dirty="0"/>
+          </a:p>
+        </p:txBody>
+      </p:sp>
+      <p:sp>
+        <p:nvSpPr>
+          <p:cNvPr id="20" name="Text 18"/>
+          <p:cNvSpPr/>
+          <p:nvPr/>
+        </p:nvSpPr>
+        <p:spPr>
+          <a:xfrm>
+            <a:off x="3828423" y="3327598"/>
+            <a:ext cx="1701781" cy="247623"/>
+          </a:xfrm>
+          <a:prstGeom prst="rect">
+            <a:avLst/>
+          </a:prstGeom>
+          <a:noFill/>
+          <a:ln/>
+        </p:spPr>
+        <p:txBody>
+          <a:bodyPr wrap="square" lIns="0" tIns="0" rIns="0" bIns="0" rtlCol="0" anchor="t">
+            <a:normAutofit/>
+          </a:bodyPr>
+          <a:lstStyle/>
+          <a:p>
+            <a:pPr algn="l" indent="0" marL="0">
+              <a:lnSpc>
+                <a:spcPts val="1750"/>
+              </a:lnSpc>
+              <a:buNone/>
+            </a:pPr>
+            <a:r>
+              <a:rPr lang="en-US" sz="1250" dirty="0">
+                <a:solidFill>
+                  <a:srgbClr val="4A4F57"/>
+                </a:solidFill>
+                <a:latin typeface="Inter" pitchFamily="34" charset="0"/>
+                <a:ea typeface="Inter" pitchFamily="34" charset="-122"/>
+                <a:cs typeface="Inter" pitchFamily="34" charset="-120"/>
+              </a:rPr>
+              <a:t>32/80</a:t>
+            </a:r>
+            <a:endParaRPr lang="en-US" sz="1250" dirty="0"/>
+          </a:p>
+        </p:txBody>
+      </p:sp>
+      <p:sp>
+        <p:nvSpPr>
+          <p:cNvPr id="21" name="Text 19"/>
+          <p:cNvSpPr/>
+          <p:nvPr/>
+        </p:nvSpPr>
+        <p:spPr>
+          <a:xfrm>
+            <a:off x="5631795" y="3305361"/>
+            <a:ext cx="1962146" cy="292095"/>
+          </a:xfrm>
+          <a:prstGeom prst="rect">
+            <a:avLst/>
+          </a:prstGeom>
+          <a:noFill/>
+          <a:ln/>
+        </p:spPr>
+        <p:txBody>
+          <a:bodyPr wrap="square" lIns="0" tIns="0" rIns="0" bIns="0" rtlCol="0" anchor="t">
+            <a:normAutofit/>
+          </a:bodyPr>
+          <a:lstStyle/>
+          <a:p>
+            <a:pPr algn="l" indent="0" marL="0">
+              <a:lnSpc>
+                <a:spcPts val="2100"/>
+              </a:lnSpc>
+              <a:buNone/>
+            </a:pPr>
+            <a:r>
+              <a:rPr lang="en-US" sz="1500" dirty="0">
+                <a:solidFill>
+                  <a:srgbClr val="1F7A6C"/>
                 </a:solidFill>
                 <a:latin typeface="Space Grotesk" pitchFamily="34" charset="0"/>
                 <a:ea typeface="Space Grotesk" pitchFamily="34" charset="-122"/>
                 <a:cs typeface="Space Grotesk" pitchFamily="34" charset="-120"/>
               </a:rPr>
-              <a:t>03</a:t>
-            </a:r>
-            <a:endParaRPr lang="en-US" sz="1300" dirty="0"/>
-          </a:p>
-        </p:txBody>
-      </p:sp>
-      <p:sp>
-        <p:nvSpPr>
-          <p:cNvPr id="14" name="Text 12"/>
-          <p:cNvSpPr/>
-          <p:nvPr/>
-        </p:nvSpPr>
-        <p:spPr>
-          <a:xfrm>
-            <a:off x="1478936" y="2732571"/>
-            <a:ext cx="2616163" cy="223530"/>
-          </a:xfrm>
-          <a:prstGeom prst="rect">
-            <a:avLst/>
-          </a:prstGeom>
-          <a:noFill/>
-          <a:ln/>
-        </p:spPr>
-        <p:txBody>
-          <a:bodyPr wrap="square" lIns="0" tIns="0" rIns="0" bIns="0" rtlCol="0" anchor="t">
-            <a:normAutofit/>
-          </a:bodyPr>
-          <a:lstStyle/>
-          <a:p>
-            <a:pPr algn="l" indent="0" marL="0">
-              <a:lnSpc>
-                <a:spcPts val="1560"/>
-              </a:lnSpc>
-              <a:buNone/>
-            </a:pPr>
-            <a:r>
-              <a:rPr lang="en-US" sz="1300" b="1" dirty="0">
-                <a:solidFill>
-                  <a:srgbClr val="16191F"/>
-                </a:solidFill>
-                <a:latin typeface="Inter" pitchFamily="34" charset="0"/>
-                <a:ea typeface="Inter" pitchFamily="34" charset="-122"/>
-                <a:cs typeface="Inter" pitchFamily="34" charset="-120"/>
-              </a:rPr>
-              <a:t>No matched baseline</a:t>
-            </a:r>
-            <a:endParaRPr lang="en-US" sz="1300" dirty="0"/>
-          </a:p>
-        </p:txBody>
-      </p:sp>
-      <p:sp>
-        <p:nvSpPr>
-          <p:cNvPr id="15" name="Text 13"/>
-          <p:cNvSpPr/>
-          <p:nvPr/>
-        </p:nvSpPr>
-        <p:spPr>
-          <a:xfrm>
-            <a:off x="4171291" y="2733067"/>
-            <a:ext cx="7235054" cy="222534"/>
-          </a:xfrm>
-          <a:prstGeom prst="rect">
-            <a:avLst/>
-          </a:prstGeom>
-          <a:noFill/>
-          <a:ln/>
-        </p:spPr>
-        <p:txBody>
-          <a:bodyPr wrap="square" lIns="0" tIns="0" rIns="0" bIns="0" rtlCol="0" anchor="t">
-            <a:normAutofit/>
-          </a:bodyPr>
-          <a:lstStyle/>
-          <a:p>
-            <a:pPr algn="l" indent="0" marL="0">
-              <a:lnSpc>
-                <a:spcPts val="1553"/>
-              </a:lnSpc>
-              <a:buNone/>
-            </a:pPr>
-            <a:r>
-              <a:rPr lang="en-US" sz="1150" dirty="0">
+              <a:t>0.45 → 0.77</a:t>
+            </a:r>
+            <a:endParaRPr lang="en-US" sz="1500" dirty="0"/>
+          </a:p>
+        </p:txBody>
+      </p:sp>
+      <p:sp>
+        <p:nvSpPr>
+          <p:cNvPr id="22" name="Text 20"/>
+          <p:cNvSpPr/>
+          <p:nvPr/>
+        </p:nvSpPr>
+        <p:spPr>
+          <a:xfrm>
+            <a:off x="7689181" y="3332032"/>
+            <a:ext cx="3598565" cy="238747"/>
+          </a:xfrm>
+          <a:prstGeom prst="rect">
+            <a:avLst/>
+          </a:prstGeom>
+          <a:noFill/>
+          <a:ln/>
+        </p:spPr>
+        <p:txBody>
+          <a:bodyPr wrap="square" lIns="0" tIns="0" rIns="0" bIns="0" rtlCol="0" anchor="t">
+            <a:normAutofit/>
+          </a:bodyPr>
+          <a:lstStyle/>
+          <a:p>
+            <a:pPr algn="l" indent="0" marL="0">
+              <a:lnSpc>
+                <a:spcPts val="1680"/>
+              </a:lnSpc>
+              <a:buNone/>
+            </a:pPr>
+            <a:r>
+              <a:rPr lang="en-US" sz="1200" dirty="0">
                 <a:solidFill>
                   <a:srgbClr val="4A4F57"/>
                 </a:solidFill>
@@ -9112,442 +10037,163 @@
                 <a:ea typeface="Inter" pitchFamily="34" charset="-122"/>
                 <a:cs typeface="Inter" pitchFamily="34" charset="-120"/>
               </a:rPr>
-              <a:t>Unguided refinement and scrambled-hotspot controls were never run, so the gain has no reference</a:t>
-            </a:r>
-            <a:endParaRPr lang="en-US" sz="1150" dirty="0"/>
-          </a:p>
-        </p:txBody>
-      </p:sp>
-      <p:sp>
-        <p:nvSpPr>
-          <p:cNvPr id="16" name="Shape 14"/>
-          <p:cNvSpPr/>
-          <p:nvPr/>
-        </p:nvSpPr>
-        <p:spPr>
-          <a:xfrm>
-            <a:off x="815940" y="3108548"/>
-            <a:ext cx="10560093" cy="426865"/>
+              <a:t>clean, diverse</a:t>
+            </a:r>
+            <a:endParaRPr lang="en-US" sz="1200" dirty="0"/>
+          </a:p>
+        </p:txBody>
+      </p:sp>
+      <p:sp>
+        <p:nvSpPr>
+          <p:cNvPr id="23" name="Shape 21"/>
+          <p:cNvSpPr/>
+          <p:nvPr/>
+        </p:nvSpPr>
+        <p:spPr>
+          <a:xfrm>
+            <a:off x="812765" y="3869910"/>
+            <a:ext cx="10566443" cy="1259747"/>
           </a:xfrm>
           <a:prstGeom prst="roundRect">
             <a:avLst>
-              <a:gd name="adj" fmla="val 17107"/>
+              <a:gd name="adj" fmla="val 8065"/>
             </a:avLst>
           </a:prstGeom>
           <a:solidFill>
-            <a:srgbClr val="FFFFFF"/>
+            <a:srgbClr val="2A1D18"/>
           </a:solidFill>
-          <a:ln w="6350">
-            <a:solidFill>
-              <a:srgbClr val="DCD9D1"/>
-            </a:solidFill>
-            <a:prstDash val="solid"/>
-          </a:ln>
-        </p:spPr>
-      </p:sp>
-      <p:sp>
-        <p:nvSpPr>
-          <p:cNvPr id="17" name="Text 15"/>
-          <p:cNvSpPr/>
-          <p:nvPr/>
-        </p:nvSpPr>
-        <p:spPr>
-          <a:xfrm>
-            <a:off x="996358" y="3206409"/>
-            <a:ext cx="380987" cy="256545"/>
-          </a:xfrm>
-          <a:prstGeom prst="rect">
-            <a:avLst/>
-          </a:prstGeom>
-          <a:noFill/>
-          <a:ln/>
-        </p:spPr>
-        <p:txBody>
-          <a:bodyPr wrap="square" lIns="0" tIns="0" rIns="0" bIns="0" rtlCol="0" anchor="t">
-            <a:normAutofit/>
-          </a:bodyPr>
-          <a:lstStyle/>
-          <a:p>
-            <a:pPr algn="l" indent="0" marL="0">
-              <a:lnSpc>
-                <a:spcPts val="1820"/>
-              </a:lnSpc>
-              <a:buNone/>
-            </a:pPr>
-            <a:r>
-              <a:rPr lang="en-US" sz="1300" b="1" dirty="0">
-                <a:solidFill>
-                  <a:srgbClr val="B5533A"/>
+          <a:ln/>
+        </p:spPr>
+      </p:sp>
+      <p:sp>
+        <p:nvSpPr>
+          <p:cNvPr id="24" name="Text 22"/>
+          <p:cNvSpPr/>
+          <p:nvPr/>
+        </p:nvSpPr>
+        <p:spPr>
+          <a:xfrm>
+            <a:off x="1041328" y="4047703"/>
+            <a:ext cx="5075504" cy="238747"/>
+          </a:xfrm>
+          <a:prstGeom prst="rect">
+            <a:avLst/>
+          </a:prstGeom>
+          <a:noFill/>
+          <a:ln/>
+        </p:spPr>
+        <p:txBody>
+          <a:bodyPr wrap="square" lIns="0" tIns="0" rIns="0" bIns="0" rtlCol="0" anchor="t">
+            <a:normAutofit/>
+          </a:bodyPr>
+          <a:lstStyle/>
+          <a:p>
+            <a:pPr algn="l" indent="0" marL="0">
+              <a:lnSpc>
+                <a:spcPts val="1680"/>
+              </a:lnSpc>
+              <a:buNone/>
+            </a:pPr>
+            <a:r>
+              <a:rPr lang="en-US" sz="1400" dirty="0">
+                <a:solidFill>
+                  <a:srgbClr val="E0A35F"/>
                 </a:solidFill>
                 <a:latin typeface="Space Grotesk" pitchFamily="34" charset="0"/>
                 <a:ea typeface="Space Grotesk" pitchFamily="34" charset="-122"/>
                 <a:cs typeface="Space Grotesk" pitchFamily="34" charset="-120"/>
               </a:rPr>
-              <a:t>04</a:t>
-            </a:r>
-            <a:endParaRPr lang="en-US" sz="1300" dirty="0"/>
-          </a:p>
-        </p:txBody>
-      </p:sp>
-      <p:sp>
-        <p:nvSpPr>
-          <p:cNvPr id="18" name="Text 16"/>
-          <p:cNvSpPr/>
-          <p:nvPr/>
-        </p:nvSpPr>
-        <p:spPr>
-          <a:xfrm>
-            <a:off x="1478936" y="3222892"/>
-            <a:ext cx="2616163" cy="223530"/>
-          </a:xfrm>
-          <a:prstGeom prst="rect">
-            <a:avLst/>
-          </a:prstGeom>
-          <a:noFill/>
-          <a:ln/>
-        </p:spPr>
-        <p:txBody>
-          <a:bodyPr wrap="square" lIns="0" tIns="0" rIns="0" bIns="0" rtlCol="0" anchor="t">
-            <a:normAutofit/>
-          </a:bodyPr>
-          <a:lstStyle/>
-          <a:p>
-            <a:pPr algn="l" indent="0" marL="0">
-              <a:lnSpc>
-                <a:spcPts val="1560"/>
-              </a:lnSpc>
-              <a:buNone/>
-            </a:pPr>
-            <a:r>
-              <a:rPr lang="en-US" sz="1300" b="1" dirty="0">
-                <a:solidFill>
-                  <a:srgbClr val="16191F"/>
-                </a:solidFill>
-                <a:latin typeface="Inter" pitchFamily="34" charset="0"/>
-                <a:ea typeface="Inter" pitchFamily="34" charset="-122"/>
-                <a:cs typeface="Inter" pitchFamily="34" charset="-120"/>
-              </a:rPr>
-              <a:t>Highly repetitive sequences</a:t>
-            </a:r>
-            <a:endParaRPr lang="en-US" sz="1300" dirty="0"/>
-          </a:p>
-        </p:txBody>
-      </p:sp>
-      <p:sp>
-        <p:nvSpPr>
-          <p:cNvPr id="19" name="Text 17"/>
-          <p:cNvSpPr/>
-          <p:nvPr/>
-        </p:nvSpPr>
-        <p:spPr>
-          <a:xfrm>
-            <a:off x="4171291" y="3223388"/>
-            <a:ext cx="7235054" cy="222534"/>
-          </a:xfrm>
-          <a:prstGeom prst="rect">
-            <a:avLst/>
-          </a:prstGeom>
-          <a:noFill/>
-          <a:ln/>
-        </p:spPr>
-        <p:txBody>
-          <a:bodyPr wrap="square" lIns="0" tIns="0" rIns="0" bIns="0" rtlCol="0" anchor="t">
-            <a:normAutofit/>
-          </a:bodyPr>
-          <a:lstStyle/>
-          <a:p>
-            <a:pPr algn="l" indent="0" marL="0">
-              <a:lnSpc>
-                <a:spcPts val="1553"/>
-              </a:lnSpc>
-              <a:buNone/>
-            </a:pPr>
-            <a:r>
-              <a:rPr lang="en-US" sz="1150" dirty="0">
-                <a:solidFill>
-                  <a:srgbClr val="4A4F57"/>
-                </a:solidFill>
-                <a:latin typeface="Inter" pitchFamily="34" charset="0"/>
-                <a:ea typeface="Inter" pitchFamily="34" charset="-122"/>
-                <a:cs typeface="Inter" pitchFamily="34" charset="-120"/>
-              </a:rPr>
-              <a:t>70–76% glutamate; better scores may reflect a model artifact rather than a better design</a:t>
-            </a:r>
-            <a:endParaRPr lang="en-US" sz="1150" dirty="0"/>
-          </a:p>
-        </p:txBody>
-      </p:sp>
-      <p:sp>
-        <p:nvSpPr>
-          <p:cNvPr id="20" name="Shape 18"/>
-          <p:cNvSpPr/>
-          <p:nvPr/>
-        </p:nvSpPr>
-        <p:spPr>
-          <a:xfrm>
-            <a:off x="815940" y="3598869"/>
-            <a:ext cx="10560093" cy="426865"/>
-          </a:xfrm>
-          <a:prstGeom prst="roundRect">
-            <a:avLst>
-              <a:gd name="adj" fmla="val 17107"/>
-            </a:avLst>
-          </a:prstGeom>
-          <a:solidFill>
-            <a:srgbClr val="FFFFFF"/>
-          </a:solidFill>
-          <a:ln w="6350">
-            <a:solidFill>
-              <a:srgbClr val="DCD9D1"/>
-            </a:solidFill>
-            <a:prstDash val="solid"/>
-          </a:ln>
-        </p:spPr>
-      </p:sp>
-      <p:sp>
-        <p:nvSpPr>
-          <p:cNvPr id="21" name="Text 19"/>
-          <p:cNvSpPr/>
-          <p:nvPr/>
-        </p:nvSpPr>
-        <p:spPr>
-          <a:xfrm>
-            <a:off x="996358" y="3696729"/>
-            <a:ext cx="380987" cy="256545"/>
-          </a:xfrm>
-          <a:prstGeom prst="rect">
-            <a:avLst/>
-          </a:prstGeom>
-          <a:noFill/>
-          <a:ln/>
-        </p:spPr>
-        <p:txBody>
-          <a:bodyPr wrap="square" lIns="0" tIns="0" rIns="0" bIns="0" rtlCol="0" anchor="t">
-            <a:normAutofit/>
-          </a:bodyPr>
-          <a:lstStyle/>
-          <a:p>
-            <a:pPr algn="l" indent="0" marL="0">
-              <a:lnSpc>
-                <a:spcPts val="1820"/>
-              </a:lnSpc>
-              <a:buNone/>
-            </a:pPr>
-            <a:r>
-              <a:rPr lang="en-US" sz="1300" b="1" dirty="0">
-                <a:solidFill>
-                  <a:srgbClr val="B5533A"/>
+              <a:t>The control we have not run</a:t>
+            </a:r>
+            <a:endParaRPr lang="en-US" sz="1400" dirty="0"/>
+          </a:p>
+        </p:txBody>
+      </p:sp>
+      <p:sp>
+        <p:nvSpPr>
+          <p:cNvPr id="25" name="Text 23"/>
+          <p:cNvSpPr/>
+          <p:nvPr/>
+        </p:nvSpPr>
+        <p:spPr>
+          <a:xfrm>
+            <a:off x="1041328" y="4311817"/>
+            <a:ext cx="5075504" cy="665441"/>
+          </a:xfrm>
+          <a:prstGeom prst="rect">
+            <a:avLst/>
+          </a:prstGeom>
+          <a:noFill/>
+          <a:ln/>
+        </p:spPr>
+        <p:txBody>
+          <a:bodyPr wrap="square" lIns="0" tIns="0" rIns="0" bIns="0" rtlCol="0" anchor="t">
+            <a:normAutofit/>
+          </a:bodyPr>
+          <a:lstStyle/>
+          <a:p>
+            <a:pPr algn="l" indent="0" marL="0">
+              <a:lnSpc>
+                <a:spcPts val="1680"/>
+              </a:lnSpc>
+              <a:buNone/>
+            </a:pPr>
+            <a:r>
+              <a:rPr lang="en-US" sz="1200" dirty="0">
+                <a:solidFill>
+                  <a:srgbClr val="E8D9CF"/>
+                </a:solidFill>
+                <a:latin typeface="Inter" pitchFamily="34" charset="0"/>
+                <a:ea typeface="Inter" pitchFamily="34" charset="-122"/>
+                <a:cs typeface="Inter" pitchFamily="34" charset="-120"/>
+              </a:rPr>
+              <a:t>Lock the same number of positions at random. Redesigning half a mediocre sequence against the real target may help whichever positions are held.</a:t>
+            </a:r>
+            <a:endParaRPr lang="en-US" sz="1200" dirty="0"/>
+          </a:p>
+        </p:txBody>
+      </p:sp>
+      <p:sp>
+        <p:nvSpPr>
+          <p:cNvPr id="26" name="Text 24"/>
+          <p:cNvSpPr/>
+          <p:nvPr/>
+        </p:nvSpPr>
+        <p:spPr>
+          <a:xfrm>
+            <a:off x="6222971" y="4047703"/>
+            <a:ext cx="5075504" cy="238747"/>
+          </a:xfrm>
+          <a:prstGeom prst="rect">
+            <a:avLst/>
+          </a:prstGeom>
+          <a:noFill/>
+          <a:ln/>
+        </p:spPr>
+        <p:txBody>
+          <a:bodyPr wrap="square" lIns="0" tIns="0" rIns="0" bIns="0" rtlCol="0" anchor="t">
+            <a:normAutofit/>
+          </a:bodyPr>
+          <a:lstStyle/>
+          <a:p>
+            <a:pPr algn="l" indent="0" marL="0">
+              <a:lnSpc>
+                <a:spcPts val="1680"/>
+              </a:lnSpc>
+              <a:buNone/>
+            </a:pPr>
+            <a:r>
+              <a:rPr lang="en-US" sz="1400" dirty="0">
+                <a:solidFill>
+                  <a:srgbClr val="E0A35F"/>
                 </a:solidFill>
                 <a:latin typeface="Space Grotesk" pitchFamily="34" charset="0"/>
                 <a:ea typeface="Space Grotesk" pitchFamily="34" charset="-122"/>
                 <a:cs typeface="Space Grotesk" pitchFamily="34" charset="-120"/>
               </a:rPr>
-              <a:t>05</a:t>
-            </a:r>
-            <a:endParaRPr lang="en-US" sz="1300" dirty="0"/>
-          </a:p>
-        </p:txBody>
-      </p:sp>
-      <p:sp>
-        <p:nvSpPr>
-          <p:cNvPr id="22" name="Text 20"/>
-          <p:cNvSpPr/>
-          <p:nvPr/>
-        </p:nvSpPr>
-        <p:spPr>
-          <a:xfrm>
-            <a:off x="1478936" y="3713212"/>
-            <a:ext cx="2616163" cy="223530"/>
-          </a:xfrm>
-          <a:prstGeom prst="rect">
-            <a:avLst/>
-          </a:prstGeom>
-          <a:noFill/>
-          <a:ln/>
-        </p:spPr>
-        <p:txBody>
-          <a:bodyPr wrap="square" lIns="0" tIns="0" rIns="0" bIns="0" rtlCol="0" anchor="t">
-            <a:normAutofit/>
-          </a:bodyPr>
-          <a:lstStyle/>
-          <a:p>
-            <a:pPr algn="l" indent="0" marL="0">
-              <a:lnSpc>
-                <a:spcPts val="1560"/>
-              </a:lnSpc>
-              <a:buNone/>
-            </a:pPr>
-            <a:r>
-              <a:rPr lang="en-US" sz="1300" b="1" dirty="0">
-                <a:solidFill>
-                  <a:srgbClr val="16191F"/>
-                </a:solidFill>
-                <a:latin typeface="Inter" pitchFamily="34" charset="0"/>
-                <a:ea typeface="Inter" pitchFamily="34" charset="-122"/>
-                <a:cs typeface="Inter" pitchFamily="34" charset="-120"/>
-              </a:rPr>
-              <a:t>Missing consistency checks</a:t>
-            </a:r>
-            <a:endParaRPr lang="en-US" sz="1300" dirty="0"/>
-          </a:p>
-        </p:txBody>
-      </p:sp>
-      <p:sp>
-        <p:nvSpPr>
-          <p:cNvPr id="23" name="Text 21"/>
-          <p:cNvSpPr/>
-          <p:nvPr/>
-        </p:nvSpPr>
-        <p:spPr>
-          <a:xfrm>
-            <a:off x="4171291" y="3713714"/>
-            <a:ext cx="7235054" cy="222534"/>
-          </a:xfrm>
-          <a:prstGeom prst="rect">
-            <a:avLst/>
-          </a:prstGeom>
-          <a:noFill/>
-          <a:ln/>
-        </p:spPr>
-        <p:txBody>
-          <a:bodyPr wrap="square" lIns="0" tIns="0" rIns="0" bIns="0" rtlCol="0" anchor="t">
-            <a:normAutofit/>
-          </a:bodyPr>
-          <a:lstStyle/>
-          <a:p>
-            <a:pPr algn="l" indent="0" marL="0">
-              <a:lnSpc>
-                <a:spcPts val="1553"/>
-              </a:lnSpc>
-              <a:buNone/>
-            </a:pPr>
-            <a:r>
-              <a:rPr lang="en-US" sz="1150" dirty="0">
-                <a:solidFill>
-                  <a:srgbClr val="4A4F57"/>
-                </a:solidFill>
-                <a:latin typeface="Inter" pitchFamily="34" charset="0"/>
-                <a:ea typeface="Inter" pitchFamily="34" charset="-122"/>
-                <a:cs typeface="Inter" pitchFamily="34" charset="-120"/>
-              </a:rPr>
-              <a:t>No self-consistency RMSD, and raw prediction artifacts from some runs were not preserved</a:t>
-            </a:r>
-            <a:endParaRPr lang="en-US" sz="1150" dirty="0"/>
-          </a:p>
-        </p:txBody>
-      </p:sp>
-      <p:sp>
-        <p:nvSpPr>
-          <p:cNvPr id="24" name="Shape 22"/>
-          <p:cNvSpPr/>
-          <p:nvPr/>
-        </p:nvSpPr>
-        <p:spPr>
-          <a:xfrm>
-            <a:off x="815940" y="4089189"/>
-            <a:ext cx="10560093" cy="426865"/>
-          </a:xfrm>
-          <a:prstGeom prst="roundRect">
-            <a:avLst>
-              <a:gd name="adj" fmla="val 17107"/>
-            </a:avLst>
-          </a:prstGeom>
-          <a:solidFill>
-            <a:srgbClr val="F0ECE2"/>
-          </a:solidFill>
-          <a:ln w="6350">
-            <a:solidFill>
-              <a:srgbClr val="DCD9D1"/>
-            </a:solidFill>
-            <a:prstDash val="solid"/>
-          </a:ln>
-        </p:spPr>
-      </p:sp>
-      <p:sp>
-        <p:nvSpPr>
-          <p:cNvPr id="25" name="Text 23"/>
-          <p:cNvSpPr/>
-          <p:nvPr/>
-        </p:nvSpPr>
-        <p:spPr>
-          <a:xfrm>
-            <a:off x="996358" y="4187050"/>
-            <a:ext cx="380987" cy="256545"/>
-          </a:xfrm>
-          <a:prstGeom prst="rect">
-            <a:avLst/>
-          </a:prstGeom>
-          <a:noFill/>
-          <a:ln/>
-        </p:spPr>
-        <p:txBody>
-          <a:bodyPr wrap="square" lIns="0" tIns="0" rIns="0" bIns="0" rtlCol="0" anchor="t">
-            <a:normAutofit/>
-          </a:bodyPr>
-          <a:lstStyle/>
-          <a:p>
-            <a:pPr algn="l" indent="0" marL="0">
-              <a:lnSpc>
-                <a:spcPts val="1820"/>
-              </a:lnSpc>
-              <a:buNone/>
-            </a:pPr>
-            <a:r>
-              <a:rPr lang="en-US" sz="1300" b="1" dirty="0">
-                <a:solidFill>
-                  <a:srgbClr val="8A6A2F"/>
-                </a:solidFill>
-                <a:latin typeface="Space Grotesk" pitchFamily="34" charset="0"/>
-                <a:ea typeface="Space Grotesk" pitchFamily="34" charset="-122"/>
-                <a:cs typeface="Space Grotesk" pitchFamily="34" charset="-120"/>
-              </a:rPr>
-              <a:t>06</a:t>
-            </a:r>
-            <a:endParaRPr lang="en-US" sz="1300" dirty="0"/>
-          </a:p>
-        </p:txBody>
-      </p:sp>
-      <p:sp>
-        <p:nvSpPr>
-          <p:cNvPr id="26" name="Text 24"/>
-          <p:cNvSpPr/>
-          <p:nvPr/>
-        </p:nvSpPr>
-        <p:spPr>
-          <a:xfrm>
-            <a:off x="1478936" y="4203539"/>
-            <a:ext cx="2616163" cy="223530"/>
-          </a:xfrm>
-          <a:prstGeom prst="rect">
-            <a:avLst/>
-          </a:prstGeom>
-          <a:noFill/>
-          <a:ln/>
-        </p:spPr>
-        <p:txBody>
-          <a:bodyPr wrap="square" lIns="0" tIns="0" rIns="0" bIns="0" rtlCol="0" anchor="t">
-            <a:normAutofit/>
-          </a:bodyPr>
-          <a:lstStyle/>
-          <a:p>
-            <a:pPr algn="l" indent="0" marL="0">
-              <a:lnSpc>
-                <a:spcPts val="1560"/>
-              </a:lnSpc>
-              <a:buNone/>
-            </a:pPr>
-            <a:r>
-              <a:rPr lang="en-US" sz="1300" b="1" dirty="0">
-                <a:solidFill>
-                  <a:srgbClr val="4A4F57"/>
-                </a:solidFill>
-                <a:latin typeface="Inter" pitchFamily="34" charset="0"/>
-                <a:ea typeface="Inter" pitchFamily="34" charset="-122"/>
-                <a:cs typeface="Inter" pitchFamily="34" charset="-120"/>
-              </a:rPr>
-              <a:t>Secondary: lab-ready output</a:t>
-            </a:r>
-            <a:endParaRPr lang="en-US" sz="1300" dirty="0"/>
+              <a:t>Effects are inconsistent</a:t>
+            </a:r>
+            <a:endParaRPr lang="en-US" sz="1400" dirty="0"/>
           </a:p>
         </p:txBody>
       </p:sp>
@@ -9559,237 +10205,39 @@
         </p:nvSpPr>
         <p:spPr>
           <a:xfrm>
-            <a:off x="4171291" y="4204035"/>
-            <a:ext cx="7235054" cy="222534"/>
-          </a:xfrm>
-          <a:prstGeom prst="rect">
-            <a:avLst/>
-          </a:prstGeom>
-          <a:noFill/>
-          <a:ln/>
-        </p:spPr>
-        <p:txBody>
-          <a:bodyPr wrap="square" lIns="0" tIns="0" rIns="0" bIns="0" rtlCol="0" anchor="t">
-            <a:normAutofit/>
-          </a:bodyPr>
-          <a:lstStyle/>
-          <a:p>
-            <a:pPr algn="l" indent="0" marL="0">
-              <a:lnSpc>
-                <a:spcPts val="1553"/>
-              </a:lnSpc>
-              <a:buNone/>
-            </a:pPr>
-            <a:r>
-              <a:rPr lang="en-US" sz="1150" dirty="0">
-                <a:solidFill>
-                  <a:srgbClr val="6B6F76"/>
-                </a:solidFill>
-                <a:latin typeface="Inter" pitchFamily="34" charset="0"/>
-                <a:ea typeface="Inter" pitchFamily="34" charset="-122"/>
-                <a:cs typeface="Inter" pitchFamily="34" charset="-120"/>
-              </a:rPr>
-              <a:t>DNA preparation and extra scoring matter only once the gaps above are closed</a:t>
-            </a:r>
-            <a:endParaRPr lang="en-US" sz="1150" dirty="0"/>
-          </a:p>
-        </p:txBody>
-      </p:sp>
-      <p:sp>
-        <p:nvSpPr>
-          <p:cNvPr id="28" name="Shape 26"/>
-          <p:cNvSpPr/>
-          <p:nvPr/>
-        </p:nvSpPr>
-        <p:spPr>
-          <a:xfrm>
-            <a:off x="812765" y="4646216"/>
-            <a:ext cx="10566443" cy="987935"/>
-          </a:xfrm>
-          <a:prstGeom prst="roundRect">
-            <a:avLst>
-              <a:gd name="adj" fmla="val 8999"/>
-            </a:avLst>
-          </a:prstGeom>
-          <a:solidFill>
-            <a:srgbClr val="1F3A35"/>
-          </a:solidFill>
-          <a:ln/>
-        </p:spPr>
-      </p:sp>
-      <p:sp>
-        <p:nvSpPr>
-          <p:cNvPr id="29" name="Text 27"/>
-          <p:cNvSpPr/>
-          <p:nvPr/>
-        </p:nvSpPr>
-        <p:spPr>
-          <a:xfrm>
-            <a:off x="1041328" y="4811285"/>
-            <a:ext cx="5075504" cy="200661"/>
-          </a:xfrm>
-          <a:prstGeom prst="rect">
-            <a:avLst/>
-          </a:prstGeom>
-          <a:noFill/>
-          <a:ln/>
-        </p:spPr>
-        <p:txBody>
-          <a:bodyPr wrap="square" lIns="0" tIns="0" rIns="0" bIns="0" rtlCol="0" anchor="t">
-            <a:normAutofit/>
-          </a:bodyPr>
-          <a:lstStyle/>
-          <a:p>
-            <a:pPr algn="l" indent="0" marL="0">
-              <a:lnSpc>
-                <a:spcPts val="1380"/>
-              </a:lnSpc>
-              <a:buNone/>
-            </a:pPr>
-            <a:r>
-              <a:rPr lang="en-US" sz="1150" b="1" spc="50" kern="0" dirty="0">
-                <a:solidFill>
-                  <a:srgbClr val="5FBFA8"/>
-                </a:solidFill>
-                <a:latin typeface="Inter" pitchFamily="34" charset="0"/>
-                <a:ea typeface="Inter" pitchFamily="34" charset="-122"/>
-                <a:cs typeface="Inter" pitchFamily="34" charset="-120"/>
-              </a:rPr>
-              <a:t>NEXT EXPERIMENT</a:t>
-            </a:r>
-            <a:endParaRPr lang="en-US" sz="1150" dirty="0"/>
-          </a:p>
-        </p:txBody>
-      </p:sp>
-      <p:sp>
-        <p:nvSpPr>
-          <p:cNvPr id="30" name="Text 28"/>
-          <p:cNvSpPr/>
-          <p:nvPr/>
-        </p:nvSpPr>
-        <p:spPr>
-          <a:xfrm>
-            <a:off x="1041328" y="5024636"/>
-            <a:ext cx="5075504" cy="469846"/>
-          </a:xfrm>
-          <a:prstGeom prst="rect">
-            <a:avLst/>
-          </a:prstGeom>
-          <a:noFill/>
-          <a:ln/>
-        </p:spPr>
-        <p:txBody>
-          <a:bodyPr wrap="square" lIns="0" tIns="0" rIns="0" bIns="0" rtlCol="0" anchor="t">
-            <a:normAutofit/>
-          </a:bodyPr>
-          <a:lstStyle/>
-          <a:p>
-            <a:pPr algn="l" indent="0" marL="0">
-              <a:lnSpc>
-                <a:spcPts val="1750"/>
-              </a:lnSpc>
-              <a:buNone/>
-            </a:pPr>
-            <a:r>
-              <a:rPr lang="en-US" sz="1250" dirty="0">
-                <a:solidFill>
-                  <a:srgbClr val="F6F5F1"/>
-                </a:solidFill>
-                <a:latin typeface="Inter" pitchFamily="34" charset="0"/>
-                <a:ea typeface="Inter" pitchFamily="34" charset="-122"/>
-                <a:cs typeface="Inter" pitchFamily="34" charset="-120"/>
-              </a:rPr>
-              <a:t>Independent RFdiffusion seeds, with a matched unguided-refinement baseline.</a:t>
-            </a:r>
-            <a:endParaRPr lang="en-US" sz="1250" dirty="0"/>
-          </a:p>
-        </p:txBody>
-      </p:sp>
-      <p:sp>
-        <p:nvSpPr>
-          <p:cNvPr id="31" name="Text 29"/>
-          <p:cNvSpPr/>
-          <p:nvPr/>
-        </p:nvSpPr>
-        <p:spPr>
-          <a:xfrm>
-            <a:off x="6222971" y="4922379"/>
-            <a:ext cx="5075504" cy="200661"/>
-          </a:xfrm>
-          <a:prstGeom prst="rect">
-            <a:avLst/>
-          </a:prstGeom>
-          <a:noFill/>
-          <a:ln/>
-        </p:spPr>
-        <p:txBody>
-          <a:bodyPr wrap="square" lIns="0" tIns="0" rIns="0" bIns="0" rtlCol="0" anchor="t">
-            <a:normAutofit/>
-          </a:bodyPr>
-          <a:lstStyle/>
-          <a:p>
-            <a:pPr algn="l" indent="0" marL="0">
-              <a:lnSpc>
-                <a:spcPts val="1380"/>
-              </a:lnSpc>
-              <a:buNone/>
-            </a:pPr>
-            <a:r>
-              <a:rPr lang="en-US" sz="1150" b="1" spc="50" kern="0" dirty="0">
-                <a:solidFill>
-                  <a:srgbClr val="E0A35F"/>
-                </a:solidFill>
-                <a:latin typeface="Inter" pitchFamily="34" charset="0"/>
-                <a:ea typeface="Inter" pitchFamily="34" charset="-122"/>
-                <a:cs typeface="Inter" pitchFamily="34" charset="-120"/>
-              </a:rPr>
-              <a:t>THE QUESTION</a:t>
-            </a:r>
-            <a:endParaRPr lang="en-US" sz="1150" dirty="0"/>
-          </a:p>
-        </p:txBody>
-      </p:sp>
-      <p:sp>
-        <p:nvSpPr>
-          <p:cNvPr id="32" name="Text 30"/>
-          <p:cNvSpPr/>
-          <p:nvPr/>
-        </p:nvSpPr>
-        <p:spPr>
-          <a:xfrm>
-            <a:off x="6222971" y="5135724"/>
-            <a:ext cx="5075504" cy="247623"/>
-          </a:xfrm>
-          <a:prstGeom prst="rect">
-            <a:avLst/>
-          </a:prstGeom>
-          <a:noFill/>
-          <a:ln/>
-        </p:spPr>
-        <p:txBody>
-          <a:bodyPr wrap="square" lIns="0" tIns="0" rIns="0" bIns="0" rtlCol="0" anchor="t">
-            <a:normAutofit/>
-          </a:bodyPr>
-          <a:lstStyle/>
-          <a:p>
-            <a:pPr algn="l" indent="0" marL="0">
-              <a:lnSpc>
-                <a:spcPts val="1750"/>
-              </a:lnSpc>
-              <a:buNone/>
-            </a:pPr>
-            <a:r>
-              <a:rPr lang="en-US" sz="1250" dirty="0">
-                <a:solidFill>
-                  <a:srgbClr val="F6F5F1"/>
-                </a:solidFill>
-                <a:latin typeface="Inter" pitchFamily="34" charset="0"/>
-                <a:ea typeface="Inter" pitchFamily="34" charset="-122"/>
-                <a:cs typeface="Inter" pitchFamily="34" charset="-120"/>
-              </a:rPr>
-              <a:t>Can an agent choose better next experiments at equal compute?</a:t>
-            </a:r>
-            <a:endParaRPr lang="en-US" sz="1250" dirty="0"/>
+            <a:off x="6222971" y="4311817"/>
+            <a:ext cx="5075504" cy="452094"/>
+          </a:xfrm>
+          <a:prstGeom prst="rect">
+            <a:avLst/>
+          </a:prstGeom>
+          <a:noFill/>
+          <a:ln/>
+        </p:spPr>
+        <p:txBody>
+          <a:bodyPr wrap="square" lIns="0" tIns="0" rIns="0" bIns="0" rtlCol="0" anchor="t">
+            <a:normAutofit/>
+          </a:bodyPr>
+          <a:lstStyle/>
+          <a:p>
+            <a:pPr algn="l" indent="0" marL="0">
+              <a:lnSpc>
+                <a:spcPts val="1680"/>
+              </a:lnSpc>
+              <a:buNone/>
+            </a:pPr>
+            <a:r>
+              <a:rPr lang="en-US" sz="1200" dirty="0">
+                <a:solidFill>
+                  <a:srgbClr val="E8D9CF"/>
+                </a:solidFill>
+                <a:latin typeface="Inter" pitchFamily="34" charset="0"/>
+                <a:ea typeface="Inter" pitchFamily="34" charset="-122"/>
+                <a:cs typeface="Inter" pitchFamily="34" charset="-120"/>
+              </a:rPr>
+              <a:t>0, +0.03, +0.32 across three trials. That is not a characterised effect yet, and only the best of ~8 samples per call was verified.</a:t>
+            </a:r>
+            <a:endParaRPr lang="en-US" sz="1200" dirty="0"/>
           </a:p>
         </p:txBody>
       </p:sp>
